--- a/Slides/unit_7_prog_4.pptx
+++ b/Slides/unit_7_prog_4.pptx
@@ -45,26 +45,19 @@
   <p:notesSz cx="7099300" cy="10234613"/>
   <p:embeddedFontLst>
     <p:embeddedFont>
-      <p:font typeface="Blackadder ITC" panose="04020505051007020D02" pitchFamily="82" charset="0"/>
+      <p:font typeface="Blackadder ITC" pitchFamily="82" charset="77"/>
       <p:regular r:id="rId35"/>
     </p:embeddedFont>
     <p:embeddedFont>
-      <p:font typeface="Calibri" panose="020F0502020204030204" pitchFamily="34" charset="0"/>
+      <p:font typeface="Cambria Math" panose="02040503050406030204" pitchFamily="18" charset="0"/>
       <p:regular r:id="rId36"/>
-      <p:bold r:id="rId37"/>
-      <p:italic r:id="rId38"/>
-      <p:boldItalic r:id="rId39"/>
-    </p:embeddedFont>
-    <p:embeddedFont>
-      <p:font typeface="Cambria Math" panose="02040503050406030204" pitchFamily="18" charset="0"/>
-      <p:regular r:id="rId40"/>
     </p:embeddedFont>
     <p:embeddedFont>
       <p:font typeface="Consolas" panose="020B0609020204030204" pitchFamily="49" charset="0"/>
-      <p:regular r:id="rId41"/>
-      <p:bold r:id="rId42"/>
-      <p:italic r:id="rId43"/>
-      <p:boldItalic r:id="rId44"/>
+      <p:regular r:id="rId37"/>
+      <p:bold r:id="rId38"/>
+      <p:italic r:id="rId39"/>
+      <p:boldItalic r:id="rId40"/>
     </p:embeddedFont>
   </p:embeddedFontLst>
   <p:defaultTextStyle>
@@ -312,7 +305,7 @@
       </p15:sldGuideLst>
     </p:ext>
     <p:ext uri="http://customooxmlschemas.google.com/">
-      <go:slidesCustomData xmlns:go="http://customooxmlschemas.google.com/" xmlns:ahyp="http://schemas.microsoft.com/office/drawing/2018/hyperlinkcolor" xmlns:p15="http://schemas.microsoft.com/office/powerpoint/2012/main" xmlns:p14="http://schemas.microsoft.com/office/powerpoint/2010/main" xmlns:com="http://schemas.openxmlformats.org/drawingml/2006/compatibility" xmlns:pvml="urn:schemas-microsoft-com:office:powerpoint" xmlns:v="urn:schemas-microsoft-com:vml" xmlns:o="urn:schemas-microsoft-com:office:office" xmlns:dgm="http://schemas.openxmlformats.org/drawingml/2006/diagram" xmlns:c="http://schemas.openxmlformats.org/drawingml/2006/chart" xmlns:mv="urn:schemas-microsoft-com:mac:vml" xmlns:mc="http://schemas.openxmlformats.org/markup-compatibility/2006" xmlns="" r:id="rId80" roundtripDataSignature="AMtx7milieXwv5OUJdQk1cj/252aZuXcIQ=="/>
+      <go:slidesCustomData xmlns="" xmlns:mc="http://schemas.openxmlformats.org/markup-compatibility/2006" xmlns:mv="urn:schemas-microsoft-com:mac:vml" xmlns:c="http://schemas.openxmlformats.org/drawingml/2006/chart" xmlns:dgm="http://schemas.openxmlformats.org/drawingml/2006/diagram" xmlns:o="urn:schemas-microsoft-com:office:office" xmlns:v="urn:schemas-microsoft-com:vml" xmlns:pvml="urn:schemas-microsoft-com:office:powerpoint" xmlns:com="http://schemas.openxmlformats.org/drawingml/2006/compatibility" xmlns:p14="http://schemas.microsoft.com/office/powerpoint/2010/main" xmlns:p15="http://schemas.microsoft.com/office/powerpoint/2012/main" xmlns:ahyp="http://schemas.microsoft.com/office/drawing/2018/hyperlinkcolor" xmlns:go="http://customooxmlschemas.google.com/" r:id="rId80" roundtripDataSignature="AMtx7milieXwv5OUJdQk1cj/252aZuXcIQ=="/>
     </p:ext>
   </p:extLst>
 </p:presentation>
@@ -321,9 +314,7 @@
 <file path=ppt/revisionInfo.xml><?xml version="1.0" encoding="utf-8"?>
 <p1510:revInfo xmlns:a="http://schemas.openxmlformats.org/drawingml/2006/main" xmlns:r="http://schemas.openxmlformats.org/officeDocument/2006/relationships" xmlns:p1510="http://schemas.microsoft.com/office/powerpoint/2015/10/main">
   <p1510:revLst>
-    <p1510:client id="{690A8561-0462-61C5-122F-B37E0D33A249}" v="452" dt="2022-02-25T18:00:28.886"/>
-    <p1510:client id="{6650C529-5FF6-DF91-408E-CA6877BEA450}" v="10" dt="2022-02-28T12:12:33.858"/>
-    <p1510:client id="{B0536F86-C883-7A67-11FA-EA747C9A93F9}" v="3132" dt="2022-02-27T19:54:03.084"/>
+    <p1510:client id="{DF2046C9-5CA7-6749-A58F-6F62A7ACF621}" v="38" dt="2025-11-11T20:28:27.254"/>
   </p1510:revLst>
 </p1510:revInfo>
 </file>
@@ -331,2268 +322,92 @@
 <file path=ppt/changesInfos/changesInfo1.xml><?xml version="1.0" encoding="utf-8"?>
 <pc:chgInfo xmlns:a="http://schemas.openxmlformats.org/drawingml/2006/main" xmlns:r="http://schemas.openxmlformats.org/officeDocument/2006/relationships" xmlns:ac="http://schemas.microsoft.com/office/drawing/2013/main/command" xmlns:pc="http://schemas.microsoft.com/office/powerpoint/2013/main/command">
   <pc:docChgLst>
-    <pc:chgData name="Daniel Dan" userId="S::daniel.dan@modul.ac.at::e2a95533-a292-400e-bcf5-c81090ef720f" providerId="AD" clId="Web-{B0536F86-C883-7A67-11FA-EA747C9A93F9}"/>
-    <pc:docChg chg="addSld delSld modSld sldOrd">
-      <pc:chgData name="Daniel Dan" userId="S::daniel.dan@modul.ac.at::e2a95533-a292-400e-bcf5-c81090ef720f" providerId="AD" clId="Web-{B0536F86-C883-7A67-11FA-EA747C9A93F9}" dt="2022-02-27T19:54:03.084" v="2519"/>
+    <pc:chgData name="Ingo Frommholz" userId="ee3b4549-206f-4e4f-93a1-b7ff676f0af7" providerId="ADAL" clId="{5F8971C4-3D52-5FAB-A951-9912A46CDBB0}"/>
+    <pc:docChg chg="modSld">
+      <pc:chgData name="Ingo Frommholz" userId="ee3b4549-206f-4e4f-93a1-b7ff676f0af7" providerId="ADAL" clId="{5F8971C4-3D52-5FAB-A951-9912A46CDBB0}" dt="2025-11-11T20:28:27.254" v="74"/>
       <pc:docMkLst>
         <pc:docMk/>
       </pc:docMkLst>
-      <pc:sldChg chg="modSp">
-        <pc:chgData name="Daniel Dan" userId="S::daniel.dan@modul.ac.at::e2a95533-a292-400e-bcf5-c81090ef720f" providerId="AD" clId="Web-{B0536F86-C883-7A67-11FA-EA747C9A93F9}" dt="2022-02-27T19:41:23.940" v="1323" actId="20577"/>
+      <pc:sldChg chg="modSp mod">
+        <pc:chgData name="Ingo Frommholz" userId="ee3b4549-206f-4e4f-93a1-b7ff676f0af7" providerId="ADAL" clId="{5F8971C4-3D52-5FAB-A951-9912A46CDBB0}" dt="2025-11-11T20:28:02.199" v="73" actId="1076"/>
         <pc:sldMkLst>
           <pc:docMk/>
-          <pc:sldMk cId="0" sldId="257"/>
+          <pc:sldMk cId="2688265821" sldId="461"/>
         </pc:sldMkLst>
         <pc:spChg chg="mod">
-          <ac:chgData name="Daniel Dan" userId="S::daniel.dan@modul.ac.at::e2a95533-a292-400e-bcf5-c81090ef720f" providerId="AD" clId="Web-{B0536F86-C883-7A67-11FA-EA747C9A93F9}" dt="2022-02-27T19:41:23.940" v="1323" actId="20577"/>
+          <ac:chgData name="Ingo Frommholz" userId="ee3b4549-206f-4e4f-93a1-b7ff676f0af7" providerId="ADAL" clId="{5F8971C4-3D52-5FAB-A951-9912A46CDBB0}" dt="2025-11-11T20:27:51.269" v="71" actId="1035"/>
           <ac:spMkLst>
             <pc:docMk/>
-            <pc:sldMk cId="0" sldId="257"/>
-            <ac:spMk id="87" creationId="{00000000-0000-0000-0000-000000000000}"/>
+            <pc:sldMk cId="2688265821" sldId="461"/>
+            <ac:spMk id="4" creationId="{B1AB2DE2-BFB4-403B-9976-58C0812A00AF}"/>
+          </ac:spMkLst>
+        </pc:spChg>
+        <pc:picChg chg="mod">
+          <ac:chgData name="Ingo Frommholz" userId="ee3b4549-206f-4e4f-93a1-b7ff676f0af7" providerId="ADAL" clId="{5F8971C4-3D52-5FAB-A951-9912A46CDBB0}" dt="2025-11-11T20:28:02.199" v="73" actId="1076"/>
+          <ac:picMkLst>
+            <pc:docMk/>
+            <pc:sldMk cId="2688265821" sldId="461"/>
+            <ac:picMk id="5" creationId="{28473CBD-85AF-4157-A662-59704A522582}"/>
+          </ac:picMkLst>
+        </pc:picChg>
+      </pc:sldChg>
+      <pc:sldChg chg="modSp">
+        <pc:chgData name="Ingo Frommholz" userId="ee3b4549-206f-4e4f-93a1-b7ff676f0af7" providerId="ADAL" clId="{5F8971C4-3D52-5FAB-A951-9912A46CDBB0}" dt="2025-11-11T20:26:05.241" v="35"/>
+        <pc:sldMkLst>
+          <pc:docMk/>
+          <pc:sldMk cId="1270159388" sldId="565"/>
+        </pc:sldMkLst>
+        <pc:spChg chg="mod">
+          <ac:chgData name="Ingo Frommholz" userId="ee3b4549-206f-4e4f-93a1-b7ff676f0af7" providerId="ADAL" clId="{5F8971C4-3D52-5FAB-A951-9912A46CDBB0}" dt="2025-11-11T20:26:05.241" v="35"/>
+          <ac:spMkLst>
+            <pc:docMk/>
+            <pc:sldMk cId="1270159388" sldId="565"/>
+            <ac:spMk id="6" creationId="{E702544F-B557-4280-BAC4-9E0BD0616E05}"/>
           </ac:spMkLst>
         </pc:spChg>
       </pc:sldChg>
       <pc:sldChg chg="modSp">
-        <pc:chgData name="Daniel Dan" userId="S::daniel.dan@modul.ac.at::e2a95533-a292-400e-bcf5-c81090ef720f" providerId="AD" clId="Web-{B0536F86-C883-7A67-11FA-EA747C9A93F9}" dt="2022-02-27T10:47:02.715" v="4" actId="20577"/>
+        <pc:chgData name="Ingo Frommholz" userId="ee3b4549-206f-4e4f-93a1-b7ff676f0af7" providerId="ADAL" clId="{5F8971C4-3D52-5FAB-A951-9912A46CDBB0}" dt="2025-11-11T20:28:27.254" v="74"/>
         <pc:sldMkLst>
           <pc:docMk/>
-          <pc:sldMk cId="0" sldId="258"/>
+          <pc:sldMk cId="3429029213" sldId="581"/>
         </pc:sldMkLst>
         <pc:spChg chg="mod">
-          <ac:chgData name="Daniel Dan" userId="S::daniel.dan@modul.ac.at::e2a95533-a292-400e-bcf5-c81090ef720f" providerId="AD" clId="Web-{B0536F86-C883-7A67-11FA-EA747C9A93F9}" dt="2022-02-27T10:47:02.715" v="4" actId="20577"/>
+          <ac:chgData name="Ingo Frommholz" userId="ee3b4549-206f-4e4f-93a1-b7ff676f0af7" providerId="ADAL" clId="{5F8971C4-3D52-5FAB-A951-9912A46CDBB0}" dt="2025-11-11T20:28:27.254" v="74"/>
           <ac:spMkLst>
             <pc:docMk/>
-            <pc:sldMk cId="0" sldId="258"/>
-            <ac:spMk id="2" creationId="{2AC6E17C-95F6-43A8-9683-8D544AABF34F}"/>
-          </ac:spMkLst>
-        </pc:spChg>
-      </pc:sldChg>
-      <pc:sldChg chg="addSp modSp">
-        <pc:chgData name="Daniel Dan" userId="S::daniel.dan@modul.ac.at::e2a95533-a292-400e-bcf5-c81090ef720f" providerId="AD" clId="Web-{B0536F86-C883-7A67-11FA-EA747C9A93F9}" dt="2022-02-27T11:12:59.042" v="70" actId="1076"/>
-        <pc:sldMkLst>
-          <pc:docMk/>
-          <pc:sldMk cId="0" sldId="262"/>
-        </pc:sldMkLst>
-        <pc:spChg chg="mod">
-          <ac:chgData name="Daniel Dan" userId="S::daniel.dan@modul.ac.at::e2a95533-a292-400e-bcf5-c81090ef720f" providerId="AD" clId="Web-{B0536F86-C883-7A67-11FA-EA747C9A93F9}" dt="2022-02-27T11:09:47.609" v="63" actId="20577"/>
-          <ac:spMkLst>
-            <pc:docMk/>
-            <pc:sldMk cId="0" sldId="262"/>
-            <ac:spMk id="127" creationId="{00000000-0000-0000-0000-000000000000}"/>
-          </ac:spMkLst>
-        </pc:spChg>
-        <pc:spChg chg="mod">
-          <ac:chgData name="Daniel Dan" userId="S::daniel.dan@modul.ac.at::e2a95533-a292-400e-bcf5-c81090ef720f" providerId="AD" clId="Web-{B0536F86-C883-7A67-11FA-EA747C9A93F9}" dt="2022-02-27T11:10:05.735" v="66" actId="20577"/>
-          <ac:spMkLst>
-            <pc:docMk/>
-            <pc:sldMk cId="0" sldId="262"/>
-            <ac:spMk id="128" creationId="{00000000-0000-0000-0000-000000000000}"/>
-          </ac:spMkLst>
-        </pc:spChg>
-        <pc:picChg chg="add mod">
-          <ac:chgData name="Daniel Dan" userId="S::daniel.dan@modul.ac.at::e2a95533-a292-400e-bcf5-c81090ef720f" providerId="AD" clId="Web-{B0536F86-C883-7A67-11FA-EA747C9A93F9}" dt="2022-02-27T11:12:59.042" v="70" actId="1076"/>
-          <ac:picMkLst>
-            <pc:docMk/>
-            <pc:sldMk cId="0" sldId="262"/>
-            <ac:picMk id="2" creationId="{04DAB524-A9F3-4A49-A8C0-8C2EC209D27E}"/>
-          </ac:picMkLst>
-        </pc:picChg>
-      </pc:sldChg>
-      <pc:sldChg chg="addSp modSp">
-        <pc:chgData name="Daniel Dan" userId="S::daniel.dan@modul.ac.at::e2a95533-a292-400e-bcf5-c81090ef720f" providerId="AD" clId="Web-{B0536F86-C883-7A67-11FA-EA747C9A93F9}" dt="2022-02-27T11:16:29.475" v="102" actId="20577"/>
-        <pc:sldMkLst>
-          <pc:docMk/>
-          <pc:sldMk cId="0" sldId="263"/>
-        </pc:sldMkLst>
-        <pc:spChg chg="add mod">
-          <ac:chgData name="Daniel Dan" userId="S::daniel.dan@modul.ac.at::e2a95533-a292-400e-bcf5-c81090ef720f" providerId="AD" clId="Web-{B0536F86-C883-7A67-11FA-EA747C9A93F9}" dt="2022-02-27T11:16:29.475" v="102" actId="20577"/>
-          <ac:spMkLst>
-            <pc:docMk/>
-            <pc:sldMk cId="0" sldId="263"/>
-            <ac:spMk id="3" creationId="{4D3EA09A-1AEA-41F2-997D-E1849B0F2163}"/>
-          </ac:spMkLst>
-        </pc:spChg>
-        <pc:spChg chg="mod">
-          <ac:chgData name="Daniel Dan" userId="S::daniel.dan@modul.ac.at::e2a95533-a292-400e-bcf5-c81090ef720f" providerId="AD" clId="Web-{B0536F86-C883-7A67-11FA-EA747C9A93F9}" dt="2022-02-27T11:13:47.904" v="74" actId="20577"/>
-          <ac:spMkLst>
-            <pc:docMk/>
-            <pc:sldMk cId="0" sldId="263"/>
-            <ac:spMk id="134" creationId="{00000000-0000-0000-0000-000000000000}"/>
-          </ac:spMkLst>
-        </pc:spChg>
-        <pc:spChg chg="mod">
-          <ac:chgData name="Daniel Dan" userId="S::daniel.dan@modul.ac.at::e2a95533-a292-400e-bcf5-c81090ef720f" providerId="AD" clId="Web-{B0536F86-C883-7A67-11FA-EA747C9A93F9}" dt="2022-02-27T11:15:24.347" v="86" actId="20577"/>
-          <ac:spMkLst>
-            <pc:docMk/>
-            <pc:sldMk cId="0" sldId="263"/>
-            <ac:spMk id="135" creationId="{00000000-0000-0000-0000-000000000000}"/>
-          </ac:spMkLst>
-        </pc:spChg>
-        <pc:picChg chg="add mod">
-          <ac:chgData name="Daniel Dan" userId="S::daniel.dan@modul.ac.at::e2a95533-a292-400e-bcf5-c81090ef720f" providerId="AD" clId="Web-{B0536F86-C883-7A67-11FA-EA747C9A93F9}" dt="2022-02-27T11:15:31.675" v="89" actId="14100"/>
-          <ac:picMkLst>
-            <pc:docMk/>
-            <pc:sldMk cId="0" sldId="263"/>
-            <ac:picMk id="2" creationId="{A4BEBE51-DC18-4D86-A4F0-FACE4AD031D8}"/>
-          </ac:picMkLst>
-        </pc:picChg>
-      </pc:sldChg>
-      <pc:sldChg chg="addSp delSp modSp">
-        <pc:chgData name="Daniel Dan" userId="S::daniel.dan@modul.ac.at::e2a95533-a292-400e-bcf5-c81090ef720f" providerId="AD" clId="Web-{B0536F86-C883-7A67-11FA-EA747C9A93F9}" dt="2022-02-27T11:36:49.627" v="332" actId="1076"/>
-        <pc:sldMkLst>
-          <pc:docMk/>
-          <pc:sldMk cId="0" sldId="264"/>
-        </pc:sldMkLst>
-        <pc:spChg chg="add mod">
-          <ac:chgData name="Daniel Dan" userId="S::daniel.dan@modul.ac.at::e2a95533-a292-400e-bcf5-c81090ef720f" providerId="AD" clId="Web-{B0536F86-C883-7A67-11FA-EA747C9A93F9}" dt="2022-02-27T11:17:30.323" v="108"/>
-          <ac:spMkLst>
-            <pc:docMk/>
-            <pc:sldMk cId="0" sldId="264"/>
-            <ac:spMk id="3" creationId="{FA7269B2-5EAC-40A0-BC78-8699C651F14B}"/>
-          </ac:spMkLst>
-        </pc:spChg>
-        <pc:spChg chg="add del">
-          <ac:chgData name="Daniel Dan" userId="S::daniel.dan@modul.ac.at::e2a95533-a292-400e-bcf5-c81090ef720f" providerId="AD" clId="Web-{B0536F86-C883-7A67-11FA-EA747C9A93F9}" dt="2022-02-27T11:20:26.317" v="111"/>
-          <ac:spMkLst>
-            <pc:docMk/>
-            <pc:sldMk cId="0" sldId="264"/>
-            <ac:spMk id="4" creationId="{594DD0DF-F057-4111-B631-0FE84BCCDA1B}"/>
-          </ac:spMkLst>
-        </pc:spChg>
-        <pc:spChg chg="add del mod">
-          <ac:chgData name="Daniel Dan" userId="S::daniel.dan@modul.ac.at::e2a95533-a292-400e-bcf5-c81090ef720f" providerId="AD" clId="Web-{B0536F86-C883-7A67-11FA-EA747C9A93F9}" dt="2022-02-27T11:20:53.662" v="114"/>
-          <ac:spMkLst>
-            <pc:docMk/>
-            <pc:sldMk cId="0" sldId="264"/>
-            <ac:spMk id="5" creationId="{9FE7237F-E970-451C-B9BA-A3A8ECB8F5BD}"/>
-          </ac:spMkLst>
-        </pc:spChg>
-        <pc:spChg chg="add del">
-          <ac:chgData name="Daniel Dan" userId="S::daniel.dan@modul.ac.at::e2a95533-a292-400e-bcf5-c81090ef720f" providerId="AD" clId="Web-{B0536F86-C883-7A67-11FA-EA747C9A93F9}" dt="2022-02-27T11:21:04.241" v="116"/>
-          <ac:spMkLst>
-            <pc:docMk/>
-            <pc:sldMk cId="0" sldId="264"/>
-            <ac:spMk id="6" creationId="{FFBBD527-BAAF-458A-915A-72F1C6D56E7C}"/>
-          </ac:spMkLst>
-        </pc:spChg>
-        <pc:spChg chg="add del mod">
-          <ac:chgData name="Daniel Dan" userId="S::daniel.dan@modul.ac.at::e2a95533-a292-400e-bcf5-c81090ef720f" providerId="AD" clId="Web-{B0536F86-C883-7A67-11FA-EA747C9A93F9}" dt="2022-02-27T11:21:40.274" v="120"/>
-          <ac:spMkLst>
-            <pc:docMk/>
-            <pc:sldMk cId="0" sldId="264"/>
-            <ac:spMk id="7" creationId="{B1D5E76B-264B-4A72-AB89-9522D0656748}"/>
-          </ac:spMkLst>
-        </pc:spChg>
-        <pc:spChg chg="add mod">
-          <ac:chgData name="Daniel Dan" userId="S::daniel.dan@modul.ac.at::e2a95533-a292-400e-bcf5-c81090ef720f" providerId="AD" clId="Web-{B0536F86-C883-7A67-11FA-EA747C9A93F9}" dt="2022-02-27T11:24:38.503" v="148" actId="1076"/>
-          <ac:spMkLst>
-            <pc:docMk/>
-            <pc:sldMk cId="0" sldId="264"/>
-            <ac:spMk id="8" creationId="{12ED535B-6CCF-43FC-81E9-04835CE0D12D}"/>
-          </ac:spMkLst>
-        </pc:spChg>
-        <pc:spChg chg="add mod">
-          <ac:chgData name="Daniel Dan" userId="S::daniel.dan@modul.ac.at::e2a95533-a292-400e-bcf5-c81090ef720f" providerId="AD" clId="Web-{B0536F86-C883-7A67-11FA-EA747C9A93F9}" dt="2022-02-27T11:31:43.015" v="215" actId="20577"/>
-          <ac:spMkLst>
-            <pc:docMk/>
-            <pc:sldMk cId="0" sldId="264"/>
-            <ac:spMk id="12" creationId="{A73186A8-BEB2-4989-9C4B-6A12C1481E27}"/>
-          </ac:spMkLst>
-        </pc:spChg>
-        <pc:spChg chg="add mod">
-          <ac:chgData name="Daniel Dan" userId="S::daniel.dan@modul.ac.at::e2a95533-a292-400e-bcf5-c81090ef720f" providerId="AD" clId="Web-{B0536F86-C883-7A67-11FA-EA747C9A93F9}" dt="2022-02-27T11:24:45.175" v="150" actId="1076"/>
-          <ac:spMkLst>
-            <pc:docMk/>
-            <pc:sldMk cId="0" sldId="264"/>
-            <ac:spMk id="13" creationId="{67FE433E-2D4C-4D9A-9E36-4ECF262E5DAA}"/>
-          </ac:spMkLst>
-        </pc:spChg>
-        <pc:spChg chg="add mod">
-          <ac:chgData name="Daniel Dan" userId="S::daniel.dan@modul.ac.at::e2a95533-a292-400e-bcf5-c81090ef720f" providerId="AD" clId="Web-{B0536F86-C883-7A67-11FA-EA747C9A93F9}" dt="2022-02-27T11:23:53.954" v="139" actId="14100"/>
-          <ac:spMkLst>
-            <pc:docMk/>
-            <pc:sldMk cId="0" sldId="264"/>
-            <ac:spMk id="14" creationId="{7222F7DF-9180-46F4-A269-AA6E4230EE0B}"/>
-          </ac:spMkLst>
-        </pc:spChg>
-        <pc:spChg chg="add mod">
-          <ac:chgData name="Daniel Dan" userId="S::daniel.dan@modul.ac.at::e2a95533-a292-400e-bcf5-c81090ef720f" providerId="AD" clId="Web-{B0536F86-C883-7A67-11FA-EA747C9A93F9}" dt="2022-02-27T11:23:58.938" v="142" actId="1076"/>
-          <ac:spMkLst>
-            <pc:docMk/>
-            <pc:sldMk cId="0" sldId="264"/>
-            <ac:spMk id="15" creationId="{5BFFB2CD-BB7C-403E-A6ED-0FB8A30D7042}"/>
-          </ac:spMkLst>
-        </pc:spChg>
-        <pc:spChg chg="add mod">
-          <ac:chgData name="Daniel Dan" userId="S::daniel.dan@modul.ac.at::e2a95533-a292-400e-bcf5-c81090ef720f" providerId="AD" clId="Web-{B0536F86-C883-7A67-11FA-EA747C9A93F9}" dt="2022-02-27T11:24:04.017" v="143" actId="1076"/>
-          <ac:spMkLst>
-            <pc:docMk/>
-            <pc:sldMk cId="0" sldId="264"/>
-            <ac:spMk id="16" creationId="{2C9E1B4A-8E9D-432E-AEFB-8382DAA6AD5F}"/>
-          </ac:spMkLst>
-        </pc:spChg>
-        <pc:spChg chg="add mod">
-          <ac:chgData name="Daniel Dan" userId="S::daniel.dan@modul.ac.at::e2a95533-a292-400e-bcf5-c81090ef720f" providerId="AD" clId="Web-{B0536F86-C883-7A67-11FA-EA747C9A93F9}" dt="2022-02-27T11:24:31.675" v="146" actId="1076"/>
-          <ac:spMkLst>
-            <pc:docMk/>
-            <pc:sldMk cId="0" sldId="264"/>
-            <ac:spMk id="17" creationId="{AA5ADC1B-F307-4221-9E8B-40A4A8919F57}"/>
-          </ac:spMkLst>
-        </pc:spChg>
-        <pc:spChg chg="add mod">
-          <ac:chgData name="Daniel Dan" userId="S::daniel.dan@modul.ac.at::e2a95533-a292-400e-bcf5-c81090ef720f" providerId="AD" clId="Web-{B0536F86-C883-7A67-11FA-EA747C9A93F9}" dt="2022-02-27T11:24:31.675" v="147" actId="1076"/>
-          <ac:spMkLst>
-            <pc:docMk/>
-            <pc:sldMk cId="0" sldId="264"/>
-            <ac:spMk id="18" creationId="{5EE5DB66-D0EC-4202-AA15-D7A5337D8222}"/>
-          </ac:spMkLst>
-        </pc:spChg>
-        <pc:spChg chg="add mod">
-          <ac:chgData name="Daniel Dan" userId="S::daniel.dan@modul.ac.at::e2a95533-a292-400e-bcf5-c81090ef720f" providerId="AD" clId="Web-{B0536F86-C883-7A67-11FA-EA747C9A93F9}" dt="2022-02-27T11:31:29.905" v="214" actId="1076"/>
-          <ac:spMkLst>
-            <pc:docMk/>
-            <pc:sldMk cId="0" sldId="264"/>
-            <ac:spMk id="20" creationId="{294E924A-BA10-4FD7-983B-9E1FB12B6558}"/>
-          </ac:spMkLst>
-        </pc:spChg>
-        <pc:spChg chg="add mod">
-          <ac:chgData name="Daniel Dan" userId="S::daniel.dan@modul.ac.at::e2a95533-a292-400e-bcf5-c81090ef720f" providerId="AD" clId="Web-{B0536F86-C883-7A67-11FA-EA747C9A93F9}" dt="2022-02-27T11:33:09.005" v="243" actId="1076"/>
-          <ac:spMkLst>
-            <pc:docMk/>
-            <pc:sldMk cId="0" sldId="264"/>
-            <ac:spMk id="28" creationId="{BB30CBD7-0375-4DF7-B0AE-753ED713CE6D}"/>
-          </ac:spMkLst>
-        </pc:spChg>
-        <pc:spChg chg="add mod">
-          <ac:chgData name="Daniel Dan" userId="S::daniel.dan@modul.ac.at::e2a95533-a292-400e-bcf5-c81090ef720f" providerId="AD" clId="Web-{B0536F86-C883-7A67-11FA-EA747C9A93F9}" dt="2022-02-27T11:32:58.707" v="242" actId="1076"/>
-          <ac:spMkLst>
-            <pc:docMk/>
-            <pc:sldMk cId="0" sldId="264"/>
-            <ac:spMk id="29" creationId="{58EDA8A9-9308-4A04-BC70-F2C750A11B10}"/>
-          </ac:spMkLst>
-        </pc:spChg>
-        <pc:spChg chg="add mod">
-          <ac:chgData name="Daniel Dan" userId="S::daniel.dan@modul.ac.at::e2a95533-a292-400e-bcf5-c81090ef720f" providerId="AD" clId="Web-{B0536F86-C883-7A67-11FA-EA747C9A93F9}" dt="2022-02-27T11:34:06.508" v="266" actId="1076"/>
-          <ac:spMkLst>
-            <pc:docMk/>
-            <pc:sldMk cId="0" sldId="264"/>
-            <ac:spMk id="30" creationId="{E1491593-CF0A-47E4-95A2-DBC0183F0411}"/>
-          </ac:spMkLst>
-        </pc:spChg>
-        <pc:spChg chg="add mod">
-          <ac:chgData name="Daniel Dan" userId="S::daniel.dan@modul.ac.at::e2a95533-a292-400e-bcf5-c81090ef720f" providerId="AD" clId="Web-{B0536F86-C883-7A67-11FA-EA747C9A93F9}" dt="2022-02-27T11:34:39.057" v="280" actId="1076"/>
-          <ac:spMkLst>
-            <pc:docMk/>
-            <pc:sldMk cId="0" sldId="264"/>
-            <ac:spMk id="31" creationId="{BB428BE3-86D3-42A5-A89C-3436F402C584}"/>
-          </ac:spMkLst>
-        </pc:spChg>
-        <pc:spChg chg="add mod">
-          <ac:chgData name="Daniel Dan" userId="S::daniel.dan@modul.ac.at::e2a95533-a292-400e-bcf5-c81090ef720f" providerId="AD" clId="Web-{B0536F86-C883-7A67-11FA-EA747C9A93F9}" dt="2022-02-27T11:36:27.500" v="310" actId="1076"/>
-          <ac:spMkLst>
-            <pc:docMk/>
-            <pc:sldMk cId="0" sldId="264"/>
-            <ac:spMk id="32" creationId="{279491CC-92A2-4D7E-B858-DE9D2B45C3E3}"/>
-          </ac:spMkLst>
-        </pc:spChg>
-        <pc:spChg chg="add mod">
-          <ac:chgData name="Daniel Dan" userId="S::daniel.dan@modul.ac.at::e2a95533-a292-400e-bcf5-c81090ef720f" providerId="AD" clId="Web-{B0536F86-C883-7A67-11FA-EA747C9A93F9}" dt="2022-02-27T11:35:45.420" v="303" actId="14100"/>
-          <ac:spMkLst>
-            <pc:docMk/>
-            <pc:sldMk cId="0" sldId="264"/>
-            <ac:spMk id="33" creationId="{40FF0825-F225-46DC-B574-954EC9D85CDC}"/>
-          </ac:spMkLst>
-        </pc:spChg>
-        <pc:spChg chg="add mod">
-          <ac:chgData name="Daniel Dan" userId="S::daniel.dan@modul.ac.at::e2a95533-a292-400e-bcf5-c81090ef720f" providerId="AD" clId="Web-{B0536F86-C883-7A67-11FA-EA747C9A93F9}" dt="2022-02-27T11:36:49.627" v="332" actId="1076"/>
-          <ac:spMkLst>
-            <pc:docMk/>
-            <pc:sldMk cId="0" sldId="264"/>
-            <ac:spMk id="34" creationId="{AD2A4E70-05A0-482B-8768-0DA6785CE8FC}"/>
-          </ac:spMkLst>
-        </pc:spChg>
-        <pc:spChg chg="mod">
-          <ac:chgData name="Daniel Dan" userId="S::daniel.dan@modul.ac.at::e2a95533-a292-400e-bcf5-c81090ef720f" providerId="AD" clId="Web-{B0536F86-C883-7A67-11FA-EA747C9A93F9}" dt="2022-02-27T11:17:25.947" v="107" actId="20577"/>
-          <ac:spMkLst>
-            <pc:docMk/>
-            <pc:sldMk cId="0" sldId="264"/>
-            <ac:spMk id="141" creationId="{00000000-0000-0000-0000-000000000000}"/>
-          </ac:spMkLst>
-        </pc:spChg>
-        <pc:spChg chg="del">
-          <ac:chgData name="Daniel Dan" userId="S::daniel.dan@modul.ac.at::e2a95533-a292-400e-bcf5-c81090ef720f" providerId="AD" clId="Web-{B0536F86-C883-7A67-11FA-EA747C9A93F9}" dt="2022-02-27T11:17:30.323" v="108"/>
-          <ac:spMkLst>
-            <pc:docMk/>
-            <pc:sldMk cId="0" sldId="264"/>
-            <ac:spMk id="142" creationId="{00000000-0000-0000-0000-000000000000}"/>
-          </ac:spMkLst>
-        </pc:spChg>
-        <pc:picChg chg="del">
-          <ac:chgData name="Daniel Dan" userId="S::daniel.dan@modul.ac.at::e2a95533-a292-400e-bcf5-c81090ef720f" providerId="AD" clId="Web-{B0536F86-C883-7A67-11FA-EA747C9A93F9}" dt="2022-02-27T11:17:31.948" v="109"/>
-          <ac:picMkLst>
-            <pc:docMk/>
-            <pc:sldMk cId="0" sldId="264"/>
-            <ac:picMk id="143" creationId="{00000000-0000-0000-0000-000000000000}"/>
-          </ac:picMkLst>
-        </pc:picChg>
-        <pc:cxnChg chg="add del mod">
-          <ac:chgData name="Daniel Dan" userId="S::daniel.dan@modul.ac.at::e2a95533-a292-400e-bcf5-c81090ef720f" providerId="AD" clId="Web-{B0536F86-C883-7A67-11FA-EA747C9A93F9}" dt="2022-02-27T11:25:24.146" v="154"/>
-          <ac:cxnSpMkLst>
-            <pc:docMk/>
-            <pc:sldMk cId="0" sldId="264"/>
-            <ac:cxnSpMk id="9" creationId="{BF87AA38-1352-47BE-95D5-DF18E06337B9}"/>
-          </ac:cxnSpMkLst>
-        </pc:cxnChg>
-        <pc:cxnChg chg="add mod">
-          <ac:chgData name="Daniel Dan" userId="S::daniel.dan@modul.ac.at::e2a95533-a292-400e-bcf5-c81090ef720f" providerId="AD" clId="Web-{B0536F86-C883-7A67-11FA-EA747C9A93F9}" dt="2022-02-27T11:26:13.368" v="161" actId="14100"/>
-          <ac:cxnSpMkLst>
-            <pc:docMk/>
-            <pc:sldMk cId="0" sldId="264"/>
-            <ac:cxnSpMk id="10" creationId="{70B96866-1296-4A4E-B11F-08DB35F14C8F}"/>
-          </ac:cxnSpMkLst>
-        </pc:cxnChg>
-        <pc:cxnChg chg="add mod">
-          <ac:chgData name="Daniel Dan" userId="S::daniel.dan@modul.ac.at::e2a95533-a292-400e-bcf5-c81090ef720f" providerId="AD" clId="Web-{B0536F86-C883-7A67-11FA-EA747C9A93F9}" dt="2022-02-27T11:27:28.407" v="169" actId="14100"/>
-          <ac:cxnSpMkLst>
-            <pc:docMk/>
-            <pc:sldMk cId="0" sldId="264"/>
-            <ac:cxnSpMk id="11" creationId="{376198DB-1B98-4AED-896D-590311D6D3F6}"/>
-          </ac:cxnSpMkLst>
-        </pc:cxnChg>
-        <pc:cxnChg chg="add mod">
-          <ac:chgData name="Daniel Dan" userId="S::daniel.dan@modul.ac.at::e2a95533-a292-400e-bcf5-c81090ef720f" providerId="AD" clId="Web-{B0536F86-C883-7A67-11FA-EA747C9A93F9}" dt="2022-02-27T11:29:23.039" v="184" actId="14100"/>
-          <ac:cxnSpMkLst>
-            <pc:docMk/>
-            <pc:sldMk cId="0" sldId="264"/>
-            <ac:cxnSpMk id="19" creationId="{9AB9CB49-1ED6-4394-866B-D44B63EDFF4D}"/>
-          </ac:cxnSpMkLst>
-        </pc:cxnChg>
-        <pc:cxnChg chg="add mod">
-          <ac:chgData name="Daniel Dan" userId="S::daniel.dan@modul.ac.at::e2a95533-a292-400e-bcf5-c81090ef720f" providerId="AD" clId="Web-{B0536F86-C883-7A67-11FA-EA747C9A93F9}" dt="2022-02-27T11:29:57.009" v="189" actId="14100"/>
-          <ac:cxnSpMkLst>
-            <pc:docMk/>
-            <pc:sldMk cId="0" sldId="264"/>
-            <ac:cxnSpMk id="23" creationId="{3871D6BC-8253-4619-89DB-FD9BB0355CF4}"/>
-          </ac:cxnSpMkLst>
-        </pc:cxnChg>
-        <pc:cxnChg chg="add mod">
-          <ac:chgData name="Daniel Dan" userId="S::daniel.dan@modul.ac.at::e2a95533-a292-400e-bcf5-c81090ef720f" providerId="AD" clId="Web-{B0536F86-C883-7A67-11FA-EA747C9A93F9}" dt="2022-02-27T11:29:48.540" v="188" actId="14100"/>
-          <ac:cxnSpMkLst>
-            <pc:docMk/>
-            <pc:sldMk cId="0" sldId="264"/>
-            <ac:cxnSpMk id="24" creationId="{E59A18B9-127C-4DF3-9AB0-6FEDE2BADEE4}"/>
-          </ac:cxnSpMkLst>
-        </pc:cxnChg>
-        <pc:cxnChg chg="add mod">
-          <ac:chgData name="Daniel Dan" userId="S::daniel.dan@modul.ac.at::e2a95533-a292-400e-bcf5-c81090ef720f" providerId="AD" clId="Web-{B0536F86-C883-7A67-11FA-EA747C9A93F9}" dt="2022-02-27T11:30:36.918" v="195" actId="14100"/>
-          <ac:cxnSpMkLst>
-            <pc:docMk/>
-            <pc:sldMk cId="0" sldId="264"/>
-            <ac:cxnSpMk id="25" creationId="{7D7AB94C-518D-4577-809B-350181669BF3}"/>
-          </ac:cxnSpMkLst>
-        </pc:cxnChg>
-        <pc:cxnChg chg="add mod">
-          <ac:chgData name="Daniel Dan" userId="S::daniel.dan@modul.ac.at::e2a95533-a292-400e-bcf5-c81090ef720f" providerId="AD" clId="Web-{B0536F86-C883-7A67-11FA-EA747C9A93F9}" dt="2022-02-27T11:30:17.136" v="192" actId="14100"/>
-          <ac:cxnSpMkLst>
-            <pc:docMk/>
-            <pc:sldMk cId="0" sldId="264"/>
-            <ac:cxnSpMk id="26" creationId="{2C51D958-D2C4-4B86-BF14-2AE35FC1DC40}"/>
-          </ac:cxnSpMkLst>
-        </pc:cxnChg>
-      </pc:sldChg>
-      <pc:sldChg chg="delSp modSp">
-        <pc:chgData name="Daniel Dan" userId="S::daniel.dan@modul.ac.at::e2a95533-a292-400e-bcf5-c81090ef720f" providerId="AD" clId="Web-{B0536F86-C883-7A67-11FA-EA747C9A93F9}" dt="2022-02-27T17:52:45.324" v="532" actId="20577"/>
-        <pc:sldMkLst>
-          <pc:docMk/>
-          <pc:sldMk cId="0" sldId="265"/>
-        </pc:sldMkLst>
-        <pc:spChg chg="mod">
-          <ac:chgData name="Daniel Dan" userId="S::daniel.dan@modul.ac.at::e2a95533-a292-400e-bcf5-c81090ef720f" providerId="AD" clId="Web-{B0536F86-C883-7A67-11FA-EA747C9A93F9}" dt="2022-02-27T17:52:00.682" v="525" actId="20577"/>
-          <ac:spMkLst>
-            <pc:docMk/>
-            <pc:sldMk cId="0" sldId="265"/>
-            <ac:spMk id="149" creationId="{00000000-0000-0000-0000-000000000000}"/>
-          </ac:spMkLst>
-        </pc:spChg>
-        <pc:spChg chg="mod">
-          <ac:chgData name="Daniel Dan" userId="S::daniel.dan@modul.ac.at::e2a95533-a292-400e-bcf5-c81090ef720f" providerId="AD" clId="Web-{B0536F86-C883-7A67-11FA-EA747C9A93F9}" dt="2022-02-27T17:52:45.324" v="532" actId="20577"/>
-          <ac:spMkLst>
-            <pc:docMk/>
-            <pc:sldMk cId="0" sldId="265"/>
-            <ac:spMk id="150" creationId="{00000000-0000-0000-0000-000000000000}"/>
-          </ac:spMkLst>
-        </pc:spChg>
-        <pc:picChg chg="del">
-          <ac:chgData name="Daniel Dan" userId="S::daniel.dan@modul.ac.at::e2a95533-a292-400e-bcf5-c81090ef720f" providerId="AD" clId="Web-{B0536F86-C883-7A67-11FA-EA747C9A93F9}" dt="2022-02-27T17:52:03.104" v="526"/>
-          <ac:picMkLst>
-            <pc:docMk/>
-            <pc:sldMk cId="0" sldId="265"/>
-            <ac:picMk id="151" creationId="{00000000-0000-0000-0000-000000000000}"/>
-          </ac:picMkLst>
-        </pc:picChg>
-      </pc:sldChg>
-      <pc:sldChg chg="addSp modSp del">
-        <pc:chgData name="Daniel Dan" userId="S::daniel.dan@modul.ac.at::e2a95533-a292-400e-bcf5-c81090ef720f" providerId="AD" clId="Web-{B0536F86-C883-7A67-11FA-EA747C9A93F9}" dt="2022-02-27T18:13:29.373" v="612"/>
-        <pc:sldMkLst>
-          <pc:docMk/>
-          <pc:sldMk cId="0" sldId="266"/>
-        </pc:sldMkLst>
-        <pc:spChg chg="mod">
-          <ac:chgData name="Daniel Dan" userId="S::daniel.dan@modul.ac.at::e2a95533-a292-400e-bcf5-c81090ef720f" providerId="AD" clId="Web-{B0536F86-C883-7A67-11FA-EA747C9A93F9}" dt="2022-02-27T17:53:52.500" v="549" actId="20577"/>
-          <ac:spMkLst>
-            <pc:docMk/>
-            <pc:sldMk cId="0" sldId="266"/>
-            <ac:spMk id="157" creationId="{00000000-0000-0000-0000-000000000000}"/>
-          </ac:spMkLst>
-        </pc:spChg>
-        <pc:spChg chg="mod">
-          <ac:chgData name="Daniel Dan" userId="S::daniel.dan@modul.ac.at::e2a95533-a292-400e-bcf5-c81090ef720f" providerId="AD" clId="Web-{B0536F86-C883-7A67-11FA-EA747C9A93F9}" dt="2022-02-27T18:05:07.269" v="577" actId="20577"/>
-          <ac:spMkLst>
-            <pc:docMk/>
-            <pc:sldMk cId="0" sldId="266"/>
-            <ac:spMk id="158" creationId="{00000000-0000-0000-0000-000000000000}"/>
-          </ac:spMkLst>
-        </pc:spChg>
-        <pc:picChg chg="add mod">
-          <ac:chgData name="Daniel Dan" userId="S::daniel.dan@modul.ac.at::e2a95533-a292-400e-bcf5-c81090ef720f" providerId="AD" clId="Web-{B0536F86-C883-7A67-11FA-EA747C9A93F9}" dt="2022-02-27T18:03:58.094" v="565" actId="1076"/>
-          <ac:picMkLst>
-            <pc:docMk/>
-            <pc:sldMk cId="0" sldId="266"/>
-            <ac:picMk id="2" creationId="{2A515699-D87A-4013-808B-5A3F43412698}"/>
-          </ac:picMkLst>
-        </pc:picChg>
-      </pc:sldChg>
-      <pc:sldChg chg="del">
-        <pc:chgData name="Daniel Dan" userId="S::daniel.dan@modul.ac.at::e2a95533-a292-400e-bcf5-c81090ef720f" providerId="AD" clId="Web-{B0536F86-C883-7A67-11FA-EA747C9A93F9}" dt="2022-02-27T19:40:30.314" v="1310"/>
-        <pc:sldMkLst>
-          <pc:docMk/>
-          <pc:sldMk cId="0" sldId="267"/>
-        </pc:sldMkLst>
-      </pc:sldChg>
-      <pc:sldChg chg="del">
-        <pc:chgData name="Daniel Dan" userId="S::daniel.dan@modul.ac.at::e2a95533-a292-400e-bcf5-c81090ef720f" providerId="AD" clId="Web-{B0536F86-C883-7A67-11FA-EA747C9A93F9}" dt="2022-02-27T19:40:30.314" v="1309"/>
-        <pc:sldMkLst>
-          <pc:docMk/>
-          <pc:sldMk cId="0" sldId="268"/>
-        </pc:sldMkLst>
-      </pc:sldChg>
-      <pc:sldChg chg="del">
-        <pc:chgData name="Daniel Dan" userId="S::daniel.dan@modul.ac.at::e2a95533-a292-400e-bcf5-c81090ef720f" providerId="AD" clId="Web-{B0536F86-C883-7A67-11FA-EA747C9A93F9}" dt="2022-02-27T19:40:30.314" v="1308"/>
-        <pc:sldMkLst>
-          <pc:docMk/>
-          <pc:sldMk cId="0" sldId="269"/>
-        </pc:sldMkLst>
-      </pc:sldChg>
-      <pc:sldChg chg="del">
-        <pc:chgData name="Daniel Dan" userId="S::daniel.dan@modul.ac.at::e2a95533-a292-400e-bcf5-c81090ef720f" providerId="AD" clId="Web-{B0536F86-C883-7A67-11FA-EA747C9A93F9}" dt="2022-02-27T19:40:30.314" v="1307"/>
-        <pc:sldMkLst>
-          <pc:docMk/>
-          <pc:sldMk cId="0" sldId="270"/>
-        </pc:sldMkLst>
-      </pc:sldChg>
-      <pc:sldChg chg="del">
-        <pc:chgData name="Daniel Dan" userId="S::daniel.dan@modul.ac.at::e2a95533-a292-400e-bcf5-c81090ef720f" providerId="AD" clId="Web-{B0536F86-C883-7A67-11FA-EA747C9A93F9}" dt="2022-02-27T19:40:30.299" v="1306"/>
-        <pc:sldMkLst>
-          <pc:docMk/>
-          <pc:sldMk cId="0" sldId="271"/>
-        </pc:sldMkLst>
-      </pc:sldChg>
-      <pc:sldChg chg="del">
-        <pc:chgData name="Daniel Dan" userId="S::daniel.dan@modul.ac.at::e2a95533-a292-400e-bcf5-c81090ef720f" providerId="AD" clId="Web-{B0536F86-C883-7A67-11FA-EA747C9A93F9}" dt="2022-02-27T19:40:30.299" v="1305"/>
-        <pc:sldMkLst>
-          <pc:docMk/>
-          <pc:sldMk cId="0" sldId="272"/>
-        </pc:sldMkLst>
-      </pc:sldChg>
-      <pc:sldChg chg="del">
-        <pc:chgData name="Daniel Dan" userId="S::daniel.dan@modul.ac.at::e2a95533-a292-400e-bcf5-c81090ef720f" providerId="AD" clId="Web-{B0536F86-C883-7A67-11FA-EA747C9A93F9}" dt="2022-02-27T19:40:30.299" v="1304"/>
-        <pc:sldMkLst>
-          <pc:docMk/>
-          <pc:sldMk cId="0" sldId="273"/>
-        </pc:sldMkLst>
-      </pc:sldChg>
-      <pc:sldChg chg="del">
-        <pc:chgData name="Daniel Dan" userId="S::daniel.dan@modul.ac.at::e2a95533-a292-400e-bcf5-c81090ef720f" providerId="AD" clId="Web-{B0536F86-C883-7A67-11FA-EA747C9A93F9}" dt="2022-02-27T19:40:30.299" v="1303"/>
-        <pc:sldMkLst>
-          <pc:docMk/>
-          <pc:sldMk cId="0" sldId="274"/>
-        </pc:sldMkLst>
-      </pc:sldChg>
-      <pc:sldChg chg="del">
-        <pc:chgData name="Daniel Dan" userId="S::daniel.dan@modul.ac.at::e2a95533-a292-400e-bcf5-c81090ef720f" providerId="AD" clId="Web-{B0536F86-C883-7A67-11FA-EA747C9A93F9}" dt="2022-02-27T19:40:30.299" v="1302"/>
-        <pc:sldMkLst>
-          <pc:docMk/>
-          <pc:sldMk cId="0" sldId="275"/>
-        </pc:sldMkLst>
-      </pc:sldChg>
-      <pc:sldChg chg="del">
-        <pc:chgData name="Daniel Dan" userId="S::daniel.dan@modul.ac.at::e2a95533-a292-400e-bcf5-c81090ef720f" providerId="AD" clId="Web-{B0536F86-C883-7A67-11FA-EA747C9A93F9}" dt="2022-02-27T19:40:30.299" v="1301"/>
-        <pc:sldMkLst>
-          <pc:docMk/>
-          <pc:sldMk cId="0" sldId="276"/>
-        </pc:sldMkLst>
-      </pc:sldChg>
-      <pc:sldChg chg="del">
-        <pc:chgData name="Daniel Dan" userId="S::daniel.dan@modul.ac.at::e2a95533-a292-400e-bcf5-c81090ef720f" providerId="AD" clId="Web-{B0536F86-C883-7A67-11FA-EA747C9A93F9}" dt="2022-02-27T19:40:30.299" v="1300"/>
-        <pc:sldMkLst>
-          <pc:docMk/>
-          <pc:sldMk cId="0" sldId="277"/>
-        </pc:sldMkLst>
-      </pc:sldChg>
-      <pc:sldChg chg="del">
-        <pc:chgData name="Daniel Dan" userId="S::daniel.dan@modul.ac.at::e2a95533-a292-400e-bcf5-c81090ef720f" providerId="AD" clId="Web-{B0536F86-C883-7A67-11FA-EA747C9A93F9}" dt="2022-02-27T19:40:30.299" v="1299"/>
-        <pc:sldMkLst>
-          <pc:docMk/>
-          <pc:sldMk cId="0" sldId="278"/>
-        </pc:sldMkLst>
-      </pc:sldChg>
-      <pc:sldChg chg="del">
-        <pc:chgData name="Daniel Dan" userId="S::daniel.dan@modul.ac.at::e2a95533-a292-400e-bcf5-c81090ef720f" providerId="AD" clId="Web-{B0536F86-C883-7A67-11FA-EA747C9A93F9}" dt="2022-02-27T19:40:30.299" v="1298"/>
-        <pc:sldMkLst>
-          <pc:docMk/>
-          <pc:sldMk cId="0" sldId="279"/>
-        </pc:sldMkLst>
-      </pc:sldChg>
-      <pc:sldChg chg="del">
-        <pc:chgData name="Daniel Dan" userId="S::daniel.dan@modul.ac.at::e2a95533-a292-400e-bcf5-c81090ef720f" providerId="AD" clId="Web-{B0536F86-C883-7A67-11FA-EA747C9A93F9}" dt="2022-02-27T19:40:30.299" v="1297"/>
-        <pc:sldMkLst>
-          <pc:docMk/>
-          <pc:sldMk cId="0" sldId="280"/>
-        </pc:sldMkLst>
-      </pc:sldChg>
-      <pc:sldChg chg="del">
-        <pc:chgData name="Daniel Dan" userId="S::daniel.dan@modul.ac.at::e2a95533-a292-400e-bcf5-c81090ef720f" providerId="AD" clId="Web-{B0536F86-C883-7A67-11FA-EA747C9A93F9}" dt="2022-02-27T19:40:30.299" v="1296"/>
-        <pc:sldMkLst>
-          <pc:docMk/>
-          <pc:sldMk cId="0" sldId="281"/>
-        </pc:sldMkLst>
-      </pc:sldChg>
-      <pc:sldChg chg="del">
-        <pc:chgData name="Daniel Dan" userId="S::daniel.dan@modul.ac.at::e2a95533-a292-400e-bcf5-c81090ef720f" providerId="AD" clId="Web-{B0536F86-C883-7A67-11FA-EA747C9A93F9}" dt="2022-02-27T19:40:30.299" v="1295"/>
-        <pc:sldMkLst>
-          <pc:docMk/>
-          <pc:sldMk cId="0" sldId="282"/>
-        </pc:sldMkLst>
-      </pc:sldChg>
-      <pc:sldChg chg="del">
-        <pc:chgData name="Daniel Dan" userId="S::daniel.dan@modul.ac.at::e2a95533-a292-400e-bcf5-c81090ef720f" providerId="AD" clId="Web-{B0536F86-C883-7A67-11FA-EA747C9A93F9}" dt="2022-02-27T19:40:30.299" v="1294"/>
-        <pc:sldMkLst>
-          <pc:docMk/>
-          <pc:sldMk cId="0" sldId="283"/>
-        </pc:sldMkLst>
-      </pc:sldChg>
-      <pc:sldChg chg="del">
-        <pc:chgData name="Daniel Dan" userId="S::daniel.dan@modul.ac.at::e2a95533-a292-400e-bcf5-c81090ef720f" providerId="AD" clId="Web-{B0536F86-C883-7A67-11FA-EA747C9A93F9}" dt="2022-02-27T19:40:30.299" v="1293"/>
-        <pc:sldMkLst>
-          <pc:docMk/>
-          <pc:sldMk cId="0" sldId="284"/>
-        </pc:sldMkLst>
-      </pc:sldChg>
-      <pc:sldChg chg="del">
-        <pc:chgData name="Daniel Dan" userId="S::daniel.dan@modul.ac.at::e2a95533-a292-400e-bcf5-c81090ef720f" providerId="AD" clId="Web-{B0536F86-C883-7A67-11FA-EA747C9A93F9}" dt="2022-02-27T19:40:30.299" v="1292"/>
-        <pc:sldMkLst>
-          <pc:docMk/>
-          <pc:sldMk cId="0" sldId="285"/>
-        </pc:sldMkLst>
-      </pc:sldChg>
-      <pc:sldChg chg="del">
-        <pc:chgData name="Daniel Dan" userId="S::daniel.dan@modul.ac.at::e2a95533-a292-400e-bcf5-c81090ef720f" providerId="AD" clId="Web-{B0536F86-C883-7A67-11FA-EA747C9A93F9}" dt="2022-02-27T19:40:30.283" v="1291"/>
-        <pc:sldMkLst>
-          <pc:docMk/>
-          <pc:sldMk cId="0" sldId="286"/>
-        </pc:sldMkLst>
-      </pc:sldChg>
-      <pc:sldChg chg="del">
-        <pc:chgData name="Daniel Dan" userId="S::daniel.dan@modul.ac.at::e2a95533-a292-400e-bcf5-c81090ef720f" providerId="AD" clId="Web-{B0536F86-C883-7A67-11FA-EA747C9A93F9}" dt="2022-02-27T19:40:30.283" v="1290"/>
-        <pc:sldMkLst>
-          <pc:docMk/>
-          <pc:sldMk cId="0" sldId="287"/>
-        </pc:sldMkLst>
-      </pc:sldChg>
-      <pc:sldChg chg="del">
-        <pc:chgData name="Daniel Dan" userId="S::daniel.dan@modul.ac.at::e2a95533-a292-400e-bcf5-c81090ef720f" providerId="AD" clId="Web-{B0536F86-C883-7A67-11FA-EA747C9A93F9}" dt="2022-02-27T19:40:30.283" v="1289"/>
-        <pc:sldMkLst>
-          <pc:docMk/>
-          <pc:sldMk cId="0" sldId="288"/>
-        </pc:sldMkLst>
-      </pc:sldChg>
-      <pc:sldChg chg="del">
-        <pc:chgData name="Daniel Dan" userId="S::daniel.dan@modul.ac.at::e2a95533-a292-400e-bcf5-c81090ef720f" providerId="AD" clId="Web-{B0536F86-C883-7A67-11FA-EA747C9A93F9}" dt="2022-02-27T19:40:30.283" v="1288"/>
-        <pc:sldMkLst>
-          <pc:docMk/>
-          <pc:sldMk cId="0" sldId="289"/>
-        </pc:sldMkLst>
-      </pc:sldChg>
-      <pc:sldChg chg="del">
-        <pc:chgData name="Daniel Dan" userId="S::daniel.dan@modul.ac.at::e2a95533-a292-400e-bcf5-c81090ef720f" providerId="AD" clId="Web-{B0536F86-C883-7A67-11FA-EA747C9A93F9}" dt="2022-02-27T19:40:30.283" v="1287"/>
-        <pc:sldMkLst>
-          <pc:docMk/>
-          <pc:sldMk cId="0" sldId="290"/>
-        </pc:sldMkLst>
-      </pc:sldChg>
-      <pc:sldChg chg="del">
-        <pc:chgData name="Daniel Dan" userId="S::daniel.dan@modul.ac.at::e2a95533-a292-400e-bcf5-c81090ef720f" providerId="AD" clId="Web-{B0536F86-C883-7A67-11FA-EA747C9A93F9}" dt="2022-02-27T19:40:30.283" v="1286"/>
-        <pc:sldMkLst>
-          <pc:docMk/>
-          <pc:sldMk cId="0" sldId="291"/>
-        </pc:sldMkLst>
-      </pc:sldChg>
-      <pc:sldChg chg="del">
-        <pc:chgData name="Daniel Dan" userId="S::daniel.dan@modul.ac.at::e2a95533-a292-400e-bcf5-c81090ef720f" providerId="AD" clId="Web-{B0536F86-C883-7A67-11FA-EA747C9A93F9}" dt="2022-02-27T19:40:30.283" v="1285"/>
-        <pc:sldMkLst>
-          <pc:docMk/>
-          <pc:sldMk cId="0" sldId="292"/>
-        </pc:sldMkLst>
-      </pc:sldChg>
-      <pc:sldChg chg="del">
-        <pc:chgData name="Daniel Dan" userId="S::daniel.dan@modul.ac.at::e2a95533-a292-400e-bcf5-c81090ef720f" providerId="AD" clId="Web-{B0536F86-C883-7A67-11FA-EA747C9A93F9}" dt="2022-02-27T19:40:30.283" v="1284"/>
-        <pc:sldMkLst>
-          <pc:docMk/>
-          <pc:sldMk cId="0" sldId="293"/>
-        </pc:sldMkLst>
-      </pc:sldChg>
-      <pc:sldChg chg="del">
-        <pc:chgData name="Daniel Dan" userId="S::daniel.dan@modul.ac.at::e2a95533-a292-400e-bcf5-c81090ef720f" providerId="AD" clId="Web-{B0536F86-C883-7A67-11FA-EA747C9A93F9}" dt="2022-02-27T19:40:30.283" v="1283"/>
-        <pc:sldMkLst>
-          <pc:docMk/>
-          <pc:sldMk cId="0" sldId="294"/>
-        </pc:sldMkLst>
-      </pc:sldChg>
-      <pc:sldChg chg="del">
-        <pc:chgData name="Daniel Dan" userId="S::daniel.dan@modul.ac.at::e2a95533-a292-400e-bcf5-c81090ef720f" providerId="AD" clId="Web-{B0536F86-C883-7A67-11FA-EA747C9A93F9}" dt="2022-02-27T19:40:30.283" v="1282"/>
-        <pc:sldMkLst>
-          <pc:docMk/>
-          <pc:sldMk cId="0" sldId="295"/>
-        </pc:sldMkLst>
-      </pc:sldChg>
-      <pc:sldChg chg="del">
-        <pc:chgData name="Daniel Dan" userId="S::daniel.dan@modul.ac.at::e2a95533-a292-400e-bcf5-c81090ef720f" providerId="AD" clId="Web-{B0536F86-C883-7A67-11FA-EA747C9A93F9}" dt="2022-02-27T19:40:30.283" v="1281"/>
-        <pc:sldMkLst>
-          <pc:docMk/>
-          <pc:sldMk cId="0" sldId="296"/>
-        </pc:sldMkLst>
-      </pc:sldChg>
-      <pc:sldChg chg="del">
-        <pc:chgData name="Daniel Dan" userId="S::daniel.dan@modul.ac.at::e2a95533-a292-400e-bcf5-c81090ef720f" providerId="AD" clId="Web-{B0536F86-C883-7A67-11FA-EA747C9A93F9}" dt="2022-02-27T19:40:30.283" v="1280"/>
-        <pc:sldMkLst>
-          <pc:docMk/>
-          <pc:sldMk cId="0" sldId="297"/>
-        </pc:sldMkLst>
-      </pc:sldChg>
-      <pc:sldChg chg="del">
-        <pc:chgData name="Daniel Dan" userId="S::daniel.dan@modul.ac.at::e2a95533-a292-400e-bcf5-c81090ef720f" providerId="AD" clId="Web-{B0536F86-C883-7A67-11FA-EA747C9A93F9}" dt="2022-02-27T19:40:30.283" v="1279"/>
-        <pc:sldMkLst>
-          <pc:docMk/>
-          <pc:sldMk cId="0" sldId="298"/>
-        </pc:sldMkLst>
-      </pc:sldChg>
-      <pc:sldChg chg="del">
-        <pc:chgData name="Daniel Dan" userId="S::daniel.dan@modul.ac.at::e2a95533-a292-400e-bcf5-c81090ef720f" providerId="AD" clId="Web-{B0536F86-C883-7A67-11FA-EA747C9A93F9}" dt="2022-02-27T19:40:30.283" v="1278"/>
-        <pc:sldMkLst>
-          <pc:docMk/>
-          <pc:sldMk cId="0" sldId="299"/>
-        </pc:sldMkLst>
-      </pc:sldChg>
-      <pc:sldChg chg="del">
-        <pc:chgData name="Daniel Dan" userId="S::daniel.dan@modul.ac.at::e2a95533-a292-400e-bcf5-c81090ef720f" providerId="AD" clId="Web-{B0536F86-C883-7A67-11FA-EA747C9A93F9}" dt="2022-02-27T19:40:30.268" v="1277"/>
-        <pc:sldMkLst>
-          <pc:docMk/>
-          <pc:sldMk cId="0" sldId="300"/>
-        </pc:sldMkLst>
-      </pc:sldChg>
-      <pc:sldChg chg="del">
-        <pc:chgData name="Daniel Dan" userId="S::daniel.dan@modul.ac.at::e2a95533-a292-400e-bcf5-c81090ef720f" providerId="AD" clId="Web-{B0536F86-C883-7A67-11FA-EA747C9A93F9}" dt="2022-02-27T19:40:30.268" v="1276"/>
-        <pc:sldMkLst>
-          <pc:docMk/>
-          <pc:sldMk cId="0" sldId="301"/>
-        </pc:sldMkLst>
-      </pc:sldChg>
-      <pc:sldChg chg="del">
-        <pc:chgData name="Daniel Dan" userId="S::daniel.dan@modul.ac.at::e2a95533-a292-400e-bcf5-c81090ef720f" providerId="AD" clId="Web-{B0536F86-C883-7A67-11FA-EA747C9A93F9}" dt="2022-02-27T19:40:30.268" v="1275"/>
-        <pc:sldMkLst>
-          <pc:docMk/>
-          <pc:sldMk cId="0" sldId="302"/>
-        </pc:sldMkLst>
-      </pc:sldChg>
-      <pc:sldChg chg="del">
-        <pc:chgData name="Daniel Dan" userId="S::daniel.dan@modul.ac.at::e2a95533-a292-400e-bcf5-c81090ef720f" providerId="AD" clId="Web-{B0536F86-C883-7A67-11FA-EA747C9A93F9}" dt="2022-02-27T19:54:03.084" v="2519"/>
-        <pc:sldMkLst>
-          <pc:docMk/>
-          <pc:sldMk cId="0" sldId="303"/>
-        </pc:sldMkLst>
-      </pc:sldChg>
-      <pc:sldChg chg="modSp">
-        <pc:chgData name="Daniel Dan" userId="S::daniel.dan@modul.ac.at::e2a95533-a292-400e-bcf5-c81090ef720f" providerId="AD" clId="Web-{B0536F86-C883-7A67-11FA-EA747C9A93F9}" dt="2022-02-27T19:41:28.847" v="1325" actId="20577"/>
-        <pc:sldMkLst>
-          <pc:docMk/>
-          <pc:sldMk cId="0" sldId="304"/>
-        </pc:sldMkLst>
-        <pc:spChg chg="mod">
-          <ac:chgData name="Daniel Dan" userId="S::daniel.dan@modul.ac.at::e2a95533-a292-400e-bcf5-c81090ef720f" providerId="AD" clId="Web-{B0536F86-C883-7A67-11FA-EA747C9A93F9}" dt="2022-02-27T19:41:28.847" v="1325" actId="20577"/>
-          <ac:spMkLst>
-            <pc:docMk/>
-            <pc:sldMk cId="0" sldId="304"/>
-            <ac:spMk id="433" creationId="{00000000-0000-0000-0000-000000000000}"/>
+            <pc:sldMk cId="3429029213" sldId="581"/>
+            <ac:spMk id="4" creationId="{22DB4709-7D3A-4C1D-8995-5771CCF24D43}"/>
           </ac:spMkLst>
         </pc:spChg>
       </pc:sldChg>
       <pc:sldChg chg="modSp">
-        <pc:chgData name="Daniel Dan" userId="S::daniel.dan@modul.ac.at::e2a95533-a292-400e-bcf5-c81090ef720f" providerId="AD" clId="Web-{B0536F86-C883-7A67-11FA-EA747C9A93F9}" dt="2022-02-27T19:43:45.864" v="1482" actId="20577"/>
+        <pc:chgData name="Ingo Frommholz" userId="ee3b4549-206f-4e4f-93a1-b7ff676f0af7" providerId="ADAL" clId="{5F8971C4-3D52-5FAB-A951-9912A46CDBB0}" dt="2025-11-11T20:25:20.659" v="1" actId="20577"/>
         <pc:sldMkLst>
           <pc:docMk/>
-          <pc:sldMk cId="0" sldId="305"/>
+          <pc:sldMk cId="372976994" sldId="588"/>
         </pc:sldMkLst>
         <pc:spChg chg="mod">
-          <ac:chgData name="Daniel Dan" userId="S::daniel.dan@modul.ac.at::e2a95533-a292-400e-bcf5-c81090ef720f" providerId="AD" clId="Web-{B0536F86-C883-7A67-11FA-EA747C9A93F9}" dt="2022-02-27T19:43:45.864" v="1482" actId="20577"/>
+          <ac:chgData name="Ingo Frommholz" userId="ee3b4549-206f-4e4f-93a1-b7ff676f0af7" providerId="ADAL" clId="{5F8971C4-3D52-5FAB-A951-9912A46CDBB0}" dt="2025-11-11T20:25:20.659" v="1" actId="20577"/>
           <ac:spMkLst>
             <pc:docMk/>
-            <pc:sldMk cId="0" sldId="305"/>
-            <ac:spMk id="438" creationId="{00000000-0000-0000-0000-000000000000}"/>
+            <pc:sldMk cId="372976994" sldId="588"/>
+            <ac:spMk id="10" creationId="{B415F276-B698-4ECF-99BC-B038EFE2C743}"/>
           </ac:spMkLst>
         </pc:spChg>
       </pc:sldChg>
-      <pc:sldChg chg="addSp delSp modSp">
-        <pc:chgData name="Daniel Dan" userId="S::daniel.dan@modul.ac.at::e2a95533-a292-400e-bcf5-c81090ef720f" providerId="AD" clId="Web-{B0536F86-C883-7A67-11FA-EA747C9A93F9}" dt="2022-02-27T11:15:56.192" v="91" actId="20577"/>
+      <pc:sldChg chg="modSp modAnim">
+        <pc:chgData name="Ingo Frommholz" userId="ee3b4549-206f-4e4f-93a1-b7ff676f0af7" providerId="ADAL" clId="{5F8971C4-3D52-5FAB-A951-9912A46CDBB0}" dt="2025-11-11T20:25:50.273" v="34" actId="20577"/>
         <pc:sldMkLst>
           <pc:docMk/>
-          <pc:sldMk cId="808992841" sldId="309"/>
+          <pc:sldMk cId="7853090" sldId="593"/>
         </pc:sldMkLst>
-        <pc:spChg chg="add mod">
-          <ac:chgData name="Daniel Dan" userId="S::daniel.dan@modul.ac.at::e2a95533-a292-400e-bcf5-c81090ef720f" providerId="AD" clId="Web-{B0536F86-C883-7A67-11FA-EA747C9A93F9}" dt="2022-02-27T11:15:56.192" v="91" actId="20577"/>
+        <pc:spChg chg="mod">
+          <ac:chgData name="Ingo Frommholz" userId="ee3b4549-206f-4e4f-93a1-b7ff676f0af7" providerId="ADAL" clId="{5F8971C4-3D52-5FAB-A951-9912A46CDBB0}" dt="2025-11-11T20:25:50.273" v="34" actId="20577"/>
           <ac:spMkLst>
             <pc:docMk/>
-            <pc:sldMk cId="808992841" sldId="309"/>
-            <ac:spMk id="3" creationId="{3115D5A0-2193-4443-9F84-B0DFAF8F16C7}"/>
-          </ac:spMkLst>
-        </pc:spChg>
-        <pc:spChg chg="mod">
-          <ac:chgData name="Daniel Dan" userId="S::daniel.dan@modul.ac.at::e2a95533-a292-400e-bcf5-c81090ef720f" providerId="AD" clId="Web-{B0536F86-C883-7A67-11FA-EA747C9A93F9}" dt="2022-02-27T10:50:30.164" v="16" actId="20577"/>
-          <ac:spMkLst>
-            <pc:docMk/>
-            <pc:sldMk cId="808992841" sldId="309"/>
-            <ac:spMk id="115" creationId="{00000000-0000-0000-0000-000000000000}"/>
-          </ac:spMkLst>
-        </pc:spChg>
-        <pc:spChg chg="mod">
-          <ac:chgData name="Daniel Dan" userId="S::daniel.dan@modul.ac.at::e2a95533-a292-400e-bcf5-c81090ef720f" providerId="AD" clId="Web-{B0536F86-C883-7A67-11FA-EA747C9A93F9}" dt="2022-02-27T10:51:43.106" v="40" actId="20577"/>
-          <ac:spMkLst>
-            <pc:docMk/>
-            <pc:sldMk cId="808992841" sldId="309"/>
-            <ac:spMk id="116" creationId="{00000000-0000-0000-0000-000000000000}"/>
-          </ac:spMkLst>
-        </pc:spChg>
-        <pc:spChg chg="del">
-          <ac:chgData name="Daniel Dan" userId="S::daniel.dan@modul.ac.at::e2a95533-a292-400e-bcf5-c81090ef720f" providerId="AD" clId="Web-{B0536F86-C883-7A67-11FA-EA747C9A93F9}" dt="2022-02-27T10:50:41.040" v="21"/>
-          <ac:spMkLst>
-            <pc:docMk/>
-            <pc:sldMk cId="808992841" sldId="309"/>
-            <ac:spMk id="117" creationId="{00000000-0000-0000-0000-000000000000}"/>
-          </ac:spMkLst>
-        </pc:spChg>
-        <pc:spChg chg="del">
-          <ac:chgData name="Daniel Dan" userId="S::daniel.dan@modul.ac.at::e2a95533-a292-400e-bcf5-c81090ef720f" providerId="AD" clId="Web-{B0536F86-C883-7A67-11FA-EA747C9A93F9}" dt="2022-02-27T10:50:36.555" v="17"/>
-          <ac:spMkLst>
-            <pc:docMk/>
-            <pc:sldMk cId="808992841" sldId="309"/>
-            <ac:spMk id="118" creationId="{00000000-0000-0000-0000-000000000000}"/>
-          </ac:spMkLst>
-        </pc:spChg>
-        <pc:spChg chg="del">
-          <ac:chgData name="Daniel Dan" userId="S::daniel.dan@modul.ac.at::e2a95533-a292-400e-bcf5-c81090ef720f" providerId="AD" clId="Web-{B0536F86-C883-7A67-11FA-EA747C9A93F9}" dt="2022-02-27T10:50:37.774" v="19"/>
-          <ac:spMkLst>
-            <pc:docMk/>
-            <pc:sldMk cId="808992841" sldId="309"/>
-            <ac:spMk id="119" creationId="{00000000-0000-0000-0000-000000000000}"/>
-          </ac:spMkLst>
-        </pc:spChg>
-        <pc:picChg chg="add mod">
-          <ac:chgData name="Daniel Dan" userId="S::daniel.dan@modul.ac.at::e2a95533-a292-400e-bcf5-c81090ef720f" providerId="AD" clId="Web-{B0536F86-C883-7A67-11FA-EA747C9A93F9}" dt="2022-02-27T11:09:11.107" v="46" actId="14100"/>
-          <ac:picMkLst>
-            <pc:docMk/>
-            <pc:sldMk cId="808992841" sldId="309"/>
-            <ac:picMk id="2" creationId="{695EDC47-AE7F-4460-88BE-3A2873850499}"/>
-          </ac:picMkLst>
-        </pc:picChg>
-        <pc:cxnChg chg="del mod">
-          <ac:chgData name="Daniel Dan" userId="S::daniel.dan@modul.ac.at::e2a95533-a292-400e-bcf5-c81090ef720f" providerId="AD" clId="Web-{B0536F86-C883-7A67-11FA-EA747C9A93F9}" dt="2022-02-27T10:50:39.540" v="20"/>
-          <ac:cxnSpMkLst>
-            <pc:docMk/>
-            <pc:sldMk cId="808992841" sldId="309"/>
-            <ac:cxnSpMk id="120" creationId="{00000000-0000-0000-0000-000000000000}"/>
-          </ac:cxnSpMkLst>
-        </pc:cxnChg>
-        <pc:cxnChg chg="del mod">
-          <ac:chgData name="Daniel Dan" userId="S::daniel.dan@modul.ac.at::e2a95533-a292-400e-bcf5-c81090ef720f" providerId="AD" clId="Web-{B0536F86-C883-7A67-11FA-EA747C9A93F9}" dt="2022-02-27T10:50:36.665" v="18"/>
-          <ac:cxnSpMkLst>
-            <pc:docMk/>
-            <pc:sldMk cId="808992841" sldId="309"/>
-            <ac:cxnSpMk id="121" creationId="{00000000-0000-0000-0000-000000000000}"/>
-          </ac:cxnSpMkLst>
-        </pc:cxnChg>
-      </pc:sldChg>
-      <pc:sldChg chg="addSp delSp modSp add replId">
-        <pc:chgData name="Daniel Dan" userId="S::daniel.dan@modul.ac.at::e2a95533-a292-400e-bcf5-c81090ef720f" providerId="AD" clId="Web-{B0536F86-C883-7A67-11FA-EA747C9A93F9}" dt="2022-02-27T11:42:15.551" v="396" actId="20577"/>
-        <pc:sldMkLst>
-          <pc:docMk/>
-          <pc:sldMk cId="2255279033" sldId="310"/>
-        </pc:sldMkLst>
-        <pc:spChg chg="del">
-          <ac:chgData name="Daniel Dan" userId="S::daniel.dan@modul.ac.at::e2a95533-a292-400e-bcf5-c81090ef720f" providerId="AD" clId="Web-{B0536F86-C883-7A67-11FA-EA747C9A93F9}" dt="2022-02-27T11:38:29.226" v="334"/>
-          <ac:spMkLst>
-            <pc:docMk/>
-            <pc:sldMk cId="2255279033" sldId="310"/>
-            <ac:spMk id="3" creationId="{FA7269B2-5EAC-40A0-BC78-8699C651F14B}"/>
-          </ac:spMkLst>
-        </pc:spChg>
-        <pc:spChg chg="add mod">
-          <ac:chgData name="Daniel Dan" userId="S::daniel.dan@modul.ac.at::e2a95533-a292-400e-bcf5-c81090ef720f" providerId="AD" clId="Web-{B0536F86-C883-7A67-11FA-EA747C9A93F9}" dt="2022-02-27T11:42:15.551" v="396" actId="20577"/>
-          <ac:spMkLst>
-            <pc:docMk/>
-            <pc:sldMk cId="2255279033" sldId="310"/>
-            <ac:spMk id="4" creationId="{E8CB220C-C520-4842-AAF7-BCBE3FD1411D}"/>
-          </ac:spMkLst>
-        </pc:spChg>
-        <pc:spChg chg="del">
-          <ac:chgData name="Daniel Dan" userId="S::daniel.dan@modul.ac.at::e2a95533-a292-400e-bcf5-c81090ef720f" providerId="AD" clId="Web-{B0536F86-C883-7A67-11FA-EA747C9A93F9}" dt="2022-02-27T11:39:13.150" v="384"/>
-          <ac:spMkLst>
-            <pc:docMk/>
-            <pc:sldMk cId="2255279033" sldId="310"/>
-            <ac:spMk id="8" creationId="{12ED535B-6CCF-43FC-81E9-04835CE0D12D}"/>
-          </ac:spMkLst>
-        </pc:spChg>
-        <pc:spChg chg="del">
-          <ac:chgData name="Daniel Dan" userId="S::daniel.dan@modul.ac.at::e2a95533-a292-400e-bcf5-c81090ef720f" providerId="AD" clId="Web-{B0536F86-C883-7A67-11FA-EA747C9A93F9}" dt="2022-02-27T11:39:13.150" v="383"/>
-          <ac:spMkLst>
-            <pc:docMk/>
-            <pc:sldMk cId="2255279033" sldId="310"/>
-            <ac:spMk id="12" creationId="{A73186A8-BEB2-4989-9C4B-6A12C1481E27}"/>
-          </ac:spMkLst>
-        </pc:spChg>
-        <pc:spChg chg="del">
-          <ac:chgData name="Daniel Dan" userId="S::daniel.dan@modul.ac.at::e2a95533-a292-400e-bcf5-c81090ef720f" providerId="AD" clId="Web-{B0536F86-C883-7A67-11FA-EA747C9A93F9}" dt="2022-02-27T11:39:13.150" v="382"/>
-          <ac:spMkLst>
-            <pc:docMk/>
-            <pc:sldMk cId="2255279033" sldId="310"/>
-            <ac:spMk id="13" creationId="{67FE433E-2D4C-4D9A-9E36-4ECF262E5DAA}"/>
-          </ac:spMkLst>
-        </pc:spChg>
-        <pc:spChg chg="del">
-          <ac:chgData name="Daniel Dan" userId="S::daniel.dan@modul.ac.at::e2a95533-a292-400e-bcf5-c81090ef720f" providerId="AD" clId="Web-{B0536F86-C883-7A67-11FA-EA747C9A93F9}" dt="2022-02-27T11:39:15.088" v="385"/>
-          <ac:spMkLst>
-            <pc:docMk/>
-            <pc:sldMk cId="2255279033" sldId="310"/>
-            <ac:spMk id="14" creationId="{7222F7DF-9180-46F4-A269-AA6E4230EE0B}"/>
-          </ac:spMkLst>
-        </pc:spChg>
-        <pc:spChg chg="del">
-          <ac:chgData name="Daniel Dan" userId="S::daniel.dan@modul.ac.at::e2a95533-a292-400e-bcf5-c81090ef720f" providerId="AD" clId="Web-{B0536F86-C883-7A67-11FA-EA747C9A93F9}" dt="2022-02-27T11:39:13.150" v="381"/>
-          <ac:spMkLst>
-            <pc:docMk/>
-            <pc:sldMk cId="2255279033" sldId="310"/>
-            <ac:spMk id="15" creationId="{5BFFB2CD-BB7C-403E-A6ED-0FB8A30D7042}"/>
-          </ac:spMkLst>
-        </pc:spChg>
-        <pc:spChg chg="del">
-          <ac:chgData name="Daniel Dan" userId="S::daniel.dan@modul.ac.at::e2a95533-a292-400e-bcf5-c81090ef720f" providerId="AD" clId="Web-{B0536F86-C883-7A67-11FA-EA747C9A93F9}" dt="2022-02-27T11:39:13.150" v="380"/>
-          <ac:spMkLst>
-            <pc:docMk/>
-            <pc:sldMk cId="2255279033" sldId="310"/>
-            <ac:spMk id="16" creationId="{2C9E1B4A-8E9D-432E-AEFB-8382DAA6AD5F}"/>
-          </ac:spMkLst>
-        </pc:spChg>
-        <pc:spChg chg="del">
-          <ac:chgData name="Daniel Dan" userId="S::daniel.dan@modul.ac.at::e2a95533-a292-400e-bcf5-c81090ef720f" providerId="AD" clId="Web-{B0536F86-C883-7A67-11FA-EA747C9A93F9}" dt="2022-02-27T11:39:13.150" v="379"/>
-          <ac:spMkLst>
-            <pc:docMk/>
-            <pc:sldMk cId="2255279033" sldId="310"/>
-            <ac:spMk id="17" creationId="{AA5ADC1B-F307-4221-9E8B-40A4A8919F57}"/>
-          </ac:spMkLst>
-        </pc:spChg>
-        <pc:spChg chg="del">
-          <ac:chgData name="Daniel Dan" userId="S::daniel.dan@modul.ac.at::e2a95533-a292-400e-bcf5-c81090ef720f" providerId="AD" clId="Web-{B0536F86-C883-7A67-11FA-EA747C9A93F9}" dt="2022-02-27T11:39:13.150" v="378"/>
-          <ac:spMkLst>
-            <pc:docMk/>
-            <pc:sldMk cId="2255279033" sldId="310"/>
-            <ac:spMk id="18" creationId="{5EE5DB66-D0EC-4202-AA15-D7A5337D8222}"/>
-          </ac:spMkLst>
-        </pc:spChg>
-        <pc:spChg chg="del">
-          <ac:chgData name="Daniel Dan" userId="S::daniel.dan@modul.ac.at::e2a95533-a292-400e-bcf5-c81090ef720f" providerId="AD" clId="Web-{B0536F86-C883-7A67-11FA-EA747C9A93F9}" dt="2022-02-27T11:39:13.150" v="370"/>
-          <ac:spMkLst>
-            <pc:docMk/>
-            <pc:sldMk cId="2255279033" sldId="310"/>
-            <ac:spMk id="20" creationId="{294E924A-BA10-4FD7-983B-9E1FB12B6558}"/>
-          </ac:spMkLst>
-        </pc:spChg>
-        <pc:spChg chg="del">
-          <ac:chgData name="Daniel Dan" userId="S::daniel.dan@modul.ac.at::e2a95533-a292-400e-bcf5-c81090ef720f" providerId="AD" clId="Web-{B0536F86-C883-7A67-11FA-EA747C9A93F9}" dt="2022-02-27T11:39:13.135" v="369"/>
-          <ac:spMkLst>
-            <pc:docMk/>
-            <pc:sldMk cId="2255279033" sldId="310"/>
-            <ac:spMk id="28" creationId="{BB30CBD7-0375-4DF7-B0AE-753ED713CE6D}"/>
-          </ac:spMkLst>
-        </pc:spChg>
-        <pc:spChg chg="del">
-          <ac:chgData name="Daniel Dan" userId="S::daniel.dan@modul.ac.at::e2a95533-a292-400e-bcf5-c81090ef720f" providerId="AD" clId="Web-{B0536F86-C883-7A67-11FA-EA747C9A93F9}" dt="2022-02-27T11:39:13.135" v="368"/>
-          <ac:spMkLst>
-            <pc:docMk/>
-            <pc:sldMk cId="2255279033" sldId="310"/>
-            <ac:spMk id="29" creationId="{58EDA8A9-9308-4A04-BC70-F2C750A11B10}"/>
-          </ac:spMkLst>
-        </pc:spChg>
-        <pc:spChg chg="del">
-          <ac:chgData name="Daniel Dan" userId="S::daniel.dan@modul.ac.at::e2a95533-a292-400e-bcf5-c81090ef720f" providerId="AD" clId="Web-{B0536F86-C883-7A67-11FA-EA747C9A93F9}" dt="2022-02-27T11:39:13.135" v="367"/>
-          <ac:spMkLst>
-            <pc:docMk/>
-            <pc:sldMk cId="2255279033" sldId="310"/>
-            <ac:spMk id="30" creationId="{E1491593-CF0A-47E4-95A2-DBC0183F0411}"/>
-          </ac:spMkLst>
-        </pc:spChg>
-        <pc:spChg chg="del">
-          <ac:chgData name="Daniel Dan" userId="S::daniel.dan@modul.ac.at::e2a95533-a292-400e-bcf5-c81090ef720f" providerId="AD" clId="Web-{B0536F86-C883-7A67-11FA-EA747C9A93F9}" dt="2022-02-27T11:39:13.135" v="366"/>
-          <ac:spMkLst>
-            <pc:docMk/>
-            <pc:sldMk cId="2255279033" sldId="310"/>
-            <ac:spMk id="31" creationId="{BB428BE3-86D3-42A5-A89C-3436F402C584}"/>
-          </ac:spMkLst>
-        </pc:spChg>
-        <pc:spChg chg="del">
-          <ac:chgData name="Daniel Dan" userId="S::daniel.dan@modul.ac.at::e2a95533-a292-400e-bcf5-c81090ef720f" providerId="AD" clId="Web-{B0536F86-C883-7A67-11FA-EA747C9A93F9}" dt="2022-02-27T11:39:13.135" v="365"/>
-          <ac:spMkLst>
-            <pc:docMk/>
-            <pc:sldMk cId="2255279033" sldId="310"/>
-            <ac:spMk id="32" creationId="{279491CC-92A2-4D7E-B858-DE9D2B45C3E3}"/>
-          </ac:spMkLst>
-        </pc:spChg>
-        <pc:spChg chg="del">
-          <ac:chgData name="Daniel Dan" userId="S::daniel.dan@modul.ac.at::e2a95533-a292-400e-bcf5-c81090ef720f" providerId="AD" clId="Web-{B0536F86-C883-7A67-11FA-EA747C9A93F9}" dt="2022-02-27T11:39:13.135" v="364"/>
-          <ac:spMkLst>
-            <pc:docMk/>
-            <pc:sldMk cId="2255279033" sldId="310"/>
-            <ac:spMk id="33" creationId="{40FF0825-F225-46DC-B574-954EC9D85CDC}"/>
-          </ac:spMkLst>
-        </pc:spChg>
-        <pc:spChg chg="del">
-          <ac:chgData name="Daniel Dan" userId="S::daniel.dan@modul.ac.at::e2a95533-a292-400e-bcf5-c81090ef720f" providerId="AD" clId="Web-{B0536F86-C883-7A67-11FA-EA747C9A93F9}" dt="2022-02-27T11:39:13.135" v="363"/>
-          <ac:spMkLst>
-            <pc:docMk/>
-            <pc:sldMk cId="2255279033" sldId="310"/>
-            <ac:spMk id="34" creationId="{AD2A4E70-05A0-482B-8768-0DA6785CE8FC}"/>
-          </ac:spMkLst>
-        </pc:spChg>
-        <pc:spChg chg="mod">
-          <ac:chgData name="Daniel Dan" userId="S::daniel.dan@modul.ac.at::e2a95533-a292-400e-bcf5-c81090ef720f" providerId="AD" clId="Web-{B0536F86-C883-7A67-11FA-EA747C9A93F9}" dt="2022-02-27T11:39:05.462" v="362" actId="20577"/>
-          <ac:spMkLst>
-            <pc:docMk/>
-            <pc:sldMk cId="2255279033" sldId="310"/>
-            <ac:spMk id="141" creationId="{00000000-0000-0000-0000-000000000000}"/>
-          </ac:spMkLst>
-        </pc:spChg>
-        <pc:picChg chg="add mod">
-          <ac:chgData name="Daniel Dan" userId="S::daniel.dan@modul.ac.at::e2a95533-a292-400e-bcf5-c81090ef720f" providerId="AD" clId="Web-{B0536F86-C883-7A67-11FA-EA747C9A93F9}" dt="2022-02-27T11:39:37.402" v="391" actId="1076"/>
-          <ac:picMkLst>
-            <pc:docMk/>
-            <pc:sldMk cId="2255279033" sldId="310"/>
-            <ac:picMk id="2" creationId="{00243F75-935B-4A75-934D-972B513C5EF1}"/>
-          </ac:picMkLst>
-        </pc:picChg>
-        <pc:cxnChg chg="del">
-          <ac:chgData name="Daniel Dan" userId="S::daniel.dan@modul.ac.at::e2a95533-a292-400e-bcf5-c81090ef720f" providerId="AD" clId="Web-{B0536F86-C883-7A67-11FA-EA747C9A93F9}" dt="2022-02-27T11:39:13.150" v="377"/>
-          <ac:cxnSpMkLst>
-            <pc:docMk/>
-            <pc:sldMk cId="2255279033" sldId="310"/>
-            <ac:cxnSpMk id="10" creationId="{70B96866-1296-4A4E-B11F-08DB35F14C8F}"/>
-          </ac:cxnSpMkLst>
-        </pc:cxnChg>
-        <pc:cxnChg chg="del">
-          <ac:chgData name="Daniel Dan" userId="S::daniel.dan@modul.ac.at::e2a95533-a292-400e-bcf5-c81090ef720f" providerId="AD" clId="Web-{B0536F86-C883-7A67-11FA-EA747C9A93F9}" dt="2022-02-27T11:39:13.150" v="376"/>
-          <ac:cxnSpMkLst>
-            <pc:docMk/>
-            <pc:sldMk cId="2255279033" sldId="310"/>
-            <ac:cxnSpMk id="11" creationId="{376198DB-1B98-4AED-896D-590311D6D3F6}"/>
-          </ac:cxnSpMkLst>
-        </pc:cxnChg>
-        <pc:cxnChg chg="del">
-          <ac:chgData name="Daniel Dan" userId="S::daniel.dan@modul.ac.at::e2a95533-a292-400e-bcf5-c81090ef720f" providerId="AD" clId="Web-{B0536F86-C883-7A67-11FA-EA747C9A93F9}" dt="2022-02-27T11:39:13.150" v="375"/>
-          <ac:cxnSpMkLst>
-            <pc:docMk/>
-            <pc:sldMk cId="2255279033" sldId="310"/>
-            <ac:cxnSpMk id="19" creationId="{9AB9CB49-1ED6-4394-866B-D44B63EDFF4D}"/>
-          </ac:cxnSpMkLst>
-        </pc:cxnChg>
-        <pc:cxnChg chg="del">
-          <ac:chgData name="Daniel Dan" userId="S::daniel.dan@modul.ac.at::e2a95533-a292-400e-bcf5-c81090ef720f" providerId="AD" clId="Web-{B0536F86-C883-7A67-11FA-EA747C9A93F9}" dt="2022-02-27T11:39:13.150" v="374"/>
-          <ac:cxnSpMkLst>
-            <pc:docMk/>
-            <pc:sldMk cId="2255279033" sldId="310"/>
-            <ac:cxnSpMk id="23" creationId="{3871D6BC-8253-4619-89DB-FD9BB0355CF4}"/>
-          </ac:cxnSpMkLst>
-        </pc:cxnChg>
-        <pc:cxnChg chg="del">
-          <ac:chgData name="Daniel Dan" userId="S::daniel.dan@modul.ac.at::e2a95533-a292-400e-bcf5-c81090ef720f" providerId="AD" clId="Web-{B0536F86-C883-7A67-11FA-EA747C9A93F9}" dt="2022-02-27T11:39:13.150" v="373"/>
-          <ac:cxnSpMkLst>
-            <pc:docMk/>
-            <pc:sldMk cId="2255279033" sldId="310"/>
-            <ac:cxnSpMk id="24" creationId="{E59A18B9-127C-4DF3-9AB0-6FEDE2BADEE4}"/>
-          </ac:cxnSpMkLst>
-        </pc:cxnChg>
-        <pc:cxnChg chg="del">
-          <ac:chgData name="Daniel Dan" userId="S::daniel.dan@modul.ac.at::e2a95533-a292-400e-bcf5-c81090ef720f" providerId="AD" clId="Web-{B0536F86-C883-7A67-11FA-EA747C9A93F9}" dt="2022-02-27T11:39:13.150" v="372"/>
-          <ac:cxnSpMkLst>
-            <pc:docMk/>
-            <pc:sldMk cId="2255279033" sldId="310"/>
-            <ac:cxnSpMk id="25" creationId="{7D7AB94C-518D-4577-809B-350181669BF3}"/>
-          </ac:cxnSpMkLst>
-        </pc:cxnChg>
-        <pc:cxnChg chg="del">
-          <ac:chgData name="Daniel Dan" userId="S::daniel.dan@modul.ac.at::e2a95533-a292-400e-bcf5-c81090ef720f" providerId="AD" clId="Web-{B0536F86-C883-7A67-11FA-EA747C9A93F9}" dt="2022-02-27T11:39:13.150" v="371"/>
-          <ac:cxnSpMkLst>
-            <pc:docMk/>
-            <pc:sldMk cId="2255279033" sldId="310"/>
-            <ac:cxnSpMk id="26" creationId="{2C51D958-D2C4-4B86-BF14-2AE35FC1DC40}"/>
-          </ac:cxnSpMkLst>
-        </pc:cxnChg>
-      </pc:sldChg>
-      <pc:sldChg chg="addSp delSp modSp add replId">
-        <pc:chgData name="Daniel Dan" userId="S::daniel.dan@modul.ac.at::e2a95533-a292-400e-bcf5-c81090ef720f" providerId="AD" clId="Web-{B0536F86-C883-7A67-11FA-EA747C9A93F9}" dt="2022-02-27T11:45:26.031" v="464" actId="20577"/>
-        <pc:sldMkLst>
-          <pc:docMk/>
-          <pc:sldMk cId="3047330159" sldId="311"/>
-        </pc:sldMkLst>
-        <pc:spChg chg="add mod">
-          <ac:chgData name="Daniel Dan" userId="S::daniel.dan@modul.ac.at::e2a95533-a292-400e-bcf5-c81090ef720f" providerId="AD" clId="Web-{B0536F86-C883-7A67-11FA-EA747C9A93F9}" dt="2022-02-27T11:43:29.009" v="446" actId="20577"/>
-          <ac:spMkLst>
-            <pc:docMk/>
-            <pc:sldMk cId="3047330159" sldId="311"/>
-            <ac:spMk id="2" creationId="{89365D37-3590-43F3-850E-038EA4D84B9A}"/>
-          </ac:spMkLst>
-        </pc:spChg>
-        <pc:spChg chg="del">
-          <ac:chgData name="Daniel Dan" userId="S::daniel.dan@modul.ac.at::e2a95533-a292-400e-bcf5-c81090ef720f" providerId="AD" clId="Web-{B0536F86-C883-7A67-11FA-EA747C9A93F9}" dt="2022-02-27T11:45:12.999" v="447"/>
-          <ac:spMkLst>
-            <pc:docMk/>
-            <pc:sldMk cId="3047330159" sldId="311"/>
-            <ac:spMk id="3" creationId="{FA7269B2-5EAC-40A0-BC78-8699C651F14B}"/>
-          </ac:spMkLst>
-        </pc:spChg>
-        <pc:spChg chg="del">
-          <ac:chgData name="Daniel Dan" userId="S::daniel.dan@modul.ac.at::e2a95533-a292-400e-bcf5-c81090ef720f" providerId="AD" clId="Web-{B0536F86-C883-7A67-11FA-EA747C9A93F9}" dt="2022-02-27T11:42:28.240" v="420"/>
-          <ac:spMkLst>
-            <pc:docMk/>
-            <pc:sldMk cId="3047330159" sldId="311"/>
-            <ac:spMk id="8" creationId="{12ED535B-6CCF-43FC-81E9-04835CE0D12D}"/>
-          </ac:spMkLst>
-        </pc:spChg>
-        <pc:spChg chg="del">
-          <ac:chgData name="Daniel Dan" userId="S::daniel.dan@modul.ac.at::e2a95533-a292-400e-bcf5-c81090ef720f" providerId="AD" clId="Web-{B0536F86-C883-7A67-11FA-EA747C9A93F9}" dt="2022-02-27T11:42:28.240" v="419"/>
-          <ac:spMkLst>
-            <pc:docMk/>
-            <pc:sldMk cId="3047330159" sldId="311"/>
-            <ac:spMk id="12" creationId="{A73186A8-BEB2-4989-9C4B-6A12C1481E27}"/>
-          </ac:spMkLst>
-        </pc:spChg>
-        <pc:spChg chg="del">
-          <ac:chgData name="Daniel Dan" userId="S::daniel.dan@modul.ac.at::e2a95533-a292-400e-bcf5-c81090ef720f" providerId="AD" clId="Web-{B0536F86-C883-7A67-11FA-EA747C9A93F9}" dt="2022-02-27T11:42:28.240" v="418"/>
-          <ac:spMkLst>
-            <pc:docMk/>
-            <pc:sldMk cId="3047330159" sldId="311"/>
-            <ac:spMk id="13" creationId="{67FE433E-2D4C-4D9A-9E36-4ECF262E5DAA}"/>
-          </ac:spMkLst>
-        </pc:spChg>
-        <pc:spChg chg="del">
-          <ac:chgData name="Daniel Dan" userId="S::daniel.dan@modul.ac.at::e2a95533-a292-400e-bcf5-c81090ef720f" providerId="AD" clId="Web-{B0536F86-C883-7A67-11FA-EA747C9A93F9}" dt="2022-02-27T11:42:28.240" v="417"/>
-          <ac:spMkLst>
-            <pc:docMk/>
-            <pc:sldMk cId="3047330159" sldId="311"/>
-            <ac:spMk id="14" creationId="{7222F7DF-9180-46F4-A269-AA6E4230EE0B}"/>
-          </ac:spMkLst>
-        </pc:spChg>
-        <pc:spChg chg="del">
-          <ac:chgData name="Daniel Dan" userId="S::daniel.dan@modul.ac.at::e2a95533-a292-400e-bcf5-c81090ef720f" providerId="AD" clId="Web-{B0536F86-C883-7A67-11FA-EA747C9A93F9}" dt="2022-02-27T11:42:28.240" v="416"/>
-          <ac:spMkLst>
-            <pc:docMk/>
-            <pc:sldMk cId="3047330159" sldId="311"/>
-            <ac:spMk id="15" creationId="{5BFFB2CD-BB7C-403E-A6ED-0FB8A30D7042}"/>
-          </ac:spMkLst>
-        </pc:spChg>
-        <pc:spChg chg="del">
-          <ac:chgData name="Daniel Dan" userId="S::daniel.dan@modul.ac.at::e2a95533-a292-400e-bcf5-c81090ef720f" providerId="AD" clId="Web-{B0536F86-C883-7A67-11FA-EA747C9A93F9}" dt="2022-02-27T11:42:28.240" v="415"/>
-          <ac:spMkLst>
-            <pc:docMk/>
-            <pc:sldMk cId="3047330159" sldId="311"/>
-            <ac:spMk id="16" creationId="{2C9E1B4A-8E9D-432E-AEFB-8382DAA6AD5F}"/>
-          </ac:spMkLst>
-        </pc:spChg>
-        <pc:spChg chg="del">
-          <ac:chgData name="Daniel Dan" userId="S::daniel.dan@modul.ac.at::e2a95533-a292-400e-bcf5-c81090ef720f" providerId="AD" clId="Web-{B0536F86-C883-7A67-11FA-EA747C9A93F9}" dt="2022-02-27T11:42:28.240" v="414"/>
-          <ac:spMkLst>
-            <pc:docMk/>
-            <pc:sldMk cId="3047330159" sldId="311"/>
-            <ac:spMk id="17" creationId="{AA5ADC1B-F307-4221-9E8B-40A4A8919F57}"/>
-          </ac:spMkLst>
-        </pc:spChg>
-        <pc:spChg chg="del">
-          <ac:chgData name="Daniel Dan" userId="S::daniel.dan@modul.ac.at::e2a95533-a292-400e-bcf5-c81090ef720f" providerId="AD" clId="Web-{B0536F86-C883-7A67-11FA-EA747C9A93F9}" dt="2022-02-27T11:42:28.240" v="413"/>
-          <ac:spMkLst>
-            <pc:docMk/>
-            <pc:sldMk cId="3047330159" sldId="311"/>
-            <ac:spMk id="18" creationId="{5EE5DB66-D0EC-4202-AA15-D7A5337D8222}"/>
-          </ac:spMkLst>
-        </pc:spChg>
-        <pc:spChg chg="del">
-          <ac:chgData name="Daniel Dan" userId="S::daniel.dan@modul.ac.at::e2a95533-a292-400e-bcf5-c81090ef720f" providerId="AD" clId="Web-{B0536F86-C883-7A67-11FA-EA747C9A93F9}" dt="2022-02-27T11:42:28.240" v="405"/>
-          <ac:spMkLst>
-            <pc:docMk/>
-            <pc:sldMk cId="3047330159" sldId="311"/>
-            <ac:spMk id="20" creationId="{294E924A-BA10-4FD7-983B-9E1FB12B6558}"/>
-          </ac:spMkLst>
-        </pc:spChg>
-        <pc:spChg chg="del">
-          <ac:chgData name="Daniel Dan" userId="S::daniel.dan@modul.ac.at::e2a95533-a292-400e-bcf5-c81090ef720f" providerId="AD" clId="Web-{B0536F86-C883-7A67-11FA-EA747C9A93F9}" dt="2022-02-27T11:42:28.240" v="404"/>
-          <ac:spMkLst>
-            <pc:docMk/>
-            <pc:sldMk cId="3047330159" sldId="311"/>
-            <ac:spMk id="28" creationId="{BB30CBD7-0375-4DF7-B0AE-753ED713CE6D}"/>
-          </ac:spMkLst>
-        </pc:spChg>
-        <pc:spChg chg="del">
-          <ac:chgData name="Daniel Dan" userId="S::daniel.dan@modul.ac.at::e2a95533-a292-400e-bcf5-c81090ef720f" providerId="AD" clId="Web-{B0536F86-C883-7A67-11FA-EA747C9A93F9}" dt="2022-02-27T11:42:28.240" v="403"/>
-          <ac:spMkLst>
-            <pc:docMk/>
-            <pc:sldMk cId="3047330159" sldId="311"/>
-            <ac:spMk id="29" creationId="{58EDA8A9-9308-4A04-BC70-F2C750A11B10}"/>
-          </ac:spMkLst>
-        </pc:spChg>
-        <pc:spChg chg="del">
-          <ac:chgData name="Daniel Dan" userId="S::daniel.dan@modul.ac.at::e2a95533-a292-400e-bcf5-c81090ef720f" providerId="AD" clId="Web-{B0536F86-C883-7A67-11FA-EA747C9A93F9}" dt="2022-02-27T11:42:28.240" v="402"/>
-          <ac:spMkLst>
-            <pc:docMk/>
-            <pc:sldMk cId="3047330159" sldId="311"/>
-            <ac:spMk id="30" creationId="{E1491593-CF0A-47E4-95A2-DBC0183F0411}"/>
-          </ac:spMkLst>
-        </pc:spChg>
-        <pc:spChg chg="del">
-          <ac:chgData name="Daniel Dan" userId="S::daniel.dan@modul.ac.at::e2a95533-a292-400e-bcf5-c81090ef720f" providerId="AD" clId="Web-{B0536F86-C883-7A67-11FA-EA747C9A93F9}" dt="2022-02-27T11:42:28.240" v="401"/>
-          <ac:spMkLst>
-            <pc:docMk/>
-            <pc:sldMk cId="3047330159" sldId="311"/>
-            <ac:spMk id="31" creationId="{BB428BE3-86D3-42A5-A89C-3436F402C584}"/>
-          </ac:spMkLst>
-        </pc:spChg>
-        <pc:spChg chg="del">
-          <ac:chgData name="Daniel Dan" userId="S::daniel.dan@modul.ac.at::e2a95533-a292-400e-bcf5-c81090ef720f" providerId="AD" clId="Web-{B0536F86-C883-7A67-11FA-EA747C9A93F9}" dt="2022-02-27T11:42:28.240" v="400"/>
-          <ac:spMkLst>
-            <pc:docMk/>
-            <pc:sldMk cId="3047330159" sldId="311"/>
-            <ac:spMk id="32" creationId="{279491CC-92A2-4D7E-B858-DE9D2B45C3E3}"/>
-          </ac:spMkLst>
-        </pc:spChg>
-        <pc:spChg chg="del">
-          <ac:chgData name="Daniel Dan" userId="S::daniel.dan@modul.ac.at::e2a95533-a292-400e-bcf5-c81090ef720f" providerId="AD" clId="Web-{B0536F86-C883-7A67-11FA-EA747C9A93F9}" dt="2022-02-27T11:42:28.240" v="399"/>
-          <ac:spMkLst>
-            <pc:docMk/>
-            <pc:sldMk cId="3047330159" sldId="311"/>
-            <ac:spMk id="33" creationId="{40FF0825-F225-46DC-B574-954EC9D85CDC}"/>
-          </ac:spMkLst>
-        </pc:spChg>
-        <pc:spChg chg="del">
-          <ac:chgData name="Daniel Dan" userId="S::daniel.dan@modul.ac.at::e2a95533-a292-400e-bcf5-c81090ef720f" providerId="AD" clId="Web-{B0536F86-C883-7A67-11FA-EA747C9A93F9}" dt="2022-02-27T11:42:28.240" v="398"/>
-          <ac:spMkLst>
-            <pc:docMk/>
-            <pc:sldMk cId="3047330159" sldId="311"/>
-            <ac:spMk id="34" creationId="{AD2A4E70-05A0-482B-8768-0DA6785CE8FC}"/>
-          </ac:spMkLst>
-        </pc:spChg>
-        <pc:spChg chg="mod">
-          <ac:chgData name="Daniel Dan" userId="S::daniel.dan@modul.ac.at::e2a95533-a292-400e-bcf5-c81090ef720f" providerId="AD" clId="Web-{B0536F86-C883-7A67-11FA-EA747C9A93F9}" dt="2022-02-27T11:45:26.031" v="464" actId="20577"/>
-          <ac:spMkLst>
-            <pc:docMk/>
-            <pc:sldMk cId="3047330159" sldId="311"/>
-            <ac:spMk id="141" creationId="{00000000-0000-0000-0000-000000000000}"/>
-          </ac:spMkLst>
-        </pc:spChg>
-        <pc:cxnChg chg="del">
-          <ac:chgData name="Daniel Dan" userId="S::daniel.dan@modul.ac.at::e2a95533-a292-400e-bcf5-c81090ef720f" providerId="AD" clId="Web-{B0536F86-C883-7A67-11FA-EA747C9A93F9}" dt="2022-02-27T11:42:28.240" v="412"/>
-          <ac:cxnSpMkLst>
-            <pc:docMk/>
-            <pc:sldMk cId="3047330159" sldId="311"/>
-            <ac:cxnSpMk id="10" creationId="{70B96866-1296-4A4E-B11F-08DB35F14C8F}"/>
-          </ac:cxnSpMkLst>
-        </pc:cxnChg>
-        <pc:cxnChg chg="del">
-          <ac:chgData name="Daniel Dan" userId="S::daniel.dan@modul.ac.at::e2a95533-a292-400e-bcf5-c81090ef720f" providerId="AD" clId="Web-{B0536F86-C883-7A67-11FA-EA747C9A93F9}" dt="2022-02-27T11:42:28.240" v="411"/>
-          <ac:cxnSpMkLst>
-            <pc:docMk/>
-            <pc:sldMk cId="3047330159" sldId="311"/>
-            <ac:cxnSpMk id="11" creationId="{376198DB-1B98-4AED-896D-590311D6D3F6}"/>
-          </ac:cxnSpMkLst>
-        </pc:cxnChg>
-        <pc:cxnChg chg="del">
-          <ac:chgData name="Daniel Dan" userId="S::daniel.dan@modul.ac.at::e2a95533-a292-400e-bcf5-c81090ef720f" providerId="AD" clId="Web-{B0536F86-C883-7A67-11FA-EA747C9A93F9}" dt="2022-02-27T11:42:28.240" v="410"/>
-          <ac:cxnSpMkLst>
-            <pc:docMk/>
-            <pc:sldMk cId="3047330159" sldId="311"/>
-            <ac:cxnSpMk id="19" creationId="{9AB9CB49-1ED6-4394-866B-D44B63EDFF4D}"/>
-          </ac:cxnSpMkLst>
-        </pc:cxnChg>
-        <pc:cxnChg chg="del">
-          <ac:chgData name="Daniel Dan" userId="S::daniel.dan@modul.ac.at::e2a95533-a292-400e-bcf5-c81090ef720f" providerId="AD" clId="Web-{B0536F86-C883-7A67-11FA-EA747C9A93F9}" dt="2022-02-27T11:42:28.240" v="409"/>
-          <ac:cxnSpMkLst>
-            <pc:docMk/>
-            <pc:sldMk cId="3047330159" sldId="311"/>
-            <ac:cxnSpMk id="23" creationId="{3871D6BC-8253-4619-89DB-FD9BB0355CF4}"/>
-          </ac:cxnSpMkLst>
-        </pc:cxnChg>
-        <pc:cxnChg chg="del">
-          <ac:chgData name="Daniel Dan" userId="S::daniel.dan@modul.ac.at::e2a95533-a292-400e-bcf5-c81090ef720f" providerId="AD" clId="Web-{B0536F86-C883-7A67-11FA-EA747C9A93F9}" dt="2022-02-27T11:42:28.240" v="408"/>
-          <ac:cxnSpMkLst>
-            <pc:docMk/>
-            <pc:sldMk cId="3047330159" sldId="311"/>
-            <ac:cxnSpMk id="24" creationId="{E59A18B9-127C-4DF3-9AB0-6FEDE2BADEE4}"/>
-          </ac:cxnSpMkLst>
-        </pc:cxnChg>
-        <pc:cxnChg chg="del">
-          <ac:chgData name="Daniel Dan" userId="S::daniel.dan@modul.ac.at::e2a95533-a292-400e-bcf5-c81090ef720f" providerId="AD" clId="Web-{B0536F86-C883-7A67-11FA-EA747C9A93F9}" dt="2022-02-27T11:42:28.240" v="407"/>
-          <ac:cxnSpMkLst>
-            <pc:docMk/>
-            <pc:sldMk cId="3047330159" sldId="311"/>
-            <ac:cxnSpMk id="25" creationId="{7D7AB94C-518D-4577-809B-350181669BF3}"/>
-          </ac:cxnSpMkLst>
-        </pc:cxnChg>
-        <pc:cxnChg chg="del">
-          <ac:chgData name="Daniel Dan" userId="S::daniel.dan@modul.ac.at::e2a95533-a292-400e-bcf5-c81090ef720f" providerId="AD" clId="Web-{B0536F86-C883-7A67-11FA-EA747C9A93F9}" dt="2022-02-27T11:42:28.240" v="406"/>
-          <ac:cxnSpMkLst>
-            <pc:docMk/>
-            <pc:sldMk cId="3047330159" sldId="311"/>
-            <ac:cxnSpMk id="26" creationId="{2C51D958-D2C4-4B86-BF14-2AE35FC1DC40}"/>
-          </ac:cxnSpMkLst>
-        </pc:cxnChg>
-      </pc:sldChg>
-      <pc:sldChg chg="addSp delSp modSp add replId">
-        <pc:chgData name="Daniel Dan" userId="S::daniel.dan@modul.ac.at::e2a95533-a292-400e-bcf5-c81090ef720f" providerId="AD" clId="Web-{B0536F86-C883-7A67-11FA-EA747C9A93F9}" dt="2022-02-27T17:51:38.852" v="518" actId="20577"/>
-        <pc:sldMkLst>
-          <pc:docMk/>
-          <pc:sldMk cId="3962950277" sldId="312"/>
-        </pc:sldMkLst>
-        <pc:spChg chg="add mod">
-          <ac:chgData name="Daniel Dan" userId="S::daniel.dan@modul.ac.at::e2a95533-a292-400e-bcf5-c81090ef720f" providerId="AD" clId="Web-{B0536F86-C883-7A67-11FA-EA747C9A93F9}" dt="2022-02-27T11:46:33.847" v="494" actId="20577"/>
-          <ac:spMkLst>
-            <pc:docMk/>
-            <pc:sldMk cId="3962950277" sldId="312"/>
-            <ac:spMk id="3" creationId="{F7BAE381-3B77-4D2E-80C7-AFE28DDF32F8}"/>
-          </ac:spMkLst>
-        </pc:spChg>
-        <pc:spChg chg="mod">
-          <ac:chgData name="Daniel Dan" userId="S::daniel.dan@modul.ac.at::e2a95533-a292-400e-bcf5-c81090ef720f" providerId="AD" clId="Web-{B0536F86-C883-7A67-11FA-EA747C9A93F9}" dt="2022-02-27T17:51:38.852" v="518" actId="20577"/>
-          <ac:spMkLst>
-            <pc:docMk/>
-            <pc:sldMk cId="3962950277" sldId="312"/>
-            <ac:spMk id="4" creationId="{E8CB220C-C520-4842-AAF7-BCBE3FD1411D}"/>
-          </ac:spMkLst>
-        </pc:spChg>
-        <pc:spChg chg="mod">
-          <ac:chgData name="Daniel Dan" userId="S::daniel.dan@modul.ac.at::e2a95533-a292-400e-bcf5-c81090ef720f" providerId="AD" clId="Web-{B0536F86-C883-7A67-11FA-EA747C9A93F9}" dt="2022-02-27T17:49:17.970" v="510" actId="20577"/>
-          <ac:spMkLst>
-            <pc:docMk/>
-            <pc:sldMk cId="3962950277" sldId="312"/>
-            <ac:spMk id="141" creationId="{00000000-0000-0000-0000-000000000000}"/>
-          </ac:spMkLst>
-        </pc:spChg>
-        <pc:picChg chg="del">
-          <ac:chgData name="Daniel Dan" userId="S::daniel.dan@modul.ac.at::e2a95533-a292-400e-bcf5-c81090ef720f" providerId="AD" clId="Web-{B0536F86-C883-7A67-11FA-EA747C9A93F9}" dt="2022-02-27T11:45:38.172" v="466"/>
-          <ac:picMkLst>
-            <pc:docMk/>
-            <pc:sldMk cId="3962950277" sldId="312"/>
-            <ac:picMk id="2" creationId="{00243F75-935B-4A75-934D-972B513C5EF1}"/>
-          </ac:picMkLst>
-        </pc:picChg>
-        <pc:picChg chg="add del mod">
-          <ac:chgData name="Daniel Dan" userId="S::daniel.dan@modul.ac.at::e2a95533-a292-400e-bcf5-c81090ef720f" providerId="AD" clId="Web-{B0536F86-C883-7A67-11FA-EA747C9A93F9}" dt="2022-02-27T17:51:10.867" v="513"/>
-          <ac:picMkLst>
-            <pc:docMk/>
-            <pc:sldMk cId="3962950277" sldId="312"/>
-            <ac:picMk id="2" creationId="{F3990193-43DE-4DF3-9CF1-B07BD86D4848}"/>
-          </ac:picMkLst>
-        </pc:picChg>
-        <pc:picChg chg="add mod">
-          <ac:chgData name="Daniel Dan" userId="S::daniel.dan@modul.ac.at::e2a95533-a292-400e-bcf5-c81090ef720f" providerId="AD" clId="Web-{B0536F86-C883-7A67-11FA-EA747C9A93F9}" dt="2022-02-27T17:51:24.961" v="515" actId="1076"/>
-          <ac:picMkLst>
-            <pc:docMk/>
-            <pc:sldMk cId="3962950277" sldId="312"/>
-            <ac:picMk id="5" creationId="{CB7C1570-F39B-4FBB-8212-21BA64259AB2}"/>
-          </ac:picMkLst>
-        </pc:picChg>
-      </pc:sldChg>
-      <pc:sldChg chg="modSp add replId">
-        <pc:chgData name="Daniel Dan" userId="S::daniel.dan@modul.ac.at::e2a95533-a292-400e-bcf5-c81090ef720f" providerId="AD" clId="Web-{B0536F86-C883-7A67-11FA-EA747C9A93F9}" dt="2022-02-27T17:53:43.593" v="540" actId="20577"/>
-        <pc:sldMkLst>
-          <pc:docMk/>
-          <pc:sldMk cId="883025682" sldId="313"/>
-        </pc:sldMkLst>
-        <pc:spChg chg="mod">
-          <ac:chgData name="Daniel Dan" userId="S::daniel.dan@modul.ac.at::e2a95533-a292-400e-bcf5-c81090ef720f" providerId="AD" clId="Web-{B0536F86-C883-7A67-11FA-EA747C9A93F9}" dt="2022-02-27T17:53:43.593" v="540" actId="20577"/>
-          <ac:spMkLst>
-            <pc:docMk/>
-            <pc:sldMk cId="883025682" sldId="313"/>
-            <ac:spMk id="150" creationId="{00000000-0000-0000-0000-000000000000}"/>
-          </ac:spMkLst>
-        </pc:spChg>
-      </pc:sldChg>
-      <pc:sldChg chg="addSp modSp add ord replId">
-        <pc:chgData name="Daniel Dan" userId="S::daniel.dan@modul.ac.at::e2a95533-a292-400e-bcf5-c81090ef720f" providerId="AD" clId="Web-{B0536F86-C883-7A67-11FA-EA747C9A93F9}" dt="2022-02-27T18:15:00.596" v="614" actId="20577"/>
-        <pc:sldMkLst>
-          <pc:docMk/>
-          <pc:sldMk cId="61331412" sldId="314"/>
-        </pc:sldMkLst>
-        <pc:spChg chg="add mod">
-          <ac:chgData name="Daniel Dan" userId="S::daniel.dan@modul.ac.at::e2a95533-a292-400e-bcf5-c81090ef720f" providerId="AD" clId="Web-{B0536F86-C883-7A67-11FA-EA747C9A93F9}" dt="2022-02-27T18:15:00.596" v="614" actId="20577"/>
-          <ac:spMkLst>
-            <pc:docMk/>
-            <pc:sldMk cId="61331412" sldId="314"/>
-            <ac:spMk id="3" creationId="{B6A28984-A9FA-4B39-B437-69AA110E10AB}"/>
-          </ac:spMkLst>
-        </pc:spChg>
-        <pc:spChg chg="mod">
-          <ac:chgData name="Daniel Dan" userId="S::daniel.dan@modul.ac.at::e2a95533-a292-400e-bcf5-c81090ef720f" providerId="AD" clId="Web-{B0536F86-C883-7A67-11FA-EA747C9A93F9}" dt="2022-02-27T18:06:15.319" v="579" actId="20577"/>
-          <ac:spMkLst>
-            <pc:docMk/>
-            <pc:sldMk cId="61331412" sldId="314"/>
-            <ac:spMk id="158" creationId="{00000000-0000-0000-0000-000000000000}"/>
-          </ac:spMkLst>
-        </pc:spChg>
-        <pc:picChg chg="mod">
-          <ac:chgData name="Daniel Dan" userId="S::daniel.dan@modul.ac.at::e2a95533-a292-400e-bcf5-c81090ef720f" providerId="AD" clId="Web-{B0536F86-C883-7A67-11FA-EA747C9A93F9}" dt="2022-02-27T18:06:53.337" v="586" actId="14100"/>
-          <ac:picMkLst>
-            <pc:docMk/>
-            <pc:sldMk cId="61331412" sldId="314"/>
-            <ac:picMk id="2" creationId="{2A515699-D87A-4013-808B-5A3F43412698}"/>
-          </ac:picMkLst>
-        </pc:picChg>
-      </pc:sldChg>
-      <pc:sldChg chg="addSp delSp modSp add del ord replId">
-        <pc:chgData name="Daniel Dan" userId="S::daniel.dan@modul.ac.at::e2a95533-a292-400e-bcf5-c81090ef720f" providerId="AD" clId="Web-{B0536F86-C883-7A67-11FA-EA747C9A93F9}" dt="2022-02-27T18:13:26.888" v="611"/>
-        <pc:sldMkLst>
-          <pc:docMk/>
-          <pc:sldMk cId="2370974219" sldId="315"/>
-        </pc:sldMkLst>
-        <pc:spChg chg="mod">
-          <ac:chgData name="Daniel Dan" userId="S::daniel.dan@modul.ac.at::e2a95533-a292-400e-bcf5-c81090ef720f" providerId="AD" clId="Web-{B0536F86-C883-7A67-11FA-EA747C9A93F9}" dt="2022-02-27T18:04:57.940" v="575" actId="20577"/>
-          <ac:spMkLst>
-            <pc:docMk/>
-            <pc:sldMk cId="2370974219" sldId="315"/>
-            <ac:spMk id="158" creationId="{00000000-0000-0000-0000-000000000000}"/>
-          </ac:spMkLst>
-        </pc:spChg>
-        <pc:picChg chg="add del">
-          <ac:chgData name="Daniel Dan" userId="S::daniel.dan@modul.ac.at::e2a95533-a292-400e-bcf5-c81090ef720f" providerId="AD" clId="Web-{B0536F86-C883-7A67-11FA-EA747C9A93F9}" dt="2022-02-27T18:12:38.245" v="604"/>
-          <ac:picMkLst>
-            <pc:docMk/>
-            <pc:sldMk cId="2370974219" sldId="315"/>
-            <ac:picMk id="2" creationId="{2A515699-D87A-4013-808B-5A3F43412698}"/>
-          </ac:picMkLst>
-        </pc:picChg>
-      </pc:sldChg>
-      <pc:sldChg chg="addSp delSp modSp add replId">
-        <pc:chgData name="Daniel Dan" userId="S::daniel.dan@modul.ac.at::e2a95533-a292-400e-bcf5-c81090ef720f" providerId="AD" clId="Web-{B0536F86-C883-7A67-11FA-EA747C9A93F9}" dt="2022-02-27T18:15:13.347" v="623" actId="20577"/>
-        <pc:sldMkLst>
-          <pc:docMk/>
-          <pc:sldMk cId="4220365655" sldId="316"/>
-        </pc:sldMkLst>
-        <pc:spChg chg="add mod">
-          <ac:chgData name="Daniel Dan" userId="S::daniel.dan@modul.ac.at::e2a95533-a292-400e-bcf5-c81090ef720f" providerId="AD" clId="Web-{B0536F86-C883-7A67-11FA-EA747C9A93F9}" dt="2022-02-27T18:15:13.347" v="623" actId="20577"/>
-          <ac:spMkLst>
-            <pc:docMk/>
-            <pc:sldMk cId="4220365655" sldId="316"/>
-            <ac:spMk id="4" creationId="{568FDDE6-0377-49A5-B3E9-DC84DB2B09DF}"/>
-          </ac:spMkLst>
-        </pc:spChg>
-        <pc:spChg chg="mod">
-          <ac:chgData name="Daniel Dan" userId="S::daniel.dan@modul.ac.at::e2a95533-a292-400e-bcf5-c81090ef720f" providerId="AD" clId="Web-{B0536F86-C883-7A67-11FA-EA747C9A93F9}" dt="2022-02-27T18:12:57.324" v="607" actId="20577"/>
-          <ac:spMkLst>
-            <pc:docMk/>
-            <pc:sldMk cId="4220365655" sldId="316"/>
-            <ac:spMk id="158" creationId="{00000000-0000-0000-0000-000000000000}"/>
-          </ac:spMkLst>
-        </pc:spChg>
-        <pc:picChg chg="del">
-          <ac:chgData name="Daniel Dan" userId="S::daniel.dan@modul.ac.at::e2a95533-a292-400e-bcf5-c81090ef720f" providerId="AD" clId="Web-{B0536F86-C883-7A67-11FA-EA747C9A93F9}" dt="2022-02-27T18:06:31.086" v="580"/>
-          <ac:picMkLst>
-            <pc:docMk/>
-            <pc:sldMk cId="4220365655" sldId="316"/>
-            <ac:picMk id="2" creationId="{2A515699-D87A-4013-808B-5A3F43412698}"/>
-          </ac:picMkLst>
-        </pc:picChg>
-        <pc:picChg chg="add mod">
-          <ac:chgData name="Daniel Dan" userId="S::daniel.dan@modul.ac.at::e2a95533-a292-400e-bcf5-c81090ef720f" providerId="AD" clId="Web-{B0536F86-C883-7A67-11FA-EA747C9A93F9}" dt="2022-02-27T18:06:44.008" v="584" actId="1076"/>
-          <ac:picMkLst>
-            <pc:docMk/>
-            <pc:sldMk cId="4220365655" sldId="316"/>
-            <ac:picMk id="3" creationId="{55592C39-C9C6-4ABC-A848-C32C60C55AC1}"/>
-          </ac:picMkLst>
-        </pc:picChg>
-      </pc:sldChg>
-      <pc:sldChg chg="addSp delSp modSp add replId">
-        <pc:chgData name="Daniel Dan" userId="S::daniel.dan@modul.ac.at::e2a95533-a292-400e-bcf5-c81090ef720f" providerId="AD" clId="Web-{B0536F86-C883-7A67-11FA-EA747C9A93F9}" dt="2022-02-27T18:16:35.476" v="632" actId="20577"/>
-        <pc:sldMkLst>
-          <pc:docMk/>
-          <pc:sldMk cId="1750328212" sldId="317"/>
-        </pc:sldMkLst>
-        <pc:spChg chg="add mod">
-          <ac:chgData name="Daniel Dan" userId="S::daniel.dan@modul.ac.at::e2a95533-a292-400e-bcf5-c81090ef720f" providerId="AD" clId="Web-{B0536F86-C883-7A67-11FA-EA747C9A93F9}" dt="2022-02-27T18:16:35.476" v="632" actId="20577"/>
-          <ac:spMkLst>
-            <pc:docMk/>
-            <pc:sldMk cId="1750328212" sldId="317"/>
-            <ac:spMk id="4" creationId="{EAC4C751-6916-4D9C-8E51-5A3C944A2D18}"/>
-          </ac:spMkLst>
-        </pc:spChg>
-        <pc:spChg chg="mod">
-          <ac:chgData name="Daniel Dan" userId="S::daniel.dan@modul.ac.at::e2a95533-a292-400e-bcf5-c81090ef720f" providerId="AD" clId="Web-{B0536F86-C883-7A67-11FA-EA747C9A93F9}" dt="2022-02-27T18:13:23.591" v="610" actId="20577"/>
-          <ac:spMkLst>
-            <pc:docMk/>
-            <pc:sldMk cId="1750328212" sldId="317"/>
-            <ac:spMk id="158" creationId="{00000000-0000-0000-0000-000000000000}"/>
-          </ac:spMkLst>
-        </pc:spChg>
-        <pc:picChg chg="add mod">
-          <ac:chgData name="Daniel Dan" userId="S::daniel.dan@modul.ac.at::e2a95533-a292-400e-bcf5-c81090ef720f" providerId="AD" clId="Web-{B0536F86-C883-7A67-11FA-EA747C9A93F9}" dt="2022-02-27T18:11:57.383" v="599" actId="1076"/>
-          <ac:picMkLst>
-            <pc:docMk/>
-            <pc:sldMk cId="1750328212" sldId="317"/>
-            <ac:picMk id="2" creationId="{3354AAC9-0A2C-4988-9DF7-89018407934A}"/>
-          </ac:picMkLst>
-        </pc:picChg>
-        <pc:picChg chg="del">
-          <ac:chgData name="Daniel Dan" userId="S::daniel.dan@modul.ac.at::e2a95533-a292-400e-bcf5-c81090ef720f" providerId="AD" clId="Web-{B0536F86-C883-7A67-11FA-EA747C9A93F9}" dt="2022-02-27T18:10:41.661" v="595"/>
-          <ac:picMkLst>
-            <pc:docMk/>
-            <pc:sldMk cId="1750328212" sldId="317"/>
-            <ac:picMk id="3" creationId="{55592C39-C9C6-4ABC-A848-C32C60C55AC1}"/>
-          </ac:picMkLst>
-        </pc:picChg>
-      </pc:sldChg>
-      <pc:sldChg chg="addSp delSp modSp add replId">
-        <pc:chgData name="Daniel Dan" userId="S::daniel.dan@modul.ac.at::e2a95533-a292-400e-bcf5-c81090ef720f" providerId="AD" clId="Web-{B0536F86-C883-7A67-11FA-EA747C9A93F9}" dt="2022-02-27T18:37:03.091" v="951" actId="1076"/>
-        <pc:sldMkLst>
-          <pc:docMk/>
-          <pc:sldMk cId="3435117287" sldId="318"/>
-        </pc:sldMkLst>
-        <pc:spChg chg="add del">
-          <ac:chgData name="Daniel Dan" userId="S::daniel.dan@modul.ac.at::e2a95533-a292-400e-bcf5-c81090ef720f" providerId="AD" clId="Web-{B0536F86-C883-7A67-11FA-EA747C9A93F9}" dt="2022-02-27T18:28:11.935" v="747"/>
-          <ac:spMkLst>
-            <pc:docMk/>
-            <pc:sldMk cId="3435117287" sldId="318"/>
-            <ac:spMk id="3" creationId="{3AF0F248-872A-4B44-96EB-EBAA07041213}"/>
-          </ac:spMkLst>
-        </pc:spChg>
-        <pc:spChg chg="add mod">
-          <ac:chgData name="Daniel Dan" userId="S::daniel.dan@modul.ac.at::e2a95533-a292-400e-bcf5-c81090ef720f" providerId="AD" clId="Web-{B0536F86-C883-7A67-11FA-EA747C9A93F9}" dt="2022-02-27T18:33:29.173" v="901" actId="14100"/>
-          <ac:spMkLst>
-            <pc:docMk/>
-            <pc:sldMk cId="3435117287" sldId="318"/>
-            <ac:spMk id="5" creationId="{639C04D4-9C4E-43DB-B3BD-4A741A4B36C0}"/>
-          </ac:spMkLst>
-        </pc:spChg>
-        <pc:spChg chg="add del mod">
-          <ac:chgData name="Daniel Dan" userId="S::daniel.dan@modul.ac.at::e2a95533-a292-400e-bcf5-c81090ef720f" providerId="AD" clId="Web-{B0536F86-C883-7A67-11FA-EA747C9A93F9}" dt="2022-02-27T18:30:14.617" v="813"/>
-          <ac:spMkLst>
-            <pc:docMk/>
-            <pc:sldMk cId="3435117287" sldId="318"/>
-            <ac:spMk id="6" creationId="{2C537286-233C-4796-9091-E68D3E1064D8}"/>
-          </ac:spMkLst>
-        </pc:spChg>
-        <pc:spChg chg="add mod">
-          <ac:chgData name="Daniel Dan" userId="S::daniel.dan@modul.ac.at::e2a95533-a292-400e-bcf5-c81090ef720f" providerId="AD" clId="Web-{B0536F86-C883-7A67-11FA-EA747C9A93F9}" dt="2022-02-27T18:34:41.708" v="930" actId="20577"/>
-          <ac:spMkLst>
-            <pc:docMk/>
-            <pc:sldMk cId="3435117287" sldId="318"/>
-            <ac:spMk id="7" creationId="{877D5788-EFA2-455C-8462-5136F1C6D7A5}"/>
-          </ac:spMkLst>
-        </pc:spChg>
-        <pc:spChg chg="add mod">
-          <ac:chgData name="Daniel Dan" userId="S::daniel.dan@modul.ac.at::e2a95533-a292-400e-bcf5-c81090ef720f" providerId="AD" clId="Web-{B0536F86-C883-7A67-11FA-EA747C9A93F9}" dt="2022-02-27T18:28:49.609" v="754" actId="1076"/>
-          <ac:spMkLst>
-            <pc:docMk/>
-            <pc:sldMk cId="3435117287" sldId="318"/>
-            <ac:spMk id="8" creationId="{042DB9B9-2AFB-4890-A18C-CDAAE43AF153}"/>
-          </ac:spMkLst>
-        </pc:spChg>
-        <pc:spChg chg="add mod">
-          <ac:chgData name="Daniel Dan" userId="S::daniel.dan@modul.ac.at::e2a95533-a292-400e-bcf5-c81090ef720f" providerId="AD" clId="Web-{B0536F86-C883-7A67-11FA-EA747C9A93F9}" dt="2022-02-27T18:36:30.198" v="943" actId="20577"/>
-          <ac:spMkLst>
-            <pc:docMk/>
-            <pc:sldMk cId="3435117287" sldId="318"/>
-            <ac:spMk id="9" creationId="{DDC27FBF-E02E-4BCB-A831-2B8522B2A17D}"/>
-          </ac:spMkLst>
-        </pc:spChg>
-        <pc:spChg chg="add mod">
-          <ac:chgData name="Daniel Dan" userId="S::daniel.dan@modul.ac.at::e2a95533-a292-400e-bcf5-c81090ef720f" providerId="AD" clId="Web-{B0536F86-C883-7A67-11FA-EA747C9A93F9}" dt="2022-02-27T18:34:36.458" v="923" actId="20577"/>
-          <ac:spMkLst>
-            <pc:docMk/>
-            <pc:sldMk cId="3435117287" sldId="318"/>
-            <ac:spMk id="10" creationId="{A0790012-41B0-4479-83E2-9E565AB0BF58}"/>
-          </ac:spMkLst>
-        </pc:spChg>
-        <pc:spChg chg="add del">
-          <ac:chgData name="Daniel Dan" userId="S::daniel.dan@modul.ac.at::e2a95533-a292-400e-bcf5-c81090ef720f" providerId="AD" clId="Web-{B0536F86-C883-7A67-11FA-EA747C9A93F9}" dt="2022-02-27T18:35:32.867" v="934"/>
-          <ac:spMkLst>
-            <pc:docMk/>
-            <pc:sldMk cId="3435117287" sldId="318"/>
-            <ac:spMk id="11" creationId="{41D6AEB8-77D6-44A4-B1FE-36377EA4E896}"/>
-          </ac:spMkLst>
-        </pc:spChg>
-        <pc:spChg chg="add mod">
-          <ac:chgData name="Daniel Dan" userId="S::daniel.dan@modul.ac.at::e2a95533-a292-400e-bcf5-c81090ef720f" providerId="AD" clId="Web-{B0536F86-C883-7A67-11FA-EA747C9A93F9}" dt="2022-02-27T18:36:12.791" v="938" actId="1076"/>
-          <ac:spMkLst>
-            <pc:docMk/>
-            <pc:sldMk cId="3435117287" sldId="318"/>
-            <ac:spMk id="12" creationId="{972F3C98-09DE-40DC-9458-044B098DBB68}"/>
-          </ac:spMkLst>
-        </pc:spChg>
-        <pc:spChg chg="add mod">
-          <ac:chgData name="Daniel Dan" userId="S::daniel.dan@modul.ac.at::e2a95533-a292-400e-bcf5-c81090ef720f" providerId="AD" clId="Web-{B0536F86-C883-7A67-11FA-EA747C9A93F9}" dt="2022-02-27T18:37:03.091" v="951" actId="1076"/>
-          <ac:spMkLst>
-            <pc:docMk/>
-            <pc:sldMk cId="3435117287" sldId="318"/>
-            <ac:spMk id="13" creationId="{4E9FED30-55C5-49AD-A89A-9611F261A3D4}"/>
-          </ac:spMkLst>
-        </pc:spChg>
-        <pc:spChg chg="add mod">
-          <ac:chgData name="Daniel Dan" userId="S::daniel.dan@modul.ac.at::e2a95533-a292-400e-bcf5-c81090ef720f" providerId="AD" clId="Web-{B0536F86-C883-7A67-11FA-EA747C9A93F9}" dt="2022-02-27T18:36:23.557" v="940" actId="1076"/>
-          <ac:spMkLst>
-            <pc:docMk/>
-            <pc:sldMk cId="3435117287" sldId="318"/>
-            <ac:spMk id="15" creationId="{8A72A438-28F4-4D55-95A4-88716E444225}"/>
-          </ac:spMkLst>
-        </pc:spChg>
-        <pc:spChg chg="mod">
-          <ac:chgData name="Daniel Dan" userId="S::daniel.dan@modul.ac.at::e2a95533-a292-400e-bcf5-c81090ef720f" providerId="AD" clId="Web-{B0536F86-C883-7A67-11FA-EA747C9A93F9}" dt="2022-02-27T18:35:44.180" v="936"/>
-          <ac:spMkLst>
-            <pc:docMk/>
-            <pc:sldMk cId="3435117287" sldId="318"/>
-            <ac:spMk id="158" creationId="{00000000-0000-0000-0000-000000000000}"/>
-          </ac:spMkLst>
-        </pc:spChg>
-        <pc:picChg chg="del">
-          <ac:chgData name="Daniel Dan" userId="S::daniel.dan@modul.ac.at::e2a95533-a292-400e-bcf5-c81090ef720f" providerId="AD" clId="Web-{B0536F86-C883-7A67-11FA-EA747C9A93F9}" dt="2022-02-27T18:17:03.243" v="635"/>
-          <ac:picMkLst>
-            <pc:docMk/>
-            <pc:sldMk cId="3435117287" sldId="318"/>
-            <ac:picMk id="2" creationId="{3354AAC9-0A2C-4988-9DF7-89018407934A}"/>
-          </ac:picMkLst>
-        </pc:picChg>
-      </pc:sldChg>
-      <pc:sldChg chg="addSp delSp modSp add replId">
-        <pc:chgData name="Daniel Dan" userId="S::daniel.dan@modul.ac.at::e2a95533-a292-400e-bcf5-c81090ef720f" providerId="AD" clId="Web-{B0536F86-C883-7A67-11FA-EA747C9A93F9}" dt="2022-02-27T18:25:58.912" v="716" actId="20577"/>
-        <pc:sldMkLst>
-          <pc:docMk/>
-          <pc:sldMk cId="1930231165" sldId="319"/>
-        </pc:sldMkLst>
-        <pc:spChg chg="mod">
-          <ac:chgData name="Daniel Dan" userId="S::daniel.dan@modul.ac.at::e2a95533-a292-400e-bcf5-c81090ef720f" providerId="AD" clId="Web-{B0536F86-C883-7A67-11FA-EA747C9A93F9}" dt="2022-02-27T18:25:58.912" v="716" actId="20577"/>
-          <ac:spMkLst>
-            <pc:docMk/>
-            <pc:sldMk cId="1930231165" sldId="319"/>
-            <ac:spMk id="4" creationId="{EAC4C751-6916-4D9C-8E51-5A3C944A2D18}"/>
-          </ac:spMkLst>
-        </pc:spChg>
-        <pc:spChg chg="add del mod">
-          <ac:chgData name="Daniel Dan" userId="S::daniel.dan@modul.ac.at::e2a95533-a292-400e-bcf5-c81090ef720f" providerId="AD" clId="Web-{B0536F86-C883-7A67-11FA-EA747C9A93F9}" dt="2022-02-27T18:25:07.863" v="702"/>
-          <ac:spMkLst>
-            <pc:docMk/>
-            <pc:sldMk cId="1930231165" sldId="319"/>
-            <ac:spMk id="6" creationId="{0DD5799A-DF6B-417D-BCC3-B77B7C0FFB82}"/>
-          </ac:spMkLst>
-        </pc:spChg>
-        <pc:spChg chg="del">
-          <ac:chgData name="Daniel Dan" userId="S::daniel.dan@modul.ac.at::e2a95533-a292-400e-bcf5-c81090ef720f" providerId="AD" clId="Web-{B0536F86-C883-7A67-11FA-EA747C9A93F9}" dt="2022-02-27T18:25:02.363" v="701"/>
-          <ac:spMkLst>
-            <pc:docMk/>
-            <pc:sldMk cId="1930231165" sldId="319"/>
-            <ac:spMk id="158" creationId="{00000000-0000-0000-0000-000000000000}"/>
-          </ac:spMkLst>
-        </pc:spChg>
-        <pc:picChg chg="del">
-          <ac:chgData name="Daniel Dan" userId="S::daniel.dan@modul.ac.at::e2a95533-a292-400e-bcf5-c81090ef720f" providerId="AD" clId="Web-{B0536F86-C883-7A67-11FA-EA747C9A93F9}" dt="2022-02-27T18:24:43.799" v="697"/>
-          <ac:picMkLst>
-            <pc:docMk/>
-            <pc:sldMk cId="1930231165" sldId="319"/>
-            <ac:picMk id="2" creationId="{3354AAC9-0A2C-4988-9DF7-89018407934A}"/>
-          </ac:picMkLst>
-        </pc:picChg>
-        <pc:picChg chg="add mod">
-          <ac:chgData name="Daniel Dan" userId="S::daniel.dan@modul.ac.at::e2a95533-a292-400e-bcf5-c81090ef720f" providerId="AD" clId="Web-{B0536F86-C883-7A67-11FA-EA747C9A93F9}" dt="2022-02-27T18:24:59.831" v="700" actId="14100"/>
-          <ac:picMkLst>
-            <pc:docMk/>
-            <pc:sldMk cId="1930231165" sldId="319"/>
-            <ac:picMk id="3" creationId="{750D9348-B158-4932-B485-4BC2BDD9E9E2}"/>
-          </ac:picMkLst>
-        </pc:picChg>
-      </pc:sldChg>
-      <pc:sldChg chg="addSp delSp modSp add replId">
-        <pc:chgData name="Daniel Dan" userId="S::daniel.dan@modul.ac.at::e2a95533-a292-400e-bcf5-c81090ef720f" providerId="AD" clId="Web-{B0536F86-C883-7A67-11FA-EA747C9A93F9}" dt="2022-02-27T18:59:20.432" v="1021" actId="20577"/>
-        <pc:sldMkLst>
-          <pc:docMk/>
-          <pc:sldMk cId="705339712" sldId="320"/>
-        </pc:sldMkLst>
-        <pc:spChg chg="add del mod">
-          <ac:chgData name="Daniel Dan" userId="S::daniel.dan@modul.ac.at::e2a95533-a292-400e-bcf5-c81090ef720f" providerId="AD" clId="Web-{B0536F86-C883-7A67-11FA-EA747C9A93F9}" dt="2022-02-27T18:43:10.114" v="962"/>
-          <ac:spMkLst>
-            <pc:docMk/>
-            <pc:sldMk cId="705339712" sldId="320"/>
-            <ac:spMk id="3" creationId="{A6055272-5DD7-434C-B5A8-73F27B07C224}"/>
-          </ac:spMkLst>
-        </pc:spChg>
-        <pc:spChg chg="del">
-          <ac:chgData name="Daniel Dan" userId="S::daniel.dan@modul.ac.at::e2a95533-a292-400e-bcf5-c81090ef720f" providerId="AD" clId="Web-{B0536F86-C883-7A67-11FA-EA747C9A93F9}" dt="2022-02-27T18:42:55.457" v="954"/>
-          <ac:spMkLst>
-            <pc:docMk/>
-            <pc:sldMk cId="705339712" sldId="320"/>
-            <ac:spMk id="5" creationId="{639C04D4-9C4E-43DB-B3BD-4A741A4B36C0}"/>
-          </ac:spMkLst>
-        </pc:spChg>
-        <pc:spChg chg="add mod">
-          <ac:chgData name="Daniel Dan" userId="S::daniel.dan@modul.ac.at::e2a95533-a292-400e-bcf5-c81090ef720f" providerId="AD" clId="Web-{B0536F86-C883-7A67-11FA-EA747C9A93F9}" dt="2022-02-27T18:48:48.428" v="1011" actId="20577"/>
-          <ac:spMkLst>
-            <pc:docMk/>
-            <pc:sldMk cId="705339712" sldId="320"/>
-            <ac:spMk id="6" creationId="{4384693D-6919-4B86-A2AF-93F6D8421A68}"/>
-          </ac:spMkLst>
-        </pc:spChg>
-        <pc:spChg chg="del">
-          <ac:chgData name="Daniel Dan" userId="S::daniel.dan@modul.ac.at::e2a95533-a292-400e-bcf5-c81090ef720f" providerId="AD" clId="Web-{B0536F86-C883-7A67-11FA-EA747C9A93F9}" dt="2022-02-27T18:42:59.707" v="958"/>
-          <ac:spMkLst>
-            <pc:docMk/>
-            <pc:sldMk cId="705339712" sldId="320"/>
-            <ac:spMk id="7" creationId="{877D5788-EFA2-455C-8462-5136F1C6D7A5}"/>
-          </ac:spMkLst>
-        </pc:spChg>
-        <pc:spChg chg="del">
-          <ac:chgData name="Daniel Dan" userId="S::daniel.dan@modul.ac.at::e2a95533-a292-400e-bcf5-c81090ef720f" providerId="AD" clId="Web-{B0536F86-C883-7A67-11FA-EA747C9A93F9}" dt="2022-02-27T18:42:59.707" v="960"/>
-          <ac:spMkLst>
-            <pc:docMk/>
-            <pc:sldMk cId="705339712" sldId="320"/>
-            <ac:spMk id="8" creationId="{042DB9B9-2AFB-4890-A18C-CDAAE43AF153}"/>
-          </ac:spMkLst>
-        </pc:spChg>
-        <pc:spChg chg="del">
-          <ac:chgData name="Daniel Dan" userId="S::daniel.dan@modul.ac.at::e2a95533-a292-400e-bcf5-c81090ef720f" providerId="AD" clId="Web-{B0536F86-C883-7A67-11FA-EA747C9A93F9}" dt="2022-02-27T18:42:59.707" v="959"/>
-          <ac:spMkLst>
-            <pc:docMk/>
-            <pc:sldMk cId="705339712" sldId="320"/>
-            <ac:spMk id="9" creationId="{DDC27FBF-E02E-4BCB-A831-2B8522B2A17D}"/>
-          </ac:spMkLst>
-        </pc:spChg>
-        <pc:spChg chg="del">
-          <ac:chgData name="Daniel Dan" userId="S::daniel.dan@modul.ac.at::e2a95533-a292-400e-bcf5-c81090ef720f" providerId="AD" clId="Web-{B0536F86-C883-7A67-11FA-EA747C9A93F9}" dt="2022-02-27T18:43:05.473" v="961"/>
-          <ac:spMkLst>
-            <pc:docMk/>
-            <pc:sldMk cId="705339712" sldId="320"/>
-            <ac:spMk id="10" creationId="{A0790012-41B0-4479-83E2-9E565AB0BF58}"/>
-          </ac:spMkLst>
-        </pc:spChg>
-        <pc:spChg chg="del">
-          <ac:chgData name="Daniel Dan" userId="S::daniel.dan@modul.ac.at::e2a95533-a292-400e-bcf5-c81090ef720f" providerId="AD" clId="Web-{B0536F86-C883-7A67-11FA-EA747C9A93F9}" dt="2022-02-27T18:42:59.707" v="957"/>
-          <ac:spMkLst>
-            <pc:docMk/>
-            <pc:sldMk cId="705339712" sldId="320"/>
-            <ac:spMk id="12" creationId="{972F3C98-09DE-40DC-9458-044B098DBB68}"/>
-          </ac:spMkLst>
-        </pc:spChg>
-        <pc:spChg chg="del">
-          <ac:chgData name="Daniel Dan" userId="S::daniel.dan@modul.ac.at::e2a95533-a292-400e-bcf5-c81090ef720f" providerId="AD" clId="Web-{B0536F86-C883-7A67-11FA-EA747C9A93F9}" dt="2022-02-27T18:42:59.707" v="955"/>
-          <ac:spMkLst>
-            <pc:docMk/>
-            <pc:sldMk cId="705339712" sldId="320"/>
-            <ac:spMk id="13" creationId="{4E9FED30-55C5-49AD-A89A-9611F261A3D4}"/>
-          </ac:spMkLst>
-        </pc:spChg>
-        <pc:spChg chg="del">
-          <ac:chgData name="Daniel Dan" userId="S::daniel.dan@modul.ac.at::e2a95533-a292-400e-bcf5-c81090ef720f" providerId="AD" clId="Web-{B0536F86-C883-7A67-11FA-EA747C9A93F9}" dt="2022-02-27T18:42:59.707" v="956"/>
-          <ac:spMkLst>
-            <pc:docMk/>
-            <pc:sldMk cId="705339712" sldId="320"/>
-            <ac:spMk id="15" creationId="{8A72A438-28F4-4D55-95A4-88716E444225}"/>
-          </ac:spMkLst>
-        </pc:spChg>
-        <pc:spChg chg="mod">
-          <ac:chgData name="Daniel Dan" userId="S::daniel.dan@modul.ac.at::e2a95533-a292-400e-bcf5-c81090ef720f" providerId="AD" clId="Web-{B0536F86-C883-7A67-11FA-EA747C9A93F9}" dt="2022-02-27T18:59:20.432" v="1021" actId="20577"/>
-          <ac:spMkLst>
-            <pc:docMk/>
-            <pc:sldMk cId="705339712" sldId="320"/>
-            <ac:spMk id="157" creationId="{00000000-0000-0000-0000-000000000000}"/>
-          </ac:spMkLst>
-        </pc:spChg>
-        <pc:spChg chg="del">
-          <ac:chgData name="Daniel Dan" userId="S::daniel.dan@modul.ac.at::e2a95533-a292-400e-bcf5-c81090ef720f" providerId="AD" clId="Web-{B0536F86-C883-7A67-11FA-EA747C9A93F9}" dt="2022-02-27T18:42:53.613" v="953"/>
-          <ac:spMkLst>
-            <pc:docMk/>
-            <pc:sldMk cId="705339712" sldId="320"/>
-            <ac:spMk id="158" creationId="{00000000-0000-0000-0000-000000000000}"/>
-          </ac:spMkLst>
-        </pc:spChg>
-      </pc:sldChg>
-      <pc:sldChg chg="addSp delSp modSp add replId">
-        <pc:chgData name="Daniel Dan" userId="S::daniel.dan@modul.ac.at::e2a95533-a292-400e-bcf5-c81090ef720f" providerId="AD" clId="Web-{B0536F86-C883-7A67-11FA-EA747C9A93F9}" dt="2022-02-27T19:39:52.236" v="1267" actId="20577"/>
-        <pc:sldMkLst>
-          <pc:docMk/>
-          <pc:sldMk cId="3771323663" sldId="321"/>
-        </pc:sldMkLst>
-        <pc:spChg chg="add mod">
-          <ac:chgData name="Daniel Dan" userId="S::daniel.dan@modul.ac.at::e2a95533-a292-400e-bcf5-c81090ef720f" providerId="AD" clId="Web-{B0536F86-C883-7A67-11FA-EA747C9A93F9}" dt="2022-02-27T19:11:46.173" v="1232" actId="20577"/>
-          <ac:spMkLst>
-            <pc:docMk/>
-            <pc:sldMk cId="3771323663" sldId="321"/>
-            <ac:spMk id="2" creationId="{2C8E9D9B-0A9B-430B-8E73-1FD89A2AD545}"/>
-          </ac:spMkLst>
-        </pc:spChg>
-        <pc:spChg chg="add">
-          <ac:chgData name="Daniel Dan" userId="S::daniel.dan@modul.ac.at::e2a95533-a292-400e-bcf5-c81090ef720f" providerId="AD" clId="Web-{B0536F86-C883-7A67-11FA-EA747C9A93F9}" dt="2022-02-27T19:01:08.046" v="1079"/>
-          <ac:spMkLst>
-            <pc:docMk/>
-            <pc:sldMk cId="3771323663" sldId="321"/>
-            <ac:spMk id="3" creationId="{60F5FB00-4525-44CB-9653-DC87B0C1B19B}"/>
-          </ac:spMkLst>
-        </pc:spChg>
-        <pc:spChg chg="add">
-          <ac:chgData name="Daniel Dan" userId="S::daniel.dan@modul.ac.at::e2a95533-a292-400e-bcf5-c81090ef720f" providerId="AD" clId="Web-{B0536F86-C883-7A67-11FA-EA747C9A93F9}" dt="2022-02-27T19:01:08.062" v="1080"/>
-          <ac:spMkLst>
-            <pc:docMk/>
-            <pc:sldMk cId="3771323663" sldId="321"/>
-            <ac:spMk id="5" creationId="{31E6133C-DC43-4AA8-AFEC-81D03EE5E589}"/>
-          </ac:spMkLst>
-        </pc:spChg>
-        <pc:spChg chg="del mod">
-          <ac:chgData name="Daniel Dan" userId="S::daniel.dan@modul.ac.at::e2a95533-a292-400e-bcf5-c81090ef720f" providerId="AD" clId="Web-{B0536F86-C883-7A67-11FA-EA747C9A93F9}" dt="2022-02-27T18:59:50.542" v="1028"/>
-          <ac:spMkLst>
-            <pc:docMk/>
-            <pc:sldMk cId="3771323663" sldId="321"/>
-            <ac:spMk id="6" creationId="{4384693D-6919-4B86-A2AF-93F6D8421A68}"/>
-          </ac:spMkLst>
-        </pc:spChg>
-        <pc:spChg chg="add">
-          <ac:chgData name="Daniel Dan" userId="S::daniel.dan@modul.ac.at::e2a95533-a292-400e-bcf5-c81090ef720f" providerId="AD" clId="Web-{B0536F86-C883-7A67-11FA-EA747C9A93F9}" dt="2022-02-27T19:01:08.062" v="1081"/>
-          <ac:spMkLst>
-            <pc:docMk/>
-            <pc:sldMk cId="3771323663" sldId="321"/>
-            <ac:spMk id="9" creationId="{F8E0876B-00DB-432C-A8E6-3EDB7FCE2242}"/>
-          </ac:spMkLst>
-        </pc:spChg>
-        <pc:spChg chg="add mod">
-          <ac:chgData name="Daniel Dan" userId="S::daniel.dan@modul.ac.at::e2a95533-a292-400e-bcf5-c81090ef720f" providerId="AD" clId="Web-{B0536F86-C883-7A67-11FA-EA747C9A93F9}" dt="2022-02-27T19:02:05.252" v="1108" actId="20577"/>
-          <ac:spMkLst>
-            <pc:docMk/>
-            <pc:sldMk cId="3771323663" sldId="321"/>
-            <ac:spMk id="11" creationId="{3C4D02FA-1CE8-472A-9175-7CEEFF0422CF}"/>
-          </ac:spMkLst>
-        </pc:spChg>
-        <pc:spChg chg="add">
-          <ac:chgData name="Daniel Dan" userId="S::daniel.dan@modul.ac.at::e2a95533-a292-400e-bcf5-c81090ef720f" providerId="AD" clId="Web-{B0536F86-C883-7A67-11FA-EA747C9A93F9}" dt="2022-02-27T19:01:08.078" v="1083"/>
-          <ac:spMkLst>
-            <pc:docMk/>
-            <pc:sldMk cId="3771323663" sldId="321"/>
-            <ac:spMk id="13" creationId="{2913E011-2738-45D2-A9F8-44FABE537C55}"/>
-          </ac:spMkLst>
-        </pc:spChg>
-        <pc:spChg chg="add">
-          <ac:chgData name="Daniel Dan" userId="S::daniel.dan@modul.ac.at::e2a95533-a292-400e-bcf5-c81090ef720f" providerId="AD" clId="Web-{B0536F86-C883-7A67-11FA-EA747C9A93F9}" dt="2022-02-27T19:01:08.093" v="1084"/>
-          <ac:spMkLst>
-            <pc:docMk/>
-            <pc:sldMk cId="3771323663" sldId="321"/>
-            <ac:spMk id="15" creationId="{0EB08093-8619-4222-A05D-D7B5DDA244E7}"/>
-          </ac:spMkLst>
-        </pc:spChg>
-        <pc:spChg chg="add mod">
-          <ac:chgData name="Daniel Dan" userId="S::daniel.dan@modul.ac.at::e2a95533-a292-400e-bcf5-c81090ef720f" providerId="AD" clId="Web-{B0536F86-C883-7A67-11FA-EA747C9A93F9}" dt="2022-02-27T19:02:12.331" v="1111" actId="20577"/>
-          <ac:spMkLst>
-            <pc:docMk/>
-            <pc:sldMk cId="3771323663" sldId="321"/>
-            <ac:spMk id="17" creationId="{63BC5BE6-2497-4219-B3E2-1175FBAC95E1}"/>
-          </ac:spMkLst>
-        </pc:spChg>
-        <pc:spChg chg="add mod">
-          <ac:chgData name="Daniel Dan" userId="S::daniel.dan@modul.ac.at::e2a95533-a292-400e-bcf5-c81090ef720f" providerId="AD" clId="Web-{B0536F86-C883-7A67-11FA-EA747C9A93F9}" dt="2022-02-27T19:39:52.236" v="1267" actId="20577"/>
-          <ac:spMkLst>
-            <pc:docMk/>
-            <pc:sldMk cId="3771323663" sldId="321"/>
-            <ac:spMk id="19" creationId="{16B51973-F20E-4200-BB19-5F8EB3E2960F}"/>
-          </ac:spMkLst>
-        </pc:spChg>
-      </pc:sldChg>
-      <pc:sldChg chg="modSp add replId">
-        <pc:chgData name="Daniel Dan" userId="S::daniel.dan@modul.ac.at::e2a95533-a292-400e-bcf5-c81090ef720f" providerId="AD" clId="Web-{B0536F86-C883-7A67-11FA-EA747C9A93F9}" dt="2022-02-27T19:53:58.162" v="2518" actId="20577"/>
-        <pc:sldMkLst>
-          <pc:docMk/>
-          <pc:sldMk cId="3370229835" sldId="322"/>
-        </pc:sldMkLst>
-        <pc:spChg chg="mod">
-          <ac:chgData name="Daniel Dan" userId="S::daniel.dan@modul.ac.at::e2a95533-a292-400e-bcf5-c81090ef720f" providerId="AD" clId="Web-{B0536F86-C883-7A67-11FA-EA747C9A93F9}" dt="2022-02-27T19:53:58.162" v="2518" actId="20577"/>
-          <ac:spMkLst>
-            <pc:docMk/>
-            <pc:sldMk cId="3370229835" sldId="322"/>
-            <ac:spMk id="2" creationId="{2C8E9D9B-0A9B-430B-8E73-1FD89A2AD545}"/>
-          </ac:spMkLst>
-        </pc:spChg>
-        <pc:spChg chg="mod">
-          <ac:chgData name="Daniel Dan" userId="S::daniel.dan@modul.ac.at::e2a95533-a292-400e-bcf5-c81090ef720f" providerId="AD" clId="Web-{B0536F86-C883-7A67-11FA-EA747C9A93F9}" dt="2022-02-27T19:12:40.597" v="1241" actId="20577"/>
-          <ac:spMkLst>
-            <pc:docMk/>
-            <pc:sldMk cId="3370229835" sldId="322"/>
-            <ac:spMk id="11" creationId="{3C4D02FA-1CE8-472A-9175-7CEEFF0422CF}"/>
-          </ac:spMkLst>
-        </pc:spChg>
-        <pc:spChg chg="mod">
-          <ac:chgData name="Daniel Dan" userId="S::daniel.dan@modul.ac.at::e2a95533-a292-400e-bcf5-c81090ef720f" providerId="AD" clId="Web-{B0536F86-C883-7A67-11FA-EA747C9A93F9}" dt="2022-02-27T19:39:42.611" v="1254" actId="20577"/>
-          <ac:spMkLst>
-            <pc:docMk/>
-            <pc:sldMk cId="3370229835" sldId="322"/>
-            <ac:spMk id="17" creationId="{63BC5BE6-2497-4219-B3E2-1175FBAC95E1}"/>
-          </ac:spMkLst>
-        </pc:spChg>
-        <pc:spChg chg="mod">
-          <ac:chgData name="Daniel Dan" userId="S::daniel.dan@modul.ac.at::e2a95533-a292-400e-bcf5-c81090ef720f" providerId="AD" clId="Web-{B0536F86-C883-7A67-11FA-EA747C9A93F9}" dt="2022-02-27T19:40:07.642" v="1274" actId="20577"/>
-          <ac:spMkLst>
-            <pc:docMk/>
-            <pc:sldMk cId="3370229835" sldId="322"/>
-            <ac:spMk id="19" creationId="{16B51973-F20E-4200-BB19-5F8EB3E2960F}"/>
-          </ac:spMkLst>
-        </pc:spChg>
-      </pc:sldChg>
-      <pc:sldChg chg="addSp delSp modSp add replId">
-        <pc:chgData name="Daniel Dan" userId="S::daniel.dan@modul.ac.at::e2a95533-a292-400e-bcf5-c81090ef720f" providerId="AD" clId="Web-{B0536F86-C883-7A67-11FA-EA747C9A93F9}" dt="2022-02-27T19:51:55.236" v="2459"/>
-        <pc:sldMkLst>
-          <pc:docMk/>
-          <pc:sldMk cId="3219428231" sldId="323"/>
-        </pc:sldMkLst>
-        <pc:spChg chg="del">
-          <ac:chgData name="Daniel Dan" userId="S::daniel.dan@modul.ac.at::e2a95533-a292-400e-bcf5-c81090ef720f" providerId="AD" clId="Web-{B0536F86-C883-7A67-11FA-EA747C9A93F9}" dt="2022-02-27T19:44:48.272" v="1485"/>
-          <ac:spMkLst>
-            <pc:docMk/>
-            <pc:sldMk cId="3219428231" sldId="323"/>
-            <ac:spMk id="2" creationId="{2C8E9D9B-0A9B-430B-8E73-1FD89A2AD545}"/>
-          </ac:spMkLst>
-        </pc:spChg>
-        <pc:spChg chg="del">
-          <ac:chgData name="Daniel Dan" userId="S::daniel.dan@modul.ac.at::e2a95533-a292-400e-bcf5-c81090ef720f" providerId="AD" clId="Web-{B0536F86-C883-7A67-11FA-EA747C9A93F9}" dt="2022-02-27T19:44:52.334" v="1493"/>
-          <ac:spMkLst>
-            <pc:docMk/>
-            <pc:sldMk cId="3219428231" sldId="323"/>
-            <ac:spMk id="3" creationId="{60F5FB00-4525-44CB-9653-DC87B0C1B19B}"/>
-          </ac:spMkLst>
-        </pc:spChg>
-        <pc:spChg chg="del">
-          <ac:chgData name="Daniel Dan" userId="S::daniel.dan@modul.ac.at::e2a95533-a292-400e-bcf5-c81090ef720f" providerId="AD" clId="Web-{B0536F86-C883-7A67-11FA-EA747C9A93F9}" dt="2022-02-27T19:44:52.334" v="1492"/>
-          <ac:spMkLst>
-            <pc:docMk/>
-            <pc:sldMk cId="3219428231" sldId="323"/>
-            <ac:spMk id="5" creationId="{31E6133C-DC43-4AA8-AFEC-81D03EE5E589}"/>
-          </ac:spMkLst>
-        </pc:spChg>
-        <pc:spChg chg="del">
-          <ac:chgData name="Daniel Dan" userId="S::daniel.dan@modul.ac.at::e2a95533-a292-400e-bcf5-c81090ef720f" providerId="AD" clId="Web-{B0536F86-C883-7A67-11FA-EA747C9A93F9}" dt="2022-02-27T19:44:52.334" v="1491"/>
-          <ac:spMkLst>
-            <pc:docMk/>
-            <pc:sldMk cId="3219428231" sldId="323"/>
-            <ac:spMk id="9" creationId="{F8E0876B-00DB-432C-A8E6-3EDB7FCE2242}"/>
-          </ac:spMkLst>
-        </pc:spChg>
-        <pc:spChg chg="del">
-          <ac:chgData name="Daniel Dan" userId="S::daniel.dan@modul.ac.at::e2a95533-a292-400e-bcf5-c81090ef720f" providerId="AD" clId="Web-{B0536F86-C883-7A67-11FA-EA747C9A93F9}" dt="2022-02-27T19:44:52.334" v="1490"/>
-          <ac:spMkLst>
-            <pc:docMk/>
-            <pc:sldMk cId="3219428231" sldId="323"/>
-            <ac:spMk id="11" creationId="{3C4D02FA-1CE8-472A-9175-7CEEFF0422CF}"/>
-          </ac:spMkLst>
-        </pc:spChg>
-        <pc:spChg chg="del">
-          <ac:chgData name="Daniel Dan" userId="S::daniel.dan@modul.ac.at::e2a95533-a292-400e-bcf5-c81090ef720f" providerId="AD" clId="Web-{B0536F86-C883-7A67-11FA-EA747C9A93F9}" dt="2022-02-27T19:44:52.334" v="1489"/>
-          <ac:spMkLst>
-            <pc:docMk/>
-            <pc:sldMk cId="3219428231" sldId="323"/>
-            <ac:spMk id="13" creationId="{2913E011-2738-45D2-A9F8-44FABE537C55}"/>
-          </ac:spMkLst>
-        </pc:spChg>
-        <pc:spChg chg="del">
-          <ac:chgData name="Daniel Dan" userId="S::daniel.dan@modul.ac.at::e2a95533-a292-400e-bcf5-c81090ef720f" providerId="AD" clId="Web-{B0536F86-C883-7A67-11FA-EA747C9A93F9}" dt="2022-02-27T19:44:52.334" v="1488"/>
-          <ac:spMkLst>
-            <pc:docMk/>
-            <pc:sldMk cId="3219428231" sldId="323"/>
-            <ac:spMk id="15" creationId="{0EB08093-8619-4222-A05D-D7B5DDA244E7}"/>
-          </ac:spMkLst>
-        </pc:spChg>
-        <pc:spChg chg="del">
-          <ac:chgData name="Daniel Dan" userId="S::daniel.dan@modul.ac.at::e2a95533-a292-400e-bcf5-c81090ef720f" providerId="AD" clId="Web-{B0536F86-C883-7A67-11FA-EA747C9A93F9}" dt="2022-02-27T19:44:52.334" v="1487"/>
-          <ac:spMkLst>
-            <pc:docMk/>
-            <pc:sldMk cId="3219428231" sldId="323"/>
-            <ac:spMk id="17" creationId="{63BC5BE6-2497-4219-B3E2-1175FBAC95E1}"/>
-          </ac:spMkLst>
-        </pc:spChg>
-        <pc:spChg chg="del">
-          <ac:chgData name="Daniel Dan" userId="S::daniel.dan@modul.ac.at::e2a95533-a292-400e-bcf5-c81090ef720f" providerId="AD" clId="Web-{B0536F86-C883-7A67-11FA-EA747C9A93F9}" dt="2022-02-27T19:44:52.334" v="1486"/>
-          <ac:spMkLst>
-            <pc:docMk/>
-            <pc:sldMk cId="3219428231" sldId="323"/>
-            <ac:spMk id="19" creationId="{16B51973-F20E-4200-BB19-5F8EB3E2960F}"/>
-          </ac:spMkLst>
-        </pc:spChg>
-        <pc:spChg chg="mod">
-          <ac:chgData name="Daniel Dan" userId="S::daniel.dan@modul.ac.at::e2a95533-a292-400e-bcf5-c81090ef720f" providerId="AD" clId="Web-{B0536F86-C883-7A67-11FA-EA747C9A93F9}" dt="2022-02-27T19:44:42.162" v="1484" actId="20577"/>
-          <ac:spMkLst>
-            <pc:docMk/>
-            <pc:sldMk cId="3219428231" sldId="323"/>
-            <ac:spMk id="157" creationId="{00000000-0000-0000-0000-000000000000}"/>
-          </ac:spMkLst>
-        </pc:spChg>
-        <pc:graphicFrameChg chg="add mod modGraphic">
-          <ac:chgData name="Daniel Dan" userId="S::daniel.dan@modul.ac.at::e2a95533-a292-400e-bcf5-c81090ef720f" providerId="AD" clId="Web-{B0536F86-C883-7A67-11FA-EA747C9A93F9}" dt="2022-02-27T19:51:55.236" v="2459"/>
-          <ac:graphicFrameMkLst>
-            <pc:docMk/>
-            <pc:sldMk cId="3219428231" sldId="323"/>
-            <ac:graphicFrameMk id="6" creationId="{6B2D2C6F-2BD6-4075-8B5C-4562248A9DEB}"/>
-          </ac:graphicFrameMkLst>
-        </pc:graphicFrameChg>
-      </pc:sldChg>
-    </pc:docChg>
-  </pc:docChgLst>
-  <pc:docChgLst>
-    <pc:chgData name="Daniel Dan" userId="S::daniel.dan@modul.ac.at::e2a95533-a292-400e-bcf5-c81090ef720f" providerId="AD" clId="Web-{690A8561-0462-61C5-122F-B37E0D33A249}"/>
-    <pc:docChg chg="addSld modSld">
-      <pc:chgData name="Daniel Dan" userId="S::daniel.dan@modul.ac.at::e2a95533-a292-400e-bcf5-c81090ef720f" providerId="AD" clId="Web-{690A8561-0462-61C5-122F-B37E0D33A249}" dt="2022-02-25T18:00:25.011" v="398" actId="20577"/>
-      <pc:docMkLst>
-        <pc:docMk/>
-      </pc:docMkLst>
-      <pc:sldChg chg="modSp">
-        <pc:chgData name="Daniel Dan" userId="S::daniel.dan@modul.ac.at::e2a95533-a292-400e-bcf5-c81090ef720f" providerId="AD" clId="Web-{690A8561-0462-61C5-122F-B37E0D33A249}" dt="2022-02-25T17:10:40.821" v="7" actId="20577"/>
-        <pc:sldMkLst>
-          <pc:docMk/>
-          <pc:sldMk cId="0" sldId="256"/>
-        </pc:sldMkLst>
-        <pc:spChg chg="mod">
-          <ac:chgData name="Daniel Dan" userId="S::daniel.dan@modul.ac.at::e2a95533-a292-400e-bcf5-c81090ef720f" providerId="AD" clId="Web-{690A8561-0462-61C5-122F-B37E0D33A249}" dt="2022-02-25T17:10:40.821" v="7" actId="20577"/>
-          <ac:spMkLst>
-            <pc:docMk/>
-            <pc:sldMk cId="0" sldId="256"/>
-            <ac:spMk id="80" creationId="{00000000-0000-0000-0000-000000000000}"/>
-          </ac:spMkLst>
-        </pc:spChg>
-      </pc:sldChg>
-      <pc:sldChg chg="modSp">
-        <pc:chgData name="Daniel Dan" userId="S::daniel.dan@modul.ac.at::e2a95533-a292-400e-bcf5-c81090ef720f" providerId="AD" clId="Web-{690A8561-0462-61C5-122F-B37E0D33A249}" dt="2022-02-25T17:30:54.181" v="146" actId="20577"/>
-        <pc:sldMkLst>
-          <pc:docMk/>
-          <pc:sldMk cId="0" sldId="257"/>
-        </pc:sldMkLst>
-        <pc:spChg chg="mod">
-          <ac:chgData name="Daniel Dan" userId="S::daniel.dan@modul.ac.at::e2a95533-a292-400e-bcf5-c81090ef720f" providerId="AD" clId="Web-{690A8561-0462-61C5-122F-B37E0D33A249}" dt="2022-02-25T17:19:28.820" v="83" actId="20577"/>
-          <ac:spMkLst>
-            <pc:docMk/>
-            <pc:sldMk cId="0" sldId="257"/>
-            <ac:spMk id="86" creationId="{00000000-0000-0000-0000-000000000000}"/>
-          </ac:spMkLst>
-        </pc:spChg>
-        <pc:spChg chg="mod">
-          <ac:chgData name="Daniel Dan" userId="S::daniel.dan@modul.ac.at::e2a95533-a292-400e-bcf5-c81090ef720f" providerId="AD" clId="Web-{690A8561-0462-61C5-122F-B37E0D33A249}" dt="2022-02-25T17:30:54.181" v="146" actId="20577"/>
-          <ac:spMkLst>
-            <pc:docMk/>
-            <pc:sldMk cId="0" sldId="257"/>
-            <ac:spMk id="87" creationId="{00000000-0000-0000-0000-000000000000}"/>
-          </ac:spMkLst>
-        </pc:spChg>
-      </pc:sldChg>
-      <pc:sldChg chg="addSp delSp modSp">
-        <pc:chgData name="Daniel Dan" userId="S::daniel.dan@modul.ac.at::e2a95533-a292-400e-bcf5-c81090ef720f" providerId="AD" clId="Web-{690A8561-0462-61C5-122F-B37E0D33A249}" dt="2022-02-25T17:41:53.037" v="288" actId="20577"/>
-        <pc:sldMkLst>
-          <pc:docMk/>
-          <pc:sldMk cId="0" sldId="258"/>
-        </pc:sldMkLst>
-        <pc:spChg chg="add mod">
-          <ac:chgData name="Daniel Dan" userId="S::daniel.dan@modul.ac.at::e2a95533-a292-400e-bcf5-c81090ef720f" providerId="AD" clId="Web-{690A8561-0462-61C5-122F-B37E0D33A249}" dt="2022-02-25T17:41:53.037" v="288" actId="20577"/>
-          <ac:spMkLst>
-            <pc:docMk/>
-            <pc:sldMk cId="0" sldId="258"/>
-            <ac:spMk id="2" creationId="{2AC6E17C-95F6-43A8-9683-8D544AABF34F}"/>
-          </ac:spMkLst>
-        </pc:spChg>
-        <pc:spChg chg="mod">
-          <ac:chgData name="Daniel Dan" userId="S::daniel.dan@modul.ac.at::e2a95533-a292-400e-bcf5-c81090ef720f" providerId="AD" clId="Web-{690A8561-0462-61C5-122F-B37E0D33A249}" dt="2022-02-25T17:36:07.680" v="211" actId="20577"/>
-          <ac:spMkLst>
-            <pc:docMk/>
-            <pc:sldMk cId="0" sldId="258"/>
-            <ac:spMk id="93" creationId="{00000000-0000-0000-0000-000000000000}"/>
-          </ac:spMkLst>
-        </pc:spChg>
-        <pc:spChg chg="del mod">
-          <ac:chgData name="Daniel Dan" userId="S::daniel.dan@modul.ac.at::e2a95533-a292-400e-bcf5-c81090ef720f" providerId="AD" clId="Web-{690A8561-0462-61C5-122F-B37E0D33A249}" dt="2022-02-25T17:40:22.956" v="257"/>
-          <ac:spMkLst>
-            <pc:docMk/>
-            <pc:sldMk cId="0" sldId="258"/>
-            <ac:spMk id="94" creationId="{00000000-0000-0000-0000-000000000000}"/>
-          </ac:spMkLst>
-        </pc:spChg>
-      </pc:sldChg>
-      <pc:sldChg chg="addSp delSp modSp">
-        <pc:chgData name="Daniel Dan" userId="S::daniel.dan@modul.ac.at::e2a95533-a292-400e-bcf5-c81090ef720f" providerId="AD" clId="Web-{690A8561-0462-61C5-122F-B37E0D33A249}" dt="2022-02-25T17:47:17.330" v="346" actId="20577"/>
-        <pc:sldMkLst>
-          <pc:docMk/>
-          <pc:sldMk cId="0" sldId="259"/>
-        </pc:sldMkLst>
-        <pc:spChg chg="add mod">
-          <ac:chgData name="Daniel Dan" userId="S::daniel.dan@modul.ac.at::e2a95533-a292-400e-bcf5-c81090ef720f" providerId="AD" clId="Web-{690A8561-0462-61C5-122F-B37E0D33A249}" dt="2022-02-25T17:47:17.330" v="346" actId="20577"/>
-          <ac:spMkLst>
-            <pc:docMk/>
-            <pc:sldMk cId="0" sldId="259"/>
-            <ac:spMk id="2" creationId="{13DC73B7-25F9-40B5-97EA-554C45F92658}"/>
-          </ac:spMkLst>
-        </pc:spChg>
-        <pc:spChg chg="add mod">
-          <ac:chgData name="Daniel Dan" userId="S::daniel.dan@modul.ac.at::e2a95533-a292-400e-bcf5-c81090ef720f" providerId="AD" clId="Web-{690A8561-0462-61C5-122F-B37E0D33A249}" dt="2022-02-25T17:45:55.172" v="331" actId="1076"/>
-          <ac:spMkLst>
-            <pc:docMk/>
-            <pc:sldMk cId="0" sldId="259"/>
-            <ac:spMk id="4" creationId="{B92A72C2-7B1A-4D69-BD9E-0A6D944717BF}"/>
-          </ac:spMkLst>
-        </pc:spChg>
-        <pc:spChg chg="mod">
-          <ac:chgData name="Daniel Dan" userId="S::daniel.dan@modul.ac.at::e2a95533-a292-400e-bcf5-c81090ef720f" providerId="AD" clId="Web-{690A8561-0462-61C5-122F-B37E0D33A249}" dt="2022-02-25T17:42:39.651" v="293" actId="20577"/>
-          <ac:spMkLst>
-            <pc:docMk/>
-            <pc:sldMk cId="0" sldId="259"/>
-            <ac:spMk id="100" creationId="{00000000-0000-0000-0000-000000000000}"/>
-          </ac:spMkLst>
-        </pc:spChg>
-        <pc:spChg chg="del">
-          <ac:chgData name="Daniel Dan" userId="S::daniel.dan@modul.ac.at::e2a95533-a292-400e-bcf5-c81090ef720f" providerId="AD" clId="Web-{690A8561-0462-61C5-122F-B37E0D33A249}" dt="2022-02-25T17:42:42.698" v="294"/>
-          <ac:spMkLst>
-            <pc:docMk/>
-            <pc:sldMk cId="0" sldId="259"/>
-            <ac:spMk id="101" creationId="{00000000-0000-0000-0000-000000000000}"/>
-          </ac:spMkLst>
-        </pc:spChg>
-        <pc:picChg chg="add mod">
-          <ac:chgData name="Daniel Dan" userId="S::daniel.dan@modul.ac.at::e2a95533-a292-400e-bcf5-c81090ef720f" providerId="AD" clId="Web-{690A8561-0462-61C5-122F-B37E0D33A249}" dt="2022-02-25T17:45:04.280" v="313" actId="14100"/>
-          <ac:picMkLst>
-            <pc:docMk/>
-            <pc:sldMk cId="0" sldId="259"/>
-            <ac:picMk id="3" creationId="{6FF03AE6-7DA7-41B3-9B0E-2709BF48736A}"/>
-          </ac:picMkLst>
-        </pc:picChg>
-        <pc:picChg chg="del">
-          <ac:chgData name="Daniel Dan" userId="S::daniel.dan@modul.ac.at::e2a95533-a292-400e-bcf5-c81090ef720f" providerId="AD" clId="Web-{690A8561-0462-61C5-122F-B37E0D33A249}" dt="2022-02-25T17:42:44.401" v="295"/>
-          <ac:picMkLst>
-            <pc:docMk/>
-            <pc:sldMk cId="0" sldId="259"/>
-            <ac:picMk id="102" creationId="{00000000-0000-0000-0000-000000000000}"/>
-          </ac:picMkLst>
-        </pc:picChg>
-      </pc:sldChg>
-      <pc:sldChg chg="addSp delSp modSp">
-        <pc:chgData name="Daniel Dan" userId="S::daniel.dan@modul.ac.at::e2a95533-a292-400e-bcf5-c81090ef720f" providerId="AD" clId="Web-{690A8561-0462-61C5-122F-B37E0D33A249}" dt="2022-02-25T17:47:42.550" v="350" actId="20577"/>
-        <pc:sldMkLst>
-          <pc:docMk/>
-          <pc:sldMk cId="0" sldId="260"/>
-        </pc:sldMkLst>
-        <pc:spChg chg="add mod">
-          <ac:chgData name="Daniel Dan" userId="S::daniel.dan@modul.ac.at::e2a95533-a292-400e-bcf5-c81090ef720f" providerId="AD" clId="Web-{690A8561-0462-61C5-122F-B37E0D33A249}" dt="2022-02-25T17:47:42.550" v="350" actId="20577"/>
-          <ac:spMkLst>
-            <pc:docMk/>
-            <pc:sldMk cId="0" sldId="260"/>
-            <ac:spMk id="2" creationId="{32FF7F9F-5BD7-43AB-9D11-FCEAC2F92173}"/>
-          </ac:spMkLst>
-        </pc:spChg>
-        <pc:spChg chg="mod">
-          <ac:chgData name="Daniel Dan" userId="S::daniel.dan@modul.ac.at::e2a95533-a292-400e-bcf5-c81090ef720f" providerId="AD" clId="Web-{690A8561-0462-61C5-122F-B37E0D33A249}" dt="2022-02-25T17:46:31.313" v="333" actId="20577"/>
-          <ac:spMkLst>
-            <pc:docMk/>
-            <pc:sldMk cId="0" sldId="260"/>
-            <ac:spMk id="108" creationId="{00000000-0000-0000-0000-000000000000}"/>
-          </ac:spMkLst>
-        </pc:spChg>
-        <pc:spChg chg="del mod">
-          <ac:chgData name="Daniel Dan" userId="S::daniel.dan@modul.ac.at::e2a95533-a292-400e-bcf5-c81090ef720f" providerId="AD" clId="Web-{690A8561-0462-61C5-122F-B37E0D33A249}" dt="2022-02-25T17:46:37.986" v="336"/>
-          <ac:spMkLst>
-            <pc:docMk/>
-            <pc:sldMk cId="0" sldId="260"/>
-            <ac:spMk id="109" creationId="{00000000-0000-0000-0000-000000000000}"/>
-          </ac:spMkLst>
-        </pc:spChg>
-      </pc:sldChg>
-      <pc:sldChg chg="addSp delSp modSp">
-        <pc:chgData name="Daniel Dan" userId="S::daniel.dan@modul.ac.at::e2a95533-a292-400e-bcf5-c81090ef720f" providerId="AD" clId="Web-{690A8561-0462-61C5-122F-B37E0D33A249}" dt="2022-02-25T18:00:25.011" v="398" actId="20577"/>
-        <pc:sldMkLst>
-          <pc:docMk/>
-          <pc:sldMk cId="0" sldId="261"/>
-        </pc:sldMkLst>
-        <pc:spChg chg="add mod">
-          <ac:chgData name="Daniel Dan" userId="S::daniel.dan@modul.ac.at::e2a95533-a292-400e-bcf5-c81090ef720f" providerId="AD" clId="Web-{690A8561-0462-61C5-122F-B37E0D33A249}" dt="2022-02-25T17:57:13.850" v="387" actId="20577"/>
-          <ac:spMkLst>
-            <pc:docMk/>
-            <pc:sldMk cId="0" sldId="261"/>
-            <ac:spMk id="2" creationId="{AA3D26AF-68C0-4D87-BDD7-C716EA8FEE9B}"/>
-          </ac:spMkLst>
-        </pc:spChg>
-        <pc:spChg chg="add del mod">
-          <ac:chgData name="Daniel Dan" userId="S::daniel.dan@modul.ac.at::e2a95533-a292-400e-bcf5-c81090ef720f" providerId="AD" clId="Web-{690A8561-0462-61C5-122F-B37E0D33A249}" dt="2022-02-25T18:00:05.198" v="394"/>
-          <ac:spMkLst>
-            <pc:docMk/>
-            <pc:sldMk cId="0" sldId="261"/>
-            <ac:spMk id="4" creationId="{29309802-49C4-4EEF-B1FB-6A6B45A396AF}"/>
-          </ac:spMkLst>
-        </pc:spChg>
-        <pc:spChg chg="add mod">
-          <ac:chgData name="Daniel Dan" userId="S::daniel.dan@modul.ac.at::e2a95533-a292-400e-bcf5-c81090ef720f" providerId="AD" clId="Web-{690A8561-0462-61C5-122F-B37E0D33A249}" dt="2022-02-25T18:00:25.011" v="398" actId="20577"/>
-          <ac:spMkLst>
-            <pc:docMk/>
-            <pc:sldMk cId="0" sldId="261"/>
-            <ac:spMk id="5" creationId="{22FF756C-13B0-4326-B416-4DE81110253F}"/>
-          </ac:spMkLst>
-        </pc:spChg>
-        <pc:spChg chg="mod">
-          <ac:chgData name="Daniel Dan" userId="S::daniel.dan@modul.ac.at::e2a95533-a292-400e-bcf5-c81090ef720f" providerId="AD" clId="Web-{690A8561-0462-61C5-122F-B37E0D33A249}" dt="2022-02-25T17:55:53.332" v="370" actId="20577"/>
-          <ac:spMkLst>
-            <pc:docMk/>
-            <pc:sldMk cId="0" sldId="261"/>
-            <ac:spMk id="115" creationId="{00000000-0000-0000-0000-000000000000}"/>
-          </ac:spMkLst>
-        </pc:spChg>
-        <pc:spChg chg="mod">
-          <ac:chgData name="Daniel Dan" userId="S::daniel.dan@modul.ac.at::e2a95533-a292-400e-bcf5-c81090ef720f" providerId="AD" clId="Web-{690A8561-0462-61C5-122F-B37E0D33A249}" dt="2022-02-25T17:56:12.395" v="373" actId="20577"/>
-          <ac:spMkLst>
-            <pc:docMk/>
-            <pc:sldMk cId="0" sldId="261"/>
-            <ac:spMk id="116" creationId="{00000000-0000-0000-0000-000000000000}"/>
-          </ac:spMkLst>
-        </pc:spChg>
-        <pc:spChg chg="del">
-          <ac:chgData name="Daniel Dan" userId="S::daniel.dan@modul.ac.at::e2a95533-a292-400e-bcf5-c81090ef720f" providerId="AD" clId="Web-{690A8561-0462-61C5-122F-B37E0D33A249}" dt="2022-02-25T17:56:20.739" v="377"/>
-          <ac:spMkLst>
-            <pc:docMk/>
-            <pc:sldMk cId="0" sldId="261"/>
-            <ac:spMk id="117" creationId="{00000000-0000-0000-0000-000000000000}"/>
-          </ac:spMkLst>
-        </pc:spChg>
-        <pc:spChg chg="del">
-          <ac:chgData name="Daniel Dan" userId="S::daniel.dan@modul.ac.at::e2a95533-a292-400e-bcf5-c81090ef720f" providerId="AD" clId="Web-{690A8561-0462-61C5-122F-B37E0D33A249}" dt="2022-02-25T17:56:20.739" v="376"/>
-          <ac:spMkLst>
-            <pc:docMk/>
-            <pc:sldMk cId="0" sldId="261"/>
-            <ac:spMk id="118" creationId="{00000000-0000-0000-0000-000000000000}"/>
-          </ac:spMkLst>
-        </pc:spChg>
-        <pc:spChg chg="del">
-          <ac:chgData name="Daniel Dan" userId="S::daniel.dan@modul.ac.at::e2a95533-a292-400e-bcf5-c81090ef720f" providerId="AD" clId="Web-{690A8561-0462-61C5-122F-B37E0D33A249}" dt="2022-02-25T17:56:39.833" v="378"/>
-          <ac:spMkLst>
-            <pc:docMk/>
-            <pc:sldMk cId="0" sldId="261"/>
-            <ac:spMk id="119" creationId="{00000000-0000-0000-0000-000000000000}"/>
-          </ac:spMkLst>
-        </pc:spChg>
-        <pc:picChg chg="add mod">
-          <ac:chgData name="Daniel Dan" userId="S::daniel.dan@modul.ac.at::e2a95533-a292-400e-bcf5-c81090ef720f" providerId="AD" clId="Web-{690A8561-0462-61C5-122F-B37E0D33A249}" dt="2022-02-25T17:58:50.102" v="390" actId="14100"/>
-          <ac:picMkLst>
-            <pc:docMk/>
-            <pc:sldMk cId="0" sldId="261"/>
-            <ac:picMk id="3" creationId="{4BE485D4-BF09-47D2-A8B4-13ABA91EAB8C}"/>
-          </ac:picMkLst>
-        </pc:picChg>
-        <pc:cxnChg chg="del mod">
-          <ac:chgData name="Daniel Dan" userId="S::daniel.dan@modul.ac.at::e2a95533-a292-400e-bcf5-c81090ef720f" providerId="AD" clId="Web-{690A8561-0462-61C5-122F-B37E0D33A249}" dt="2022-02-25T17:56:20.739" v="375"/>
-          <ac:cxnSpMkLst>
-            <pc:docMk/>
-            <pc:sldMk cId="0" sldId="261"/>
-            <ac:cxnSpMk id="120" creationId="{00000000-0000-0000-0000-000000000000}"/>
-          </ac:cxnSpMkLst>
-        </pc:cxnChg>
-        <pc:cxnChg chg="del mod">
-          <ac:chgData name="Daniel Dan" userId="S::daniel.dan@modul.ac.at::e2a95533-a292-400e-bcf5-c81090ef720f" providerId="AD" clId="Web-{690A8561-0462-61C5-122F-B37E0D33A249}" dt="2022-02-25T17:56:20.739" v="374"/>
-          <ac:cxnSpMkLst>
-            <pc:docMk/>
-            <pc:sldMk cId="0" sldId="261"/>
-            <ac:cxnSpMk id="121" creationId="{00000000-0000-0000-0000-000000000000}"/>
-          </ac:cxnSpMkLst>
-        </pc:cxnChg>
-      </pc:sldChg>
-      <pc:sldChg chg="modSp add replId">
-        <pc:chgData name="Daniel Dan" userId="S::daniel.dan@modul.ac.at::e2a95533-a292-400e-bcf5-c81090ef720f" providerId="AD" clId="Web-{690A8561-0462-61C5-122F-B37E0D33A249}" dt="2022-02-25T17:35:33.085" v="202" actId="20577"/>
-        <pc:sldMkLst>
-          <pc:docMk/>
-          <pc:sldMk cId="862618233" sldId="307"/>
-        </pc:sldMkLst>
-        <pc:spChg chg="mod">
-          <ac:chgData name="Daniel Dan" userId="S::daniel.dan@modul.ac.at::e2a95533-a292-400e-bcf5-c81090ef720f" providerId="AD" clId="Web-{690A8561-0462-61C5-122F-B37E0D33A249}" dt="2022-02-25T17:33:00.638" v="153" actId="20577"/>
-          <ac:spMkLst>
-            <pc:docMk/>
-            <pc:sldMk cId="862618233" sldId="307"/>
-            <ac:spMk id="86" creationId="{00000000-0000-0000-0000-000000000000}"/>
-          </ac:spMkLst>
-        </pc:spChg>
-        <pc:spChg chg="mod">
-          <ac:chgData name="Daniel Dan" userId="S::daniel.dan@modul.ac.at::e2a95533-a292-400e-bcf5-c81090ef720f" providerId="AD" clId="Web-{690A8561-0462-61C5-122F-B37E0D33A249}" dt="2022-02-25T17:35:33.085" v="202" actId="20577"/>
-          <ac:spMkLst>
-            <pc:docMk/>
-            <pc:sldMk cId="862618233" sldId="307"/>
-            <ac:spMk id="87" creationId="{00000000-0000-0000-0000-000000000000}"/>
-          </ac:spMkLst>
-        </pc:spChg>
-      </pc:sldChg>
-      <pc:sldChg chg="addSp delSp modSp add replId">
-        <pc:chgData name="Daniel Dan" userId="S::daniel.dan@modul.ac.at::e2a95533-a292-400e-bcf5-c81090ef720f" providerId="AD" clId="Web-{690A8561-0462-61C5-122F-B37E0D33A249}" dt="2022-02-25T17:54:56.545" v="366" actId="20577"/>
-        <pc:sldMkLst>
-          <pc:docMk/>
-          <pc:sldMk cId="1635341884" sldId="308"/>
-        </pc:sldMkLst>
-        <pc:spChg chg="del mod">
-          <ac:chgData name="Daniel Dan" userId="S::daniel.dan@modul.ac.at::e2a95533-a292-400e-bcf5-c81090ef720f" providerId="AD" clId="Web-{690A8561-0462-61C5-122F-B37E0D33A249}" dt="2022-02-25T17:54:17.091" v="354"/>
-          <ac:spMkLst>
-            <pc:docMk/>
-            <pc:sldMk cId="1635341884" sldId="308"/>
-            <ac:spMk id="2" creationId="{32FF7F9F-5BD7-43AB-9D11-FCEAC2F92173}"/>
-          </ac:spMkLst>
-        </pc:spChg>
-        <pc:spChg chg="add mod">
-          <ac:chgData name="Daniel Dan" userId="S::daniel.dan@modul.ac.at::e2a95533-a292-400e-bcf5-c81090ef720f" providerId="AD" clId="Web-{690A8561-0462-61C5-122F-B37E0D33A249}" dt="2022-02-25T17:54:56.545" v="366" actId="20577"/>
-          <ac:spMkLst>
-            <pc:docMk/>
-            <pc:sldMk cId="1635341884" sldId="308"/>
-            <ac:spMk id="4" creationId="{7BC43673-A9E5-465D-B16A-6019983F8373}"/>
-          </ac:spMkLst>
-        </pc:spChg>
-        <pc:picChg chg="add mod">
-          <ac:chgData name="Daniel Dan" userId="S::daniel.dan@modul.ac.at::e2a95533-a292-400e-bcf5-c81090ef720f" providerId="AD" clId="Web-{690A8561-0462-61C5-122F-B37E0D33A249}" dt="2022-02-25T17:54:32.216" v="358" actId="1076"/>
-          <ac:picMkLst>
-            <pc:docMk/>
-            <pc:sldMk cId="1635341884" sldId="308"/>
-            <ac:picMk id="3" creationId="{7F2C4DF4-3636-442D-8BA9-40DC8304D35B}"/>
-          </ac:picMkLst>
-        </pc:picChg>
-      </pc:sldChg>
-      <pc:sldChg chg="add replId">
-        <pc:chgData name="Daniel Dan" userId="S::daniel.dan@modul.ac.at::e2a95533-a292-400e-bcf5-c81090ef720f" providerId="AD" clId="Web-{690A8561-0462-61C5-122F-B37E0D33A249}" dt="2022-02-25T17:56:05.645" v="371"/>
-        <pc:sldMkLst>
-          <pc:docMk/>
-          <pc:sldMk cId="808992841" sldId="309"/>
-        </pc:sldMkLst>
-      </pc:sldChg>
-    </pc:docChg>
-  </pc:docChgLst>
-  <pc:docChgLst>
-    <pc:chgData name="Daniel Dan" userId="S::daniel.dan@modul.ac.at::e2a95533-a292-400e-bcf5-c81090ef720f" providerId="AD" clId="Web-{6650C529-5FF6-DF91-408E-CA6877BEA450}"/>
-    <pc:docChg chg="modSld">
-      <pc:chgData name="Daniel Dan" userId="S::daniel.dan@modul.ac.at::e2a95533-a292-400e-bcf5-c81090ef720f" providerId="AD" clId="Web-{6650C529-5FF6-DF91-408E-CA6877BEA450}" dt="2022-02-28T12:12:33.858" v="9" actId="20577"/>
-      <pc:docMkLst>
-        <pc:docMk/>
-      </pc:docMkLst>
-      <pc:sldChg chg="modSp">
-        <pc:chgData name="Daniel Dan" userId="S::daniel.dan@modul.ac.at::e2a95533-a292-400e-bcf5-c81090ef720f" providerId="AD" clId="Web-{6650C529-5FF6-DF91-408E-CA6877BEA450}" dt="2022-02-28T12:12:33.858" v="9" actId="20577"/>
-        <pc:sldMkLst>
-          <pc:docMk/>
-          <pc:sldMk cId="0" sldId="305"/>
-        </pc:sldMkLst>
-        <pc:spChg chg="mod">
-          <ac:chgData name="Daniel Dan" userId="S::daniel.dan@modul.ac.at::e2a95533-a292-400e-bcf5-c81090ef720f" providerId="AD" clId="Web-{6650C529-5FF6-DF91-408E-CA6877BEA450}" dt="2022-02-28T12:12:33.858" v="9" actId="20577"/>
-          <ac:spMkLst>
-            <pc:docMk/>
-            <pc:sldMk cId="0" sldId="305"/>
-            <ac:spMk id="438" creationId="{00000000-0000-0000-0000-000000000000}"/>
+            <pc:sldMk cId="7853090" sldId="593"/>
+            <ac:spMk id="8" creationId="{21A8D102-1C16-49D0-9B80-8EAB675A9A7B}"/>
           </ac:spMkLst>
         </pc:spChg>
       </pc:sldChg>
@@ -10822,7 +8637,7 @@
                   <a:schemeClr val="bg1"/>
                 </a:solidFill>
               </a:rPr>
-              <a:t>‹Nr.›</a:t>
+              <a:t>‹#›</a:t>
             </a:fld>
             <a:r>
               <a:rPr lang="de-AT" dirty="0">
@@ -12331,6 +10146,13 @@
           </a:effectRef>
           <a:fontRef idx="minor"/>
         </p:style>
+        <p:txBody>
+          <a:bodyPr/>
+          <a:lstStyle/>
+          <a:p>
+            <a:endParaRPr lang="en-AT"/>
+          </a:p>
+        </p:txBody>
       </p:sp>
       <p:sp>
         <p:nvSpPr>
@@ -12372,6 +10194,13 @@
           </a:effectRef>
           <a:fontRef idx="minor"/>
         </p:style>
+        <p:txBody>
+          <a:bodyPr/>
+          <a:lstStyle/>
+          <a:p>
+            <a:endParaRPr lang="en-AT"/>
+          </a:p>
+        </p:txBody>
       </p:sp>
       <p:sp>
         <p:nvSpPr>
@@ -12413,6 +10242,13 @@
           </a:effectRef>
           <a:fontRef idx="minor"/>
         </p:style>
+        <p:txBody>
+          <a:bodyPr/>
+          <a:lstStyle/>
+          <a:p>
+            <a:endParaRPr lang="en-AT"/>
+          </a:p>
+        </p:txBody>
       </p:sp>
       <p:sp>
         <p:nvSpPr>
@@ -12454,6 +10290,13 @@
           </a:effectRef>
           <a:fontRef idx="minor"/>
         </p:style>
+        <p:txBody>
+          <a:bodyPr/>
+          <a:lstStyle/>
+          <a:p>
+            <a:endParaRPr lang="en-AT"/>
+          </a:p>
+        </p:txBody>
       </p:sp>
       <p:sp>
         <p:nvSpPr>
@@ -12495,6 +10338,13 @@
           </a:effectRef>
           <a:fontRef idx="minor"/>
         </p:style>
+        <p:txBody>
+          <a:bodyPr/>
+          <a:lstStyle/>
+          <a:p>
+            <a:endParaRPr lang="en-AT"/>
+          </a:p>
+        </p:txBody>
       </p:sp>
       <p:sp>
         <p:nvSpPr>
@@ -12536,6 +10386,13 @@
           </a:effectRef>
           <a:fontRef idx="minor"/>
         </p:style>
+        <p:txBody>
+          <a:bodyPr/>
+          <a:lstStyle/>
+          <a:p>
+            <a:endParaRPr lang="en-AT"/>
+          </a:p>
+        </p:txBody>
       </p:sp>
       <p:sp>
         <p:nvSpPr>
@@ -12581,6 +10438,13 @@
             <a:tailEnd type="triangle" w="med" len="med"/>
           </a:ln>
         </p:spPr>
+        <p:txBody>
+          <a:bodyPr/>
+          <a:lstStyle/>
+          <a:p>
+            <a:endParaRPr lang="en-AT"/>
+          </a:p>
+        </p:txBody>
       </p:sp>
       <p:sp>
         <p:nvSpPr>
@@ -12626,6 +10490,13 @@
             <a:tailEnd type="triangle" w="med" len="med"/>
           </a:ln>
         </p:spPr>
+        <p:txBody>
+          <a:bodyPr/>
+          <a:lstStyle/>
+          <a:p>
+            <a:endParaRPr lang="en-AT"/>
+          </a:p>
+        </p:txBody>
       </p:sp>
       <p:sp>
         <p:nvSpPr>
@@ -12671,6 +10542,13 @@
             <a:tailEnd type="triangle" w="med" len="med"/>
           </a:ln>
         </p:spPr>
+        <p:txBody>
+          <a:bodyPr/>
+          <a:lstStyle/>
+          <a:p>
+            <a:endParaRPr lang="en-AT"/>
+          </a:p>
+        </p:txBody>
       </p:sp>
     </p:spTree>
     <p:extLst>
@@ -13683,14 +11561,19 @@
                 <a:latin typeface="Calibri" panose="020F0502020204030204" pitchFamily="34" charset="0"/>
                 <a:ea typeface="Calibri" panose="020F0502020204030204" pitchFamily="34" charset="0"/>
                 <a:cs typeface="Calibri" panose="020F0502020204030204" pitchFamily="34" charset="0"/>
-                <a:hlinkClick r:id="rId3"/>
-              </a:rPr>
-              <a:t>Notebook examples</a:t>
-            </a:r>
+              </a:rPr>
+              <a:t>See unit7.ipynb</a:t>
+            </a:r>
+          </a:p>
+          <a:p>
+            <a:pPr marL="285750" indent="-285750">
+              <a:spcBef>
+                <a:spcPts val="640"/>
+              </a:spcBef>
+              <a:buFont typeface="Wingdings" panose="05000000000000000000" pitchFamily="2" charset="2"/>
+              <a:buChar char="v"/>
+            </a:pPr>
             <a:endParaRPr lang="en-US" sz="1800" dirty="0">
-              <a:highlight>
-                <a:srgbClr val="DAE3F3"/>
-              </a:highlight>
               <a:latin typeface="Calibri" panose="020F0502020204030204" pitchFamily="34" charset="0"/>
               <a:ea typeface="Calibri" panose="020F0502020204030204" pitchFamily="34" charset="0"/>
               <a:cs typeface="Calibri" panose="020F0502020204030204" pitchFamily="34" charset="0"/>
@@ -13826,6 +11709,13 @@
           </a:effectRef>
           <a:fontRef idx="minor"/>
         </p:style>
+        <p:txBody>
+          <a:bodyPr/>
+          <a:lstStyle/>
+          <a:p>
+            <a:endParaRPr lang="en-AT"/>
+          </a:p>
+        </p:txBody>
       </p:sp>
       <p:sp>
         <p:nvSpPr>
@@ -13869,6 +11759,13 @@
           </a:effectRef>
           <a:fontRef idx="minor"/>
         </p:style>
+        <p:txBody>
+          <a:bodyPr/>
+          <a:lstStyle/>
+          <a:p>
+            <a:endParaRPr lang="en-AT"/>
+          </a:p>
+        </p:txBody>
       </p:sp>
       <p:sp>
         <p:nvSpPr>
@@ -13912,6 +11809,13 @@
           </a:effectRef>
           <a:fontRef idx="minor"/>
         </p:style>
+        <p:txBody>
+          <a:bodyPr/>
+          <a:lstStyle/>
+          <a:p>
+            <a:endParaRPr lang="en-AT"/>
+          </a:p>
+        </p:txBody>
       </p:sp>
       <p:sp>
         <p:nvSpPr>
@@ -13955,6 +11859,13 @@
           </a:effectRef>
           <a:fontRef idx="minor"/>
         </p:style>
+        <p:txBody>
+          <a:bodyPr/>
+          <a:lstStyle/>
+          <a:p>
+            <a:endParaRPr lang="en-AT"/>
+          </a:p>
+        </p:txBody>
       </p:sp>
       <p:sp>
         <p:nvSpPr>
@@ -13998,6 +11909,13 @@
           </a:effectRef>
           <a:fontRef idx="minor"/>
         </p:style>
+        <p:txBody>
+          <a:bodyPr/>
+          <a:lstStyle/>
+          <a:p>
+            <a:endParaRPr lang="en-AT"/>
+          </a:p>
+        </p:txBody>
       </p:sp>
       <p:sp>
         <p:nvSpPr>
@@ -14041,6 +11959,13 @@
           </a:effectRef>
           <a:fontRef idx="minor"/>
         </p:style>
+        <p:txBody>
+          <a:bodyPr/>
+          <a:lstStyle/>
+          <a:p>
+            <a:endParaRPr lang="en-AT"/>
+          </a:p>
+        </p:txBody>
       </p:sp>
       <p:cxnSp>
         <p:nvCxnSpPr>
@@ -19686,6 +17611,13 @@
           </a:effectRef>
           <a:fontRef idx="minor"/>
         </p:style>
+        <p:txBody>
+          <a:bodyPr/>
+          <a:lstStyle/>
+          <a:p>
+            <a:endParaRPr lang="en-AT"/>
+          </a:p>
+        </p:txBody>
       </p:sp>
     </p:spTree>
     <p:extLst>
@@ -20789,6 +18721,13 @@
           </a:effectRef>
           <a:fontRef idx="minor"/>
         </p:style>
+        <p:txBody>
+          <a:bodyPr/>
+          <a:lstStyle/>
+          <a:p>
+            <a:endParaRPr lang="en-AT"/>
+          </a:p>
+        </p:txBody>
       </p:sp>
     </p:spTree>
     <p:extLst>
@@ -23684,6 +21623,13 @@
           </a:effectRef>
           <a:fontRef idx="minor"/>
         </p:style>
+        <p:txBody>
+          <a:bodyPr/>
+          <a:lstStyle/>
+          <a:p>
+            <a:endParaRPr lang="en-AT"/>
+          </a:p>
+        </p:txBody>
       </p:sp>
       <p:sp>
         <p:nvSpPr>
@@ -23731,6 +21677,13 @@
           </a:effectRef>
           <a:fontRef idx="minor"/>
         </p:style>
+        <p:txBody>
+          <a:bodyPr/>
+          <a:lstStyle/>
+          <a:p>
+            <a:endParaRPr lang="en-AT"/>
+          </a:p>
+        </p:txBody>
       </p:sp>
     </p:spTree>
     <p:extLst>
@@ -24751,8 +22704,21 @@
                 <a:ea typeface="Cambria Math" panose="02040503050406030204" pitchFamily="18" charset="0"/>
                 <a:cs typeface="Calibri" panose="020F0502020204030204" pitchFamily="34" charset="0"/>
               </a:rPr>
-              <a:t>        f *= I</a:t>
-            </a:r>
+              <a:t>        f *= </a:t>
+            </a:r>
+            <a:r>
+              <a:rPr lang="en-US" sz="1600" dirty="0" err="1">
+                <a:latin typeface="Consolas" panose="020B0609020204030204" pitchFamily="49" charset="0"/>
+                <a:ea typeface="Cambria Math" panose="02040503050406030204" pitchFamily="18" charset="0"/>
+                <a:cs typeface="Calibri" panose="020F0502020204030204" pitchFamily="34" charset="0"/>
+              </a:rPr>
+              <a:t>i</a:t>
+            </a:r>
+            <a:endParaRPr lang="en-US" sz="1600" dirty="0">
+              <a:latin typeface="Consolas" panose="020B0609020204030204" pitchFamily="49" charset="0"/>
+              <a:ea typeface="Cambria Math" panose="02040503050406030204" pitchFamily="18" charset="0"/>
+              <a:cs typeface="Calibri" panose="020F0502020204030204" pitchFamily="34" charset="0"/>
+            </a:endParaRPr>
           </a:p>
           <a:p>
             <a:pPr marL="0" indent="0">
@@ -25447,6 +23413,13 @@
           </a:effectRef>
           <a:fontRef idx="minor"/>
         </p:style>
+        <p:txBody>
+          <a:bodyPr/>
+          <a:lstStyle/>
+          <a:p>
+            <a:endParaRPr lang="en-AT"/>
+          </a:p>
+        </p:txBody>
       </p:sp>
       <mc:AlternateContent xmlns:mc="http://schemas.openxmlformats.org/markup-compatibility/2006" xmlns:a14="http://schemas.microsoft.com/office/drawing/2010/main">
         <mc:Choice Requires="a14">
@@ -28772,6 +26745,13 @@
           </a:effectRef>
           <a:fontRef idx="minor"/>
         </p:style>
+        <p:txBody>
+          <a:bodyPr/>
+          <a:lstStyle/>
+          <a:p>
+            <a:endParaRPr lang="en-AT"/>
+          </a:p>
+        </p:txBody>
       </p:sp>
       <p:sp>
         <p:nvSpPr>
@@ -28819,6 +26799,13 @@
           </a:effectRef>
           <a:fontRef idx="minor"/>
         </p:style>
+        <p:txBody>
+          <a:bodyPr/>
+          <a:lstStyle/>
+          <a:p>
+            <a:endParaRPr lang="en-AT"/>
+          </a:p>
+        </p:txBody>
       </p:sp>
     </p:spTree>
     <p:extLst>
@@ -30706,6 +28693,13 @@
           </a:effectRef>
           <a:fontRef idx="minor"/>
         </p:style>
+        <p:txBody>
+          <a:bodyPr/>
+          <a:lstStyle/>
+          <a:p>
+            <a:endParaRPr lang="en-AT"/>
+          </a:p>
+        </p:txBody>
       </p:sp>
       <mc:AlternateContent xmlns:mc="http://schemas.openxmlformats.org/markup-compatibility/2006" xmlns:a14="http://schemas.microsoft.com/office/drawing/2010/main">
         <mc:Choice Requires="a14">
@@ -33381,8 +31375,8 @@
           </a:p>
         </p:txBody>
       </p:sp>
-      <mc:AlternateContent xmlns:mc="http://schemas.openxmlformats.org/markup-compatibility/2006" xmlns:a14="http://schemas.microsoft.com/office/drawing/2010/main">
-        <mc:Choice Requires="a14">
+      <mc:AlternateContent xmlns:mc="http://schemas.openxmlformats.org/markup-compatibility/2006">
+        <mc:Choice xmlns:a14="http://schemas.microsoft.com/office/drawing/2010/main" Requires="a14">
           <p:sp>
             <p:nvSpPr>
               <p:cNvPr id="8" name="Google Shape;87;p2">
@@ -33813,21 +31807,15 @@
                 </a:pPr>
                 <a:r>
                   <a:rPr lang="en-US" sz="1800" dirty="0">
+                    <a:highlight>
+                      <a:srgbClr val="DAE3F3"/>
+                    </a:highlight>
                     <a:latin typeface="Calibri" panose="020F0502020204030204" pitchFamily="34" charset="0"/>
                     <a:ea typeface="Calibri" panose="020F0502020204030204" pitchFamily="34" charset="0"/>
                     <a:cs typeface="Calibri" panose="020F0502020204030204" pitchFamily="34" charset="0"/>
-                    <a:hlinkClick r:id="rId3"/>
                   </a:rPr>
-                  <a:t>Notebook examples</a:t>
+                  <a:t>See unit7.ipynb</a:t>
                 </a:r>
-                <a:endParaRPr lang="en-US" sz="1800" dirty="0">
-                  <a:highlight>
-                    <a:srgbClr val="DAE3F3"/>
-                  </a:highlight>
-                  <a:latin typeface="Calibri" panose="020F0502020204030204" pitchFamily="34" charset="0"/>
-                  <a:ea typeface="Calibri" panose="020F0502020204030204" pitchFamily="34" charset="0"/>
-                  <a:cs typeface="Calibri" panose="020F0502020204030204" pitchFamily="34" charset="0"/>
-                </a:endParaRPr>
               </a:p>
               <a:p>
                 <a:pPr marL="0" indent="0">
@@ -33844,7 +31832,7 @@
             </p:txBody>
           </p:sp>
         </mc:Choice>
-        <mc:Fallback xmlns="">
+        <mc:Fallback>
           <p:sp>
             <p:nvSpPr>
               <p:cNvPr id="8" name="Google Shape;87;p2">
@@ -33870,9 +31858,9 @@
                 <a:avLst/>
               </a:prstGeom>
               <a:blipFill>
-                <a:blip r:embed="rId4"/>
+                <a:blip r:embed="rId3"/>
                 <a:stretch>
-                  <a:fillRect l="-1278" b="-51385"/>
+                  <a:fillRect l="-1180" b="-51042"/>
                 </a:stretch>
               </a:blipFill>
               <a:ln>
@@ -33884,7 +31872,7 @@
               <a:lstStyle/>
               <a:p>
                 <a:r>
-                  <a:rPr lang="de-AT">
+                  <a:rPr lang="en-AT">
                     <a:noFill/>
                   </a:rPr>
                   <a:t> </a:t>
@@ -34312,6 +32300,13 @@
           </a:effectRef>
           <a:fontRef idx="minor"/>
         </p:style>
+        <p:txBody>
+          <a:bodyPr/>
+          <a:lstStyle/>
+          <a:p>
+            <a:endParaRPr lang="en-AT"/>
+          </a:p>
+        </p:txBody>
       </p:sp>
       <p:sp>
         <p:nvSpPr>
@@ -34359,6 +32354,13 @@
           </a:effectRef>
           <a:fontRef idx="minor"/>
         </p:style>
+        <p:txBody>
+          <a:bodyPr/>
+          <a:lstStyle/>
+          <a:p>
+            <a:endParaRPr lang="en-AT"/>
+          </a:p>
+        </p:txBody>
       </p:sp>
       <p:sp>
         <p:nvSpPr>
@@ -34406,6 +32408,13 @@
           </a:effectRef>
           <a:fontRef idx="minor"/>
         </p:style>
+        <p:txBody>
+          <a:bodyPr/>
+          <a:lstStyle/>
+          <a:p>
+            <a:endParaRPr lang="en-AT"/>
+          </a:p>
+        </p:txBody>
       </p:sp>
       <p:sp>
         <p:nvSpPr>
@@ -35022,21 +33031,43 @@
                                   </p:childTnLst>
                                 </p:cTn>
                               </p:par>
+                            </p:childTnLst>
+                          </p:cTn>
+                        </p:par>
+                      </p:childTnLst>
+                    </p:cTn>
+                  </p:par>
+                  <p:par>
+                    <p:cTn id="19" fill="hold">
+                      <p:stCondLst>
+                        <p:cond delay="indefinite"/>
+                      </p:stCondLst>
+                      <p:childTnLst>
+                        <p:par>
+                          <p:cTn id="20" fill="hold">
+                            <p:stCondLst>
+                              <p:cond delay="0"/>
+                            </p:stCondLst>
+                            <p:childTnLst>
                               <p:par>
-                                <p:cTn id="19" presetID="1" presetClass="entr" presetSubtype="0" fill="hold" nodeType="withEffect">
+                                <p:cTn id="21" presetID="1" presetClass="entr" presetSubtype="0" fill="hold" nodeType="clickEffect">
                                   <p:stCondLst>
                                     <p:cond delay="0"/>
                                   </p:stCondLst>
                                   <p:childTnLst>
                                     <p:set>
                                       <p:cBhvr>
-                                        <p:cTn id="20" dur="1" fill="hold">
+                                        <p:cTn id="22" dur="1" fill="hold">
                                           <p:stCondLst>
                                             <p:cond delay="0"/>
                                           </p:stCondLst>
                                         </p:cTn>
                                         <p:tgtEl>
-                                          <p:spTgt spid="6"/>
+                                          <p:spTgt spid="8">
+                                            <p:txEl>
+                                              <p:pRg st="8" end="8"/>
+                                            </p:txEl>
+                                          </p:spTgt>
                                         </p:tgtEl>
                                         <p:attrNameLst>
                                           <p:attrName>style.visibility</p:attrName>
@@ -35049,26 +33080,8 @@
                                   </p:childTnLst>
                                 </p:cTn>
                               </p:par>
-                            </p:childTnLst>
-                          </p:cTn>
-                        </p:par>
-                      </p:childTnLst>
-                    </p:cTn>
-                  </p:par>
-                  <p:par>
-                    <p:cTn id="21" fill="hold">
-                      <p:stCondLst>
-                        <p:cond delay="indefinite"/>
-                      </p:stCondLst>
-                      <p:childTnLst>
-                        <p:par>
-                          <p:cTn id="22" fill="hold">
-                            <p:stCondLst>
-                              <p:cond delay="0"/>
-                            </p:stCondLst>
-                            <p:childTnLst>
                               <p:par>
-                                <p:cTn id="23" presetID="1" presetClass="entr" presetSubtype="0" fill="hold" grpId="0" nodeType="clickEffect">
+                                <p:cTn id="23" presetID="1" presetClass="entr" presetSubtype="0" fill="hold" nodeType="withEffect">
                                   <p:stCondLst>
                                     <p:cond delay="0"/>
                                   </p:stCondLst>
@@ -35081,7 +33094,7 @@
                                           </p:stCondLst>
                                         </p:cTn>
                                         <p:tgtEl>
-                                          <p:spTgt spid="9"/>
+                                          <p:spTgt spid="6"/>
                                         </p:tgtEl>
                                         <p:attrNameLst>
                                           <p:attrName>style.visibility</p:attrName>
@@ -35113,7 +33126,7 @@
                             </p:stCondLst>
                             <p:childTnLst>
                               <p:par>
-                                <p:cTn id="27" presetID="1" presetClass="entr" presetSubtype="0" fill="hold" nodeType="clickEffect">
+                                <p:cTn id="27" presetID="1" presetClass="entr" presetSubtype="0" fill="hold" grpId="0" nodeType="clickEffect">
                                   <p:stCondLst>
                                     <p:cond delay="0"/>
                                   </p:stCondLst>
@@ -35126,11 +33139,7 @@
                                           </p:stCondLst>
                                         </p:cTn>
                                         <p:tgtEl>
-                                          <p:spTgt spid="8">
-                                            <p:txEl>
-                                              <p:pRg st="8" end="8"/>
-                                            </p:txEl>
-                                          </p:spTgt>
+                                          <p:spTgt spid="9"/>
                                         </p:tgtEl>
                                         <p:attrNameLst>
                                           <p:attrName>style.visibility</p:attrName>
@@ -35924,18 +33933,15 @@
             </a:pPr>
             <a:r>
               <a:rPr lang="en-US" sz="1800" dirty="0">
+                <a:highlight>
+                  <a:srgbClr val="DAE3F3"/>
+                </a:highlight>
                 <a:latin typeface="Calibri" panose="020F0502020204030204" pitchFamily="34" charset="0"/>
                 <a:ea typeface="Calibri" panose="020F0502020204030204" pitchFamily="34" charset="0"/>
                 <a:cs typeface="Calibri" panose="020F0502020204030204" pitchFamily="34" charset="0"/>
-                <a:hlinkClick r:id="rId3"/>
-              </a:rPr>
-              <a:t>Notebook examples</a:t>
-            </a:r>
-            <a:endParaRPr lang="en-US" sz="1800" dirty="0">
-              <a:latin typeface="Calibri" panose="020F0502020204030204" pitchFamily="34" charset="0"/>
-              <a:ea typeface="Calibri" panose="020F0502020204030204" pitchFamily="34" charset="0"/>
-              <a:cs typeface="Calibri" panose="020F0502020204030204" pitchFamily="34" charset="0"/>
-            </a:endParaRPr>
+              </a:rPr>
+              <a:t>See unit7.ipynb</a:t>
+            </a:r>
           </a:p>
         </p:txBody>
       </p:sp>
@@ -35954,7 +33960,7 @@
           <p:nvPr/>
         </p:nvPicPr>
         <p:blipFill>
-          <a:blip r:embed="rId4"/>
+          <a:blip r:embed="rId3"/>
           <a:stretch>
             <a:fillRect/>
           </a:stretch>
@@ -36161,8 +34167,8 @@
         </p:nvSpPr>
         <p:spPr>
           <a:xfrm>
-            <a:off x="461938" y="1605600"/>
-            <a:ext cx="8229600" cy="4802400"/>
+            <a:off x="461938" y="1083087"/>
+            <a:ext cx="8229600" cy="4555093"/>
           </a:xfrm>
           <a:prstGeom prst="rect">
             <a:avLst/>
@@ -36606,23 +34612,38 @@
             </a:endParaRPr>
           </a:p>
           <a:p>
-            <a:pPr lvl="0">
+            <a:pPr>
               <a:defRPr/>
             </a:pPr>
-            <a:r>
-              <a:rPr lang="en-US" sz="1800" dirty="0">
-                <a:latin typeface="Calibri" panose="020F0502020204030204" pitchFamily="34" charset="0"/>
-                <a:ea typeface="Calibri" panose="020F0502020204030204" pitchFamily="34" charset="0"/>
-                <a:cs typeface="Calibri" panose="020F0502020204030204" pitchFamily="34" charset="0"/>
-                <a:hlinkClick r:id="rId3"/>
-              </a:rPr>
-              <a:t>Notebook example.</a:t>
-            </a:r>
             <a:endParaRPr lang="en-US" sz="1800" dirty="0">
               <a:latin typeface="Calibri" panose="020F0502020204030204" pitchFamily="34" charset="0"/>
               <a:ea typeface="Calibri" panose="020F0502020204030204" pitchFamily="34" charset="0"/>
               <a:cs typeface="Calibri" panose="020F0502020204030204" pitchFamily="34" charset="0"/>
             </a:endParaRPr>
+          </a:p>
+          <a:p>
+            <a:pPr>
+              <a:defRPr/>
+            </a:pPr>
+            <a:r>
+              <a:rPr lang="en-US" sz="1800" dirty="0">
+                <a:latin typeface="Calibri" panose="020F0502020204030204" pitchFamily="34" charset="0"/>
+                <a:ea typeface="Calibri" panose="020F0502020204030204" pitchFamily="34" charset="0"/>
+                <a:cs typeface="Calibri" panose="020F0502020204030204" pitchFamily="34" charset="0"/>
+              </a:rPr>
+              <a:t>See </a:t>
+            </a:r>
+            <a:r>
+              <a:rPr lang="en-US" sz="1800" dirty="0">
+                <a:highlight>
+                  <a:srgbClr val="DAE3F3"/>
+                </a:highlight>
+                <a:latin typeface="Calibri" panose="020F0502020204030204" pitchFamily="34" charset="0"/>
+                <a:ea typeface="Calibri" panose="020F0502020204030204" pitchFamily="34" charset="0"/>
+                <a:cs typeface="Calibri" panose="020F0502020204030204" pitchFamily="34" charset="0"/>
+              </a:rPr>
+              <a:t>See unit7_exercise.ipynb</a:t>
+            </a:r>
           </a:p>
           <a:p>
             <a:pPr lvl="0">
@@ -36981,7 +35002,7 @@
         </p:blipFill>
         <p:spPr>
           <a:xfrm>
-            <a:off x="3976194" y="5497569"/>
+            <a:off x="1411124" y="5336763"/>
             <a:ext cx="876300" cy="876300"/>
           </a:xfrm>
           <a:prstGeom prst="rect">
@@ -39916,6 +37937,13 @@
             <a:tailEnd type="triangle" w="med" len="med"/>
           </a:ln>
         </p:spPr>
+        <p:txBody>
+          <a:bodyPr/>
+          <a:lstStyle/>
+          <a:p>
+            <a:endParaRPr lang="en-AT"/>
+          </a:p>
+        </p:txBody>
       </p:sp>
       <p:sp>
         <p:nvSpPr>

--- a/Slides/unit_7_prog_4.pptx
+++ b/Slides/unit_7_prog_4.pptx
@@ -305,7 +305,7 @@
       </p15:sldGuideLst>
     </p:ext>
     <p:ext uri="http://customooxmlschemas.google.com/">
-      <go:slidesCustomData xmlns="" xmlns:mc="http://schemas.openxmlformats.org/markup-compatibility/2006" xmlns:mv="urn:schemas-microsoft-com:mac:vml" xmlns:c="http://schemas.openxmlformats.org/drawingml/2006/chart" xmlns:dgm="http://schemas.openxmlformats.org/drawingml/2006/diagram" xmlns:o="urn:schemas-microsoft-com:office:office" xmlns:v="urn:schemas-microsoft-com:vml" xmlns:pvml="urn:schemas-microsoft-com:office:powerpoint" xmlns:com="http://schemas.openxmlformats.org/drawingml/2006/compatibility" xmlns:p14="http://schemas.microsoft.com/office/powerpoint/2010/main" xmlns:p15="http://schemas.microsoft.com/office/powerpoint/2012/main" xmlns:ahyp="http://schemas.microsoft.com/office/drawing/2018/hyperlinkcolor" xmlns:go="http://customooxmlschemas.google.com/" r:id="rId80" roundtripDataSignature="AMtx7milieXwv5OUJdQk1cj/252aZuXcIQ=="/>
+      <go:slidesCustomData xmlns:go="http://customooxmlschemas.google.com/" xmlns:ahyp="http://schemas.microsoft.com/office/drawing/2018/hyperlinkcolor" xmlns:p15="http://schemas.microsoft.com/office/powerpoint/2012/main" xmlns:p14="http://schemas.microsoft.com/office/powerpoint/2010/main" xmlns:com="http://schemas.openxmlformats.org/drawingml/2006/compatibility" xmlns:pvml="urn:schemas-microsoft-com:office:powerpoint" xmlns:v="urn:schemas-microsoft-com:vml" xmlns:o="urn:schemas-microsoft-com:office:office" xmlns:dgm="http://schemas.openxmlformats.org/drawingml/2006/diagram" xmlns:c="http://schemas.openxmlformats.org/drawingml/2006/chart" xmlns:mv="urn:schemas-microsoft-com:mac:vml" xmlns:mc="http://schemas.openxmlformats.org/markup-compatibility/2006" xmlns="" r:id="rId80" roundtripDataSignature="AMtx7milieXwv5OUJdQk1cj/252aZuXcIQ=="/>
     </p:ext>
   </p:extLst>
 </p:presentation>
@@ -314,7 +314,7 @@
 <file path=ppt/revisionInfo.xml><?xml version="1.0" encoding="utf-8"?>
 <p1510:revInfo xmlns:a="http://schemas.openxmlformats.org/drawingml/2006/main" xmlns:r="http://schemas.openxmlformats.org/officeDocument/2006/relationships" xmlns:p1510="http://schemas.microsoft.com/office/powerpoint/2015/10/main">
   <p1510:revLst>
-    <p1510:client id="{DF2046C9-5CA7-6749-A58F-6F62A7ACF621}" v="38" dt="2025-11-11T20:28:27.254"/>
+    <p1510:client id="{DF2046C9-5CA7-6749-A58F-6F62A7ACF621}" v="43" dt="2025-11-13T09:51:38.804"/>
   </p1510:revLst>
 </p1510:revInfo>
 </file>
@@ -324,16 +324,24 @@
   <pc:docChgLst>
     <pc:chgData name="Ingo Frommholz" userId="ee3b4549-206f-4e4f-93a1-b7ff676f0af7" providerId="ADAL" clId="{5F8971C4-3D52-5FAB-A951-9912A46CDBB0}"/>
     <pc:docChg chg="modSld">
-      <pc:chgData name="Ingo Frommholz" userId="ee3b4549-206f-4e4f-93a1-b7ff676f0af7" providerId="ADAL" clId="{5F8971C4-3D52-5FAB-A951-9912A46CDBB0}" dt="2025-11-11T20:28:27.254" v="74"/>
+      <pc:chgData name="Ingo Frommholz" userId="ee3b4549-206f-4e4f-93a1-b7ff676f0af7" providerId="ADAL" clId="{5F8971C4-3D52-5FAB-A951-9912A46CDBB0}" dt="2025-11-13T09:51:38.804" v="81" actId="404"/>
       <pc:docMkLst>
         <pc:docMk/>
       </pc:docMkLst>
-      <pc:sldChg chg="modSp mod">
-        <pc:chgData name="Ingo Frommholz" userId="ee3b4549-206f-4e4f-93a1-b7ff676f0af7" providerId="ADAL" clId="{5F8971C4-3D52-5FAB-A951-9912A46CDBB0}" dt="2025-11-11T20:28:02.199" v="73" actId="1076"/>
+      <pc:sldChg chg="addSp delSp modSp mod">
+        <pc:chgData name="Ingo Frommholz" userId="ee3b4549-206f-4e4f-93a1-b7ff676f0af7" providerId="ADAL" clId="{5F8971C4-3D52-5FAB-A951-9912A46CDBB0}" dt="2025-11-13T09:31:11.111" v="77"/>
         <pc:sldMkLst>
           <pc:docMk/>
           <pc:sldMk cId="2688265821" sldId="461"/>
         </pc:sldMkLst>
+        <pc:spChg chg="add del mod">
+          <ac:chgData name="Ingo Frommholz" userId="ee3b4549-206f-4e4f-93a1-b7ff676f0af7" providerId="ADAL" clId="{5F8971C4-3D52-5FAB-A951-9912A46CDBB0}" dt="2025-11-13T09:31:11.111" v="77"/>
+          <ac:spMkLst>
+            <pc:docMk/>
+            <pc:sldMk cId="2688265821" sldId="461"/>
+            <ac:spMk id="3" creationId="{B0032EC6-54E9-E35F-1689-A685A366BF14}"/>
+          </ac:spMkLst>
+        </pc:spChg>
         <pc:spChg chg="mod">
           <ac:chgData name="Ingo Frommholz" userId="ee3b4549-206f-4e4f-93a1-b7ff676f0af7" providerId="ADAL" clId="{5F8971C4-3D52-5FAB-A951-9912A46CDBB0}" dt="2025-11-11T20:27:51.269" v="71" actId="1035"/>
           <ac:spMkLst>
@@ -397,7 +405,7 @@
         </pc:spChg>
       </pc:sldChg>
       <pc:sldChg chg="modSp modAnim">
-        <pc:chgData name="Ingo Frommholz" userId="ee3b4549-206f-4e4f-93a1-b7ff676f0af7" providerId="ADAL" clId="{5F8971C4-3D52-5FAB-A951-9912A46CDBB0}" dt="2025-11-11T20:25:50.273" v="34" actId="20577"/>
+        <pc:chgData name="Ingo Frommholz" userId="ee3b4549-206f-4e4f-93a1-b7ff676f0af7" providerId="ADAL" clId="{5F8971C4-3D52-5FAB-A951-9912A46CDBB0}" dt="2025-11-13T09:51:38.804" v="81" actId="404"/>
         <pc:sldMkLst>
           <pc:docMk/>
           <pc:sldMk cId="7853090" sldId="593"/>
@@ -408,6 +416,14 @@
             <pc:docMk/>
             <pc:sldMk cId="7853090" sldId="593"/>
             <ac:spMk id="8" creationId="{21A8D102-1C16-49D0-9B80-8EAB675A9A7B}"/>
+          </ac:spMkLst>
+        </pc:spChg>
+        <pc:spChg chg="mod">
+          <ac:chgData name="Ingo Frommholz" userId="ee3b4549-206f-4e4f-93a1-b7ff676f0af7" providerId="ADAL" clId="{5F8971C4-3D52-5FAB-A951-9912A46CDBB0}" dt="2025-11-13T09:51:38.804" v="81" actId="404"/>
+          <ac:spMkLst>
+            <pc:docMk/>
+            <pc:sldMk cId="7853090" sldId="593"/>
+            <ac:spMk id="9" creationId="{C28C4A5E-747D-470D-8354-D36B25F53E23}"/>
           </ac:spMkLst>
         </pc:spChg>
       </pc:sldChg>
@@ -31375,8 +31391,8 @@
           </a:p>
         </p:txBody>
       </p:sp>
-      <mc:AlternateContent xmlns:mc="http://schemas.openxmlformats.org/markup-compatibility/2006">
-        <mc:Choice xmlns:a14="http://schemas.microsoft.com/office/drawing/2010/main" Requires="a14">
+      <mc:AlternateContent xmlns:mc="http://schemas.openxmlformats.org/markup-compatibility/2006" xmlns:a14="http://schemas.microsoft.com/office/drawing/2010/main">
+        <mc:Choice Requires="a14">
           <p:sp>
             <p:nvSpPr>
               <p:cNvPr id="8" name="Google Shape;87;p2">
@@ -31832,7 +31848,7 @@
             </p:txBody>
           </p:sp>
         </mc:Choice>
-        <mc:Fallback>
+        <mc:Fallback xmlns="">
           <p:sp>
             <p:nvSpPr>
               <p:cNvPr id="8" name="Google Shape;87;p2">
@@ -32703,72 +32719,44 @@
               </a:spcBef>
             </a:pPr>
             <a:r>
-              <a:rPr lang="pt-BR" dirty="0">
+              <a:rPr lang="pt-BR" sz="1200" dirty="0">
                 <a:latin typeface="Consolas" panose="020B0609020204030204" pitchFamily="49" charset="0"/>
                 <a:ea typeface="Cambria Math" panose="02040503050406030204" pitchFamily="18" charset="0"/>
                 <a:cs typeface="Calibri" panose="020F0502020204030204" pitchFamily="34" charset="0"/>
               </a:rPr>
-              <a:t># Iterative with for</a:t>
-            </a:r>
-          </a:p>
-          <a:p>
-            <a:pPr marL="0" lvl="0" indent="0">
-              <a:spcBef>
-                <a:spcPts val="640"/>
-              </a:spcBef>
-            </a:pPr>
-            <a:r>
-              <a:rPr lang="pt-BR" dirty="0">
+              <a:t># </a:t>
+            </a:r>
+            <a:r>
+              <a:rPr lang="pt-BR" sz="1200" dirty="0" err="1">
                 <a:latin typeface="Consolas" panose="020B0609020204030204" pitchFamily="49" charset="0"/>
                 <a:ea typeface="Cambria Math" panose="02040503050406030204" pitchFamily="18" charset="0"/>
                 <a:cs typeface="Calibri" panose="020F0502020204030204" pitchFamily="34" charset="0"/>
               </a:rPr>
-              <a:t>def fib(n):</a:t>
-            </a:r>
-          </a:p>
-          <a:p>
-            <a:pPr marL="0" lvl="0" indent="0">
-              <a:spcBef>
-                <a:spcPts val="640"/>
-              </a:spcBef>
-            </a:pPr>
-            <a:r>
-              <a:rPr lang="pt-BR" dirty="0">
+              <a:t>Iterative</a:t>
+            </a:r>
+            <a:r>
+              <a:rPr lang="pt-BR" sz="1200" dirty="0">
                 <a:latin typeface="Consolas" panose="020B0609020204030204" pitchFamily="49" charset="0"/>
                 <a:ea typeface="Cambria Math" panose="02040503050406030204" pitchFamily="18" charset="0"/>
                 <a:cs typeface="Calibri" panose="020F0502020204030204" pitchFamily="34" charset="0"/>
               </a:rPr>
-              <a:t>    num_1 = 0</a:t>
-            </a:r>
-          </a:p>
-          <a:p>
-            <a:pPr marL="0" lvl="0" indent="0">
-              <a:spcBef>
-                <a:spcPts val="640"/>
-              </a:spcBef>
-            </a:pPr>
-            <a:r>
-              <a:rPr lang="pt-BR" dirty="0">
+              <a:t> </a:t>
+            </a:r>
+            <a:r>
+              <a:rPr lang="pt-BR" sz="1200" dirty="0" err="1">
                 <a:latin typeface="Consolas" panose="020B0609020204030204" pitchFamily="49" charset="0"/>
                 <a:ea typeface="Cambria Math" panose="02040503050406030204" pitchFamily="18" charset="0"/>
                 <a:cs typeface="Calibri" panose="020F0502020204030204" pitchFamily="34" charset="0"/>
               </a:rPr>
-              <a:t>    num_2 = 1</a:t>
-            </a:r>
-          </a:p>
-          <a:p>
-            <a:pPr marL="0" lvl="0" indent="0">
-              <a:spcBef>
-                <a:spcPts val="640"/>
-              </a:spcBef>
-            </a:pPr>
-            <a:r>
-              <a:rPr lang="pt-BR" dirty="0">
+              <a:t>with</a:t>
+            </a:r>
+            <a:r>
+              <a:rPr lang="pt-BR" sz="1200" dirty="0">
                 <a:latin typeface="Consolas" panose="020B0609020204030204" pitchFamily="49" charset="0"/>
                 <a:ea typeface="Cambria Math" panose="02040503050406030204" pitchFamily="18" charset="0"/>
                 <a:cs typeface="Calibri" panose="020F0502020204030204" pitchFamily="34" charset="0"/>
               </a:rPr>
-              <a:t>    for i in range(0, n):</a:t>
+              <a:t> for</a:t>
             </a:r>
           </a:p>
           <a:p>
@@ -32778,42 +32766,181 @@
               </a:spcBef>
             </a:pPr>
             <a:r>
-              <a:rPr lang="pt-BR" dirty="0">
+              <a:rPr lang="pt-BR" sz="1200" dirty="0" err="1">
                 <a:latin typeface="Consolas" panose="020B0609020204030204" pitchFamily="49" charset="0"/>
                 <a:ea typeface="Cambria Math" panose="02040503050406030204" pitchFamily="18" charset="0"/>
                 <a:cs typeface="Calibri" panose="020F0502020204030204" pitchFamily="34" charset="0"/>
               </a:rPr>
-              <a:t>        num_1 = num_2</a:t>
-            </a:r>
-          </a:p>
-          <a:p>
-            <a:pPr marL="0" lvl="0" indent="0">
-              <a:spcBef>
-                <a:spcPts val="640"/>
-              </a:spcBef>
-            </a:pPr>
-            <a:r>
-              <a:rPr lang="pt-BR" dirty="0">
+              <a:t>def</a:t>
+            </a:r>
+            <a:r>
+              <a:rPr lang="pt-BR" sz="1200" dirty="0">
                 <a:latin typeface="Consolas" panose="020B0609020204030204" pitchFamily="49" charset="0"/>
                 <a:ea typeface="Cambria Math" panose="02040503050406030204" pitchFamily="18" charset="0"/>
                 <a:cs typeface="Calibri" panose="020F0502020204030204" pitchFamily="34" charset="0"/>
               </a:rPr>
-              <a:t>        num_2 = num_1+num_2</a:t>
-            </a:r>
-          </a:p>
-          <a:p>
-            <a:pPr marL="0" lvl="0" indent="0">
-              <a:spcBef>
-                <a:spcPts val="640"/>
-              </a:spcBef>
-            </a:pPr>
-            <a:r>
-              <a:rPr lang="pt-BR" dirty="0">
+              <a:t> </a:t>
+            </a:r>
+            <a:r>
+              <a:rPr lang="pt-BR" sz="1200" dirty="0" err="1">
                 <a:latin typeface="Consolas" panose="020B0609020204030204" pitchFamily="49" charset="0"/>
                 <a:ea typeface="Cambria Math" panose="02040503050406030204" pitchFamily="18" charset="0"/>
                 <a:cs typeface="Calibri" panose="020F0502020204030204" pitchFamily="34" charset="0"/>
               </a:rPr>
-              <a:t>    return num_1</a:t>
+              <a:t>fib_for</a:t>
+            </a:r>
+            <a:r>
+              <a:rPr lang="pt-BR" sz="1200" dirty="0">
+                <a:latin typeface="Consolas" panose="020B0609020204030204" pitchFamily="49" charset="0"/>
+                <a:ea typeface="Cambria Math" panose="02040503050406030204" pitchFamily="18" charset="0"/>
+                <a:cs typeface="Calibri" panose="020F0502020204030204" pitchFamily="34" charset="0"/>
+              </a:rPr>
+              <a:t>(</a:t>
+            </a:r>
+            <a:r>
+              <a:rPr lang="pt-BR" sz="1200" dirty="0" err="1">
+                <a:latin typeface="Consolas" panose="020B0609020204030204" pitchFamily="49" charset="0"/>
+                <a:ea typeface="Cambria Math" panose="02040503050406030204" pitchFamily="18" charset="0"/>
+                <a:cs typeface="Calibri" panose="020F0502020204030204" pitchFamily="34" charset="0"/>
+              </a:rPr>
+              <a:t>n</a:t>
+            </a:r>
+            <a:r>
+              <a:rPr lang="pt-BR" sz="1200" dirty="0">
+                <a:latin typeface="Consolas" panose="020B0609020204030204" pitchFamily="49" charset="0"/>
+                <a:ea typeface="Cambria Math" panose="02040503050406030204" pitchFamily="18" charset="0"/>
+                <a:cs typeface="Calibri" panose="020F0502020204030204" pitchFamily="34" charset="0"/>
+              </a:rPr>
+              <a:t>):</a:t>
+            </a:r>
+          </a:p>
+          <a:p>
+            <a:pPr marL="0" lvl="0" indent="0">
+              <a:spcBef>
+                <a:spcPts val="640"/>
+              </a:spcBef>
+            </a:pPr>
+            <a:r>
+              <a:rPr lang="pt-BR" sz="1200" dirty="0">
+                <a:latin typeface="Consolas" panose="020B0609020204030204" pitchFamily="49" charset="0"/>
+                <a:ea typeface="Cambria Math" panose="02040503050406030204" pitchFamily="18" charset="0"/>
+                <a:cs typeface="Calibri" panose="020F0502020204030204" pitchFamily="34" charset="0"/>
+              </a:rPr>
+              <a:t>    num_1 = 0</a:t>
+            </a:r>
+          </a:p>
+          <a:p>
+            <a:pPr marL="0" lvl="0" indent="0">
+              <a:spcBef>
+                <a:spcPts val="640"/>
+              </a:spcBef>
+            </a:pPr>
+            <a:r>
+              <a:rPr lang="pt-BR" sz="1200" dirty="0">
+                <a:latin typeface="Consolas" panose="020B0609020204030204" pitchFamily="49" charset="0"/>
+                <a:ea typeface="Cambria Math" panose="02040503050406030204" pitchFamily="18" charset="0"/>
+                <a:cs typeface="Calibri" panose="020F0502020204030204" pitchFamily="34" charset="0"/>
+              </a:rPr>
+              <a:t>    num_2 = 1</a:t>
+            </a:r>
+          </a:p>
+          <a:p>
+            <a:pPr marL="0" lvl="0" indent="0">
+              <a:spcBef>
+                <a:spcPts val="640"/>
+              </a:spcBef>
+            </a:pPr>
+            <a:r>
+              <a:rPr lang="pt-BR" sz="1200" dirty="0">
+                <a:latin typeface="Consolas" panose="020B0609020204030204" pitchFamily="49" charset="0"/>
+                <a:ea typeface="Cambria Math" panose="02040503050406030204" pitchFamily="18" charset="0"/>
+                <a:cs typeface="Calibri" panose="020F0502020204030204" pitchFamily="34" charset="0"/>
+              </a:rPr>
+              <a:t>    for </a:t>
+            </a:r>
+            <a:r>
+              <a:rPr lang="pt-BR" sz="1200" dirty="0" err="1">
+                <a:latin typeface="Consolas" panose="020B0609020204030204" pitchFamily="49" charset="0"/>
+                <a:ea typeface="Cambria Math" panose="02040503050406030204" pitchFamily="18" charset="0"/>
+                <a:cs typeface="Calibri" panose="020F0502020204030204" pitchFamily="34" charset="0"/>
+              </a:rPr>
+              <a:t>i</a:t>
+            </a:r>
+            <a:r>
+              <a:rPr lang="pt-BR" sz="1200" dirty="0">
+                <a:latin typeface="Consolas" panose="020B0609020204030204" pitchFamily="49" charset="0"/>
+                <a:ea typeface="Cambria Math" panose="02040503050406030204" pitchFamily="18" charset="0"/>
+                <a:cs typeface="Calibri" panose="020F0502020204030204" pitchFamily="34" charset="0"/>
+              </a:rPr>
+              <a:t> in range(0, n-1):</a:t>
+            </a:r>
+          </a:p>
+          <a:p>
+            <a:pPr marL="0" lvl="0" indent="0">
+              <a:spcBef>
+                <a:spcPts val="640"/>
+              </a:spcBef>
+            </a:pPr>
+            <a:r>
+              <a:rPr lang="pt-BR" sz="1200" dirty="0">
+                <a:latin typeface="Consolas" panose="020B0609020204030204" pitchFamily="49" charset="0"/>
+                <a:ea typeface="Cambria Math" panose="02040503050406030204" pitchFamily="18" charset="0"/>
+                <a:cs typeface="Calibri" panose="020F0502020204030204" pitchFamily="34" charset="0"/>
+              </a:rPr>
+              <a:t>        num_1_old = num_1</a:t>
+            </a:r>
+          </a:p>
+          <a:p>
+            <a:pPr marL="0" lvl="0" indent="0">
+              <a:spcBef>
+                <a:spcPts val="640"/>
+              </a:spcBef>
+            </a:pPr>
+            <a:r>
+              <a:rPr lang="pt-BR" sz="1200" dirty="0">
+                <a:latin typeface="Consolas" panose="020B0609020204030204" pitchFamily="49" charset="0"/>
+                <a:ea typeface="Cambria Math" panose="02040503050406030204" pitchFamily="18" charset="0"/>
+                <a:cs typeface="Calibri" panose="020F0502020204030204" pitchFamily="34" charset="0"/>
+              </a:rPr>
+              <a:t>        num_1 = num_2</a:t>
+            </a:r>
+          </a:p>
+          <a:p>
+            <a:pPr marL="0" lvl="0" indent="0">
+              <a:spcBef>
+                <a:spcPts val="640"/>
+              </a:spcBef>
+            </a:pPr>
+            <a:r>
+              <a:rPr lang="pt-BR" sz="1200" dirty="0">
+                <a:latin typeface="Consolas" panose="020B0609020204030204" pitchFamily="49" charset="0"/>
+                <a:ea typeface="Cambria Math" panose="02040503050406030204" pitchFamily="18" charset="0"/>
+                <a:cs typeface="Calibri" panose="020F0502020204030204" pitchFamily="34" charset="0"/>
+              </a:rPr>
+              <a:t>        num_2 = num_1_old + num_2</a:t>
+            </a:r>
+          </a:p>
+          <a:p>
+            <a:pPr marL="0" lvl="0" indent="0">
+              <a:spcBef>
+                <a:spcPts val="640"/>
+              </a:spcBef>
+            </a:pPr>
+            <a:r>
+              <a:rPr lang="pt-BR" sz="1200" dirty="0" err="1">
+                <a:latin typeface="Consolas" panose="020B0609020204030204" pitchFamily="49" charset="0"/>
+                <a:ea typeface="Cambria Math" panose="02040503050406030204" pitchFamily="18" charset="0"/>
+                <a:cs typeface="Calibri" panose="020F0502020204030204" pitchFamily="34" charset="0"/>
+              </a:rPr>
+              <a:t>return</a:t>
+            </a:r>
+            <a:r>
+              <a:rPr lang="pt-BR" sz="1200" dirty="0">
+                <a:latin typeface="Consolas" panose="020B0609020204030204" pitchFamily="49" charset="0"/>
+                <a:ea typeface="Cambria Math" panose="02040503050406030204" pitchFamily="18" charset="0"/>
+                <a:cs typeface="Calibri" panose="020F0502020204030204" pitchFamily="34" charset="0"/>
+              </a:rPr>
+              <a:t> num_1</a:t>
             </a:r>
           </a:p>
         </p:txBody>

--- a/Slides/unit_7_prog_4.pptx
+++ b/Slides/unit_7_prog_4.pptx
@@ -5,7 +5,7 @@
     <p:sldMasterId id="2147483648" r:id="rId1"/>
   </p:sldMasterIdLst>
   <p:notesMasterIdLst>
-    <p:notesMasterId r:id="rId34"/>
+    <p:notesMasterId r:id="rId35"/>
   </p:notesMasterIdLst>
   <p:sldIdLst>
     <p:sldId id="256" r:id="rId2"/>
@@ -36,28 +36,29 @@
     <p:sldId id="592" r:id="rId27"/>
     <p:sldId id="593" r:id="rId28"/>
     <p:sldId id="594" r:id="rId29"/>
-    <p:sldId id="554" r:id="rId30"/>
-    <p:sldId id="565" r:id="rId31"/>
-    <p:sldId id="523" r:id="rId32"/>
-    <p:sldId id="461" r:id="rId33"/>
+    <p:sldId id="595" r:id="rId30"/>
+    <p:sldId id="554" r:id="rId31"/>
+    <p:sldId id="565" r:id="rId32"/>
+    <p:sldId id="523" r:id="rId33"/>
+    <p:sldId id="461" r:id="rId34"/>
   </p:sldIdLst>
   <p:sldSz cx="9144000" cy="6858000" type="screen4x3"/>
   <p:notesSz cx="7099300" cy="10234613"/>
   <p:embeddedFontLst>
     <p:embeddedFont>
       <p:font typeface="Blackadder ITC" pitchFamily="82" charset="77"/>
-      <p:regular r:id="rId35"/>
+      <p:regular r:id="rId36"/>
     </p:embeddedFont>
     <p:embeddedFont>
       <p:font typeface="Cambria Math" panose="02040503050406030204" pitchFamily="18" charset="0"/>
-      <p:regular r:id="rId36"/>
+      <p:regular r:id="rId37"/>
     </p:embeddedFont>
     <p:embeddedFont>
       <p:font typeface="Consolas" panose="020B0609020204030204" pitchFamily="49" charset="0"/>
-      <p:regular r:id="rId37"/>
-      <p:bold r:id="rId38"/>
-      <p:italic r:id="rId39"/>
-      <p:boldItalic r:id="rId40"/>
+      <p:regular r:id="rId38"/>
+      <p:bold r:id="rId39"/>
+      <p:italic r:id="rId40"/>
+      <p:boldItalic r:id="rId41"/>
     </p:embeddedFont>
   </p:embeddedFontLst>
   <p:defaultTextStyle>
@@ -305,7 +306,7 @@
       </p15:sldGuideLst>
     </p:ext>
     <p:ext uri="http://customooxmlschemas.google.com/">
-      <go:slidesCustomData xmlns:go="http://customooxmlschemas.google.com/" xmlns:ahyp="http://schemas.microsoft.com/office/drawing/2018/hyperlinkcolor" xmlns:p15="http://schemas.microsoft.com/office/powerpoint/2012/main" xmlns:p14="http://schemas.microsoft.com/office/powerpoint/2010/main" xmlns:com="http://schemas.openxmlformats.org/drawingml/2006/compatibility" xmlns:pvml="urn:schemas-microsoft-com:office:powerpoint" xmlns:v="urn:schemas-microsoft-com:vml" xmlns:o="urn:schemas-microsoft-com:office:office" xmlns:dgm="http://schemas.openxmlformats.org/drawingml/2006/diagram" xmlns:c="http://schemas.openxmlformats.org/drawingml/2006/chart" xmlns:mv="urn:schemas-microsoft-com:mac:vml" xmlns:mc="http://schemas.openxmlformats.org/markup-compatibility/2006" xmlns="" r:id="rId80" roundtripDataSignature="AMtx7milieXwv5OUJdQk1cj/252aZuXcIQ=="/>
+      <go:slidesCustomData xmlns="" xmlns:mc="http://schemas.openxmlformats.org/markup-compatibility/2006" xmlns:mv="urn:schemas-microsoft-com:mac:vml" xmlns:c="http://schemas.openxmlformats.org/drawingml/2006/chart" xmlns:dgm="http://schemas.openxmlformats.org/drawingml/2006/diagram" xmlns:o="urn:schemas-microsoft-com:office:office" xmlns:v="urn:schemas-microsoft-com:vml" xmlns:pvml="urn:schemas-microsoft-com:office:powerpoint" xmlns:com="http://schemas.openxmlformats.org/drawingml/2006/compatibility" xmlns:p14="http://schemas.microsoft.com/office/powerpoint/2010/main" xmlns:p15="http://schemas.microsoft.com/office/powerpoint/2012/main" xmlns:ahyp="http://schemas.microsoft.com/office/drawing/2018/hyperlinkcolor" xmlns:go="http://customooxmlschemas.google.com/" r:id="rId80" roundtripDataSignature="AMtx7milieXwv5OUJdQk1cj/252aZuXcIQ=="/>
     </p:ext>
   </p:extLst>
 </p:presentation>
@@ -3856,7 +3857,7 @@
               <a:buSzPts val="1400"/>
               <a:buNone/>
             </a:pPr>
-            <a:endParaRPr sz="1100" b="0" i="0" u="none" strike="noStrike" cap="none">
+            <a:endParaRPr sz="1100" b="0" i="0" u="none" strike="noStrike" cap="none" dirty="0">
               <a:solidFill>
                 <a:schemeClr val="dk1"/>
               </a:solidFill>
@@ -5893,7 +5894,13 @@
   <p:cSld>
     <p:spTree>
       <p:nvGrpSpPr>
-        <p:cNvPr id="1" name="Shape 81"/>
+        <p:cNvPr id="1" name="Shape 81">
+          <a:extLst>
+            <a:ext uri="{FF2B5EF4-FFF2-40B4-BE49-F238E27FC236}">
+              <a16:creationId xmlns:a16="http://schemas.microsoft.com/office/drawing/2014/main" id="{D79A41F9-206A-4807-48ED-457CB05D8A31}"/>
+            </a:ext>
+          </a:extLst>
+        </p:cNvPr>
         <p:cNvGrpSpPr/>
         <p:nvPr/>
       </p:nvGrpSpPr>
@@ -5907,7 +5914,13 @@
       </p:grpSpPr>
       <p:sp>
         <p:nvSpPr>
-          <p:cNvPr id="82" name="Google Shape;82;p2:notes"/>
+          <p:cNvPr id="82" name="Google Shape;82;p2:notes">
+            <a:extLst>
+              <a:ext uri="{FF2B5EF4-FFF2-40B4-BE49-F238E27FC236}">
+                <a16:creationId xmlns:a16="http://schemas.microsoft.com/office/drawing/2014/main" id="{1F4AAB4F-F93A-C3B8-F76A-098F0C06B6FC}"/>
+              </a:ext>
+            </a:extLst>
+          </p:cNvPr>
           <p:cNvSpPr>
             <a:spLocks noGrp="1" noRot="1" noChangeAspect="1"/>
           </p:cNvSpPr>
@@ -5958,7 +5971,13 @@
       </p:sp>
       <p:sp>
         <p:nvSpPr>
-          <p:cNvPr id="83" name="Google Shape;83;p2:notes"/>
+          <p:cNvPr id="83" name="Google Shape;83;p2:notes">
+            <a:extLst>
+              <a:ext uri="{FF2B5EF4-FFF2-40B4-BE49-F238E27FC236}">
+                <a16:creationId xmlns:a16="http://schemas.microsoft.com/office/drawing/2014/main" id="{E445B050-A357-AD01-C85B-0938BE9013F4}"/>
+              </a:ext>
+            </a:extLst>
+          </p:cNvPr>
           <p:cNvSpPr txBox="1">
             <a:spLocks noGrp="1"/>
           </p:cNvSpPr>
@@ -5998,11 +6017,13 @@
               <a:buSzPts val="1400"/>
               <a:buNone/>
             </a:pPr>
-            <a:endParaRPr sz="1100" b="0" i="0" u="none" strike="noStrike" cap="none" dirty="0">
+            <a:endParaRPr sz="1100" b="0" i="0" u="none" strike="noStrike" cap="none">
               <a:solidFill>
                 <a:schemeClr val="dk1"/>
               </a:solidFill>
-              <a:latin typeface="Blackadder ITC" panose="04020505051007020D02" pitchFamily="82" charset="0"/>
+              <a:latin typeface="Arial"/>
+              <a:ea typeface="Arial"/>
+              <a:cs typeface="Arial"/>
               <a:sym typeface="Arial"/>
             </a:endParaRPr>
           </a:p>
@@ -6010,7 +6031,13 @@
       </p:sp>
       <p:sp>
         <p:nvSpPr>
-          <p:cNvPr id="84" name="Google Shape;84;p2:notes"/>
+          <p:cNvPr id="84" name="Google Shape;84;p2:notes">
+            <a:extLst>
+              <a:ext uri="{FF2B5EF4-FFF2-40B4-BE49-F238E27FC236}">
+                <a16:creationId xmlns:a16="http://schemas.microsoft.com/office/drawing/2014/main" id="{F95CFFB3-A90F-C716-F0B7-4C2046AC1859}"/>
+              </a:ext>
+            </a:extLst>
+          </p:cNvPr>
           <p:cNvSpPr txBox="1">
             <a:spLocks noGrp="1"/>
           </p:cNvSpPr>
@@ -6067,7 +6094,8 @@
                 <a:effectLst/>
                 <a:uLnTx/>
                 <a:uFillTx/>
-                <a:latin typeface="Blackadder ITC" panose="04020505051007020D02" pitchFamily="82" charset="0"/>
+                <a:latin typeface="Arial"/>
+                <a:ea typeface="Arial"/>
                 <a:cs typeface="Arial"/>
                 <a:sym typeface="Arial"/>
               </a:rPr>
@@ -6092,7 +6120,7 @@
               </a:pPr>
               <a:t>28</a:t>
             </a:fld>
-            <a:endParaRPr kumimoji="0" sz="1400" b="0" i="0" u="none" strike="noStrike" kern="0" cap="none" spc="0" normalizeH="0" baseline="0" noProof="0" dirty="0">
+            <a:endParaRPr kumimoji="0" sz="1400" b="0" i="0" u="none" strike="noStrike" kern="0" cap="none" spc="0" normalizeH="0" baseline="0" noProof="0">
               <a:ln>
                 <a:noFill/>
               </a:ln>
@@ -6102,7 +6130,8 @@
               <a:effectLst/>
               <a:uLnTx/>
               <a:uFillTx/>
-              <a:latin typeface="Blackadder ITC" panose="04020505051007020D02" pitchFamily="82" charset="0"/>
+              <a:latin typeface="Arial"/>
+              <a:ea typeface="Arial"/>
               <a:cs typeface="Arial"/>
               <a:sym typeface="Arial"/>
             </a:endParaRPr>
@@ -6112,7 +6141,7 @@
     </p:spTree>
     <p:extLst>
       <p:ext uri="{BB962C8B-B14F-4D97-AF65-F5344CB8AC3E}">
-        <p14:creationId xmlns:p14="http://schemas.microsoft.com/office/powerpoint/2010/main" val="3662775490"/>
+        <p14:creationId xmlns:p14="http://schemas.microsoft.com/office/powerpoint/2010/main" val="4226879624"/>
       </p:ext>
     </p:extLst>
   </p:cSld>
@@ -6466,13 +6495,11 @@
               <a:buSzPts val="1400"/>
               <a:buNone/>
             </a:pPr>
-            <a:endParaRPr sz="1100" b="0" i="0" u="none" strike="noStrike" cap="none">
+            <a:endParaRPr sz="1100" b="0" i="0" u="none" strike="noStrike" cap="none" dirty="0">
               <a:solidFill>
                 <a:schemeClr val="dk1"/>
               </a:solidFill>
-              <a:latin typeface="Arial"/>
-              <a:ea typeface="Arial"/>
-              <a:cs typeface="Arial"/>
+              <a:latin typeface="Blackadder ITC" panose="04020505051007020D02" pitchFamily="82" charset="0"/>
               <a:sym typeface="Arial"/>
             </a:endParaRPr>
           </a:p>
@@ -6537,8 +6564,7 @@
                 <a:effectLst/>
                 <a:uLnTx/>
                 <a:uFillTx/>
-                <a:latin typeface="Arial"/>
-                <a:ea typeface="Arial"/>
+                <a:latin typeface="Blackadder ITC" panose="04020505051007020D02" pitchFamily="82" charset="0"/>
                 <a:cs typeface="Arial"/>
                 <a:sym typeface="Arial"/>
               </a:rPr>
@@ -6563,7 +6589,7 @@
               </a:pPr>
               <a:t>29</a:t>
             </a:fld>
-            <a:endParaRPr kumimoji="0" sz="1400" b="0" i="0" u="none" strike="noStrike" kern="0" cap="none" spc="0" normalizeH="0" baseline="0" noProof="0">
+            <a:endParaRPr kumimoji="0" sz="1400" b="0" i="0" u="none" strike="noStrike" kern="0" cap="none" spc="0" normalizeH="0" baseline="0" noProof="0" dirty="0">
               <a:ln>
                 <a:noFill/>
               </a:ln>
@@ -6573,8 +6599,7 @@
               <a:effectLst/>
               <a:uLnTx/>
               <a:uFillTx/>
-              <a:latin typeface="Arial"/>
-              <a:ea typeface="Arial"/>
+              <a:latin typeface="Blackadder ITC" panose="04020505051007020D02" pitchFamily="82" charset="0"/>
               <a:cs typeface="Arial"/>
               <a:sym typeface="Arial"/>
             </a:endParaRPr>
@@ -6584,7 +6609,7 @@
     </p:spTree>
     <p:extLst>
       <p:ext uri="{BB962C8B-B14F-4D97-AF65-F5344CB8AC3E}">
-        <p14:creationId xmlns:p14="http://schemas.microsoft.com/office/powerpoint/2010/main" val="2043565582"/>
+        <p14:creationId xmlns:p14="http://schemas.microsoft.com/office/powerpoint/2010/main" val="3662775490"/>
       </p:ext>
     </p:extLst>
   </p:cSld>
@@ -6704,11 +6729,13 @@
               <a:buSzPts val="1400"/>
               <a:buNone/>
             </a:pPr>
-            <a:endParaRPr sz="1100" b="0" i="0" u="none" strike="noStrike" cap="none" dirty="0">
+            <a:endParaRPr sz="1100" b="0" i="0" u="none" strike="noStrike" cap="none">
               <a:solidFill>
                 <a:schemeClr val="dk1"/>
               </a:solidFill>
-              <a:latin typeface="Blackadder ITC" panose="04020505051007020D02" pitchFamily="82" charset="0"/>
+              <a:latin typeface="Arial"/>
+              <a:ea typeface="Arial"/>
+              <a:cs typeface="Arial"/>
               <a:sym typeface="Arial"/>
             </a:endParaRPr>
           </a:p>
@@ -6773,7 +6800,8 @@
                 <a:effectLst/>
                 <a:uLnTx/>
                 <a:uFillTx/>
-                <a:latin typeface="Blackadder ITC" panose="04020505051007020D02" pitchFamily="82" charset="0"/>
+                <a:latin typeface="Arial"/>
+                <a:ea typeface="Arial"/>
                 <a:cs typeface="Arial"/>
                 <a:sym typeface="Arial"/>
               </a:rPr>
@@ -6798,6 +6826,241 @@
               </a:pPr>
               <a:t>30</a:t>
             </a:fld>
+            <a:endParaRPr kumimoji="0" sz="1400" b="0" i="0" u="none" strike="noStrike" kern="0" cap="none" spc="0" normalizeH="0" baseline="0" noProof="0">
+              <a:ln>
+                <a:noFill/>
+              </a:ln>
+              <a:solidFill>
+                <a:srgbClr val="000000"/>
+              </a:solidFill>
+              <a:effectLst/>
+              <a:uLnTx/>
+              <a:uFillTx/>
+              <a:latin typeface="Arial"/>
+              <a:ea typeface="Arial"/>
+              <a:cs typeface="Arial"/>
+              <a:sym typeface="Arial"/>
+            </a:endParaRPr>
+          </a:p>
+        </p:txBody>
+      </p:sp>
+    </p:spTree>
+    <p:extLst>
+      <p:ext uri="{BB962C8B-B14F-4D97-AF65-F5344CB8AC3E}">
+        <p14:creationId xmlns:p14="http://schemas.microsoft.com/office/powerpoint/2010/main" val="2043565582"/>
+      </p:ext>
+    </p:extLst>
+  </p:cSld>
+  <p:clrMapOvr>
+    <a:masterClrMapping/>
+  </p:clrMapOvr>
+</p:notes>
+</file>
+
+<file path=ppt/notesSlides/notesSlide32.xml><?xml version="1.0" encoding="utf-8"?>
+<p:notes xmlns:a="http://schemas.openxmlformats.org/drawingml/2006/main" xmlns:r="http://schemas.openxmlformats.org/officeDocument/2006/relationships" xmlns:p="http://schemas.openxmlformats.org/presentationml/2006/main" showMasterSp="0" showMasterPhAnim="0">
+  <p:cSld>
+    <p:spTree>
+      <p:nvGrpSpPr>
+        <p:cNvPr id="1" name="Shape 81"/>
+        <p:cNvGrpSpPr/>
+        <p:nvPr/>
+      </p:nvGrpSpPr>
+      <p:grpSpPr>
+        <a:xfrm>
+          <a:off x="0" y="0"/>
+          <a:ext cx="0" cy="0"/>
+          <a:chOff x="0" y="0"/>
+          <a:chExt cx="0" cy="0"/>
+        </a:xfrm>
+      </p:grpSpPr>
+      <p:sp>
+        <p:nvSpPr>
+          <p:cNvPr id="82" name="Google Shape;82;p2:notes"/>
+          <p:cNvSpPr>
+            <a:spLocks noGrp="1" noRot="1" noChangeAspect="1"/>
+          </p:cNvSpPr>
+          <p:nvPr>
+            <p:ph type="sldImg" idx="2"/>
+          </p:nvPr>
+        </p:nvSpPr>
+        <p:spPr>
+          <a:xfrm>
+            <a:off x="992188" y="768350"/>
+            <a:ext cx="5116512" cy="3836988"/>
+          </a:xfrm>
+          <a:custGeom>
+            <a:avLst/>
+            <a:gdLst/>
+            <a:ahLst/>
+            <a:cxnLst/>
+            <a:rect l="l" t="t" r="r" b="b"/>
+            <a:pathLst>
+              <a:path w="120000" h="120000" extrusionOk="0">
+                <a:moveTo>
+                  <a:pt x="0" y="0"/>
+                </a:moveTo>
+                <a:lnTo>
+                  <a:pt x="120000" y="0"/>
+                </a:lnTo>
+                <a:lnTo>
+                  <a:pt x="120000" y="120000"/>
+                </a:lnTo>
+                <a:lnTo>
+                  <a:pt x="0" y="120000"/>
+                </a:lnTo>
+                <a:close/>
+              </a:path>
+            </a:pathLst>
+          </a:custGeom>
+          <a:noFill/>
+          <a:ln w="9525" cap="flat" cmpd="sng">
+            <a:solidFill>
+              <a:srgbClr val="000000"/>
+            </a:solidFill>
+            <a:prstDash val="solid"/>
+            <a:miter lim="800000"/>
+            <a:headEnd type="none" w="sm" len="sm"/>
+            <a:tailEnd type="none" w="sm" len="sm"/>
+          </a:ln>
+        </p:spPr>
+      </p:sp>
+      <p:sp>
+        <p:nvSpPr>
+          <p:cNvPr id="83" name="Google Shape;83;p2:notes"/>
+          <p:cNvSpPr txBox="1">
+            <a:spLocks noGrp="1"/>
+          </p:cNvSpPr>
+          <p:nvPr>
+            <p:ph type="body" idx="1"/>
+          </p:nvPr>
+        </p:nvSpPr>
+        <p:spPr>
+          <a:xfrm>
+            <a:off x="709932" y="4861443"/>
+            <a:ext cx="5679439" cy="4605576"/>
+          </a:xfrm>
+          <a:prstGeom prst="rect">
+            <a:avLst/>
+          </a:prstGeom>
+          <a:noFill/>
+          <a:ln>
+            <a:noFill/>
+          </a:ln>
+        </p:spPr>
+        <p:txBody>
+          <a:bodyPr spcFirstLastPara="1" wrap="square" lIns="94725" tIns="94725" rIns="94725" bIns="94725" anchor="t" anchorCtr="0">
+            <a:noAutofit/>
+          </a:bodyPr>
+          <a:lstStyle/>
+          <a:p>
+            <a:pPr marL="0" marR="0" lvl="0" indent="0" algn="l" rtl="0">
+              <a:lnSpc>
+                <a:spcPct val="100000"/>
+              </a:lnSpc>
+              <a:spcBef>
+                <a:spcPts val="0"/>
+              </a:spcBef>
+              <a:spcAft>
+                <a:spcPts val="0"/>
+              </a:spcAft>
+              <a:buSzPts val="1400"/>
+              <a:buNone/>
+            </a:pPr>
+            <a:endParaRPr sz="1100" b="0" i="0" u="none" strike="noStrike" cap="none" dirty="0">
+              <a:solidFill>
+                <a:schemeClr val="dk1"/>
+              </a:solidFill>
+              <a:latin typeface="Blackadder ITC" panose="04020505051007020D02" pitchFamily="82" charset="0"/>
+              <a:sym typeface="Arial"/>
+            </a:endParaRPr>
+          </a:p>
+        </p:txBody>
+      </p:sp>
+      <p:sp>
+        <p:nvSpPr>
+          <p:cNvPr id="84" name="Google Shape;84;p2:notes"/>
+          <p:cNvSpPr txBox="1">
+            <a:spLocks noGrp="1"/>
+          </p:cNvSpPr>
+          <p:nvPr>
+            <p:ph type="sldNum" idx="12"/>
+          </p:nvPr>
+        </p:nvSpPr>
+        <p:spPr>
+          <a:xfrm>
+            <a:off x="4021294" y="9721106"/>
+            <a:ext cx="3076363" cy="511731"/>
+          </a:xfrm>
+          <a:prstGeom prst="rect">
+            <a:avLst/>
+          </a:prstGeom>
+          <a:noFill/>
+          <a:ln>
+            <a:noFill/>
+          </a:ln>
+        </p:spPr>
+        <p:txBody>
+          <a:bodyPr spcFirstLastPara="1" wrap="square" lIns="99025" tIns="49500" rIns="99025" bIns="49500" anchor="t" anchorCtr="0">
+            <a:noAutofit/>
+          </a:bodyPr>
+          <a:lstStyle/>
+          <a:p>
+            <a:pPr marL="0" marR="0" lvl="0" indent="0" algn="l" defTabSz="914400" rtl="0" eaLnBrk="1" fontAlgn="auto" latinLnBrk="0" hangingPunct="1">
+              <a:lnSpc>
+                <a:spcPct val="100000"/>
+              </a:lnSpc>
+              <a:spcBef>
+                <a:spcPts val="0"/>
+              </a:spcBef>
+              <a:spcAft>
+                <a:spcPts val="0"/>
+              </a:spcAft>
+              <a:buClr>
+                <a:srgbClr val="000000"/>
+              </a:buClr>
+              <a:buSzPts val="1400"/>
+              <a:buFont typeface="Arial"/>
+              <a:buNone/>
+              <a:tabLst/>
+              <a:defRPr/>
+            </a:pPr>
+            <a:fld id="{00000000-1234-1234-1234-123412341234}" type="slidenum">
+              <a:rPr kumimoji="0" lang="de-DE" sz="1400" b="0" i="0" u="none" strike="noStrike" kern="0" cap="none" spc="0" normalizeH="0" baseline="0" noProof="0">
+                <a:ln>
+                  <a:noFill/>
+                </a:ln>
+                <a:solidFill>
+                  <a:srgbClr val="000000"/>
+                </a:solidFill>
+                <a:effectLst/>
+                <a:uLnTx/>
+                <a:uFillTx/>
+                <a:latin typeface="Blackadder ITC" panose="04020505051007020D02" pitchFamily="82" charset="0"/>
+                <a:cs typeface="Arial"/>
+                <a:sym typeface="Arial"/>
+              </a:rPr>
+              <a:pPr marL="0" marR="0" lvl="0" indent="0" algn="l" defTabSz="914400" rtl="0" eaLnBrk="1" fontAlgn="auto" latinLnBrk="0" hangingPunct="1">
+                <a:lnSpc>
+                  <a:spcPct val="100000"/>
+                </a:lnSpc>
+                <a:spcBef>
+                  <a:spcPts val="0"/>
+                </a:spcBef>
+                <a:spcAft>
+                  <a:spcPts val="0"/>
+                </a:spcAft>
+                <a:buClr>
+                  <a:srgbClr val="000000"/>
+                </a:buClr>
+                <a:buSzPts val="1400"/>
+                <a:buFont typeface="Arial"/>
+                <a:buNone/>
+                <a:tabLst/>
+                <a:defRPr/>
+              </a:pPr>
+              <a:t>31</a:t>
+            </a:fld>
             <a:endParaRPr kumimoji="0" sz="1400" b="0" i="0" u="none" strike="noStrike" kern="0" cap="none" spc="0" normalizeH="0" baseline="0" noProof="0" dirty="0">
               <a:ln>
                 <a:noFill/>
@@ -6828,7 +7091,7 @@
 </p:notes>
 </file>
 
-<file path=ppt/notesSlides/notesSlide32.xml><?xml version="1.0" encoding="utf-8"?>
+<file path=ppt/notesSlides/notesSlide33.xml><?xml version="1.0" encoding="utf-8"?>
 <p:notes xmlns:a="http://schemas.openxmlformats.org/drawingml/2006/main" xmlns:r="http://schemas.openxmlformats.org/officeDocument/2006/relationships" xmlns:p="http://schemas.openxmlformats.org/presentationml/2006/main">
   <p:cSld>
     <p:spTree>
@@ -9544,7 +9807,7 @@
         </p:blipFill>
         <p:spPr>
           <a:xfrm>
-            <a:off x="22" y="19050"/>
+            <a:off x="10532" y="19050"/>
             <a:ext cx="9144000" cy="6858046"/>
           </a:xfrm>
           <a:prstGeom prst="rect">
@@ -33477,7 +33740,13 @@
   <p:cSld>
     <p:spTree>
       <p:nvGrpSpPr>
-        <p:cNvPr id="1" name="Shape 85"/>
+        <p:cNvPr id="1" name="Shape 85">
+          <a:extLst>
+            <a:ext uri="{FF2B5EF4-FFF2-40B4-BE49-F238E27FC236}">
+              <a16:creationId xmlns:a16="http://schemas.microsoft.com/office/drawing/2014/main" id="{ED01CE37-3C1E-0B1D-3EE8-713C8ED245CC}"/>
+            </a:ext>
+          </a:extLst>
+        </p:cNvPr>
         <p:cNvGrpSpPr/>
         <p:nvPr/>
       </p:nvGrpSpPr>
@@ -33491,14 +33760,14 @@
       </p:grpSpPr>
       <p:sp>
         <p:nvSpPr>
-          <p:cNvPr id="3" name="Titel 2">
+          <p:cNvPr id="86" name="Google Shape;86;p2">
             <a:extLst>
               <a:ext uri="{FF2B5EF4-FFF2-40B4-BE49-F238E27FC236}">
-                <a16:creationId xmlns:a16="http://schemas.microsoft.com/office/drawing/2014/main" id="{E91C8A42-093C-4664-A394-225128BADCD0}"/>
+                <a16:creationId xmlns:a16="http://schemas.microsoft.com/office/drawing/2014/main" id="{3FF3AC18-BDFA-AE91-B6CB-560CA26F6A95}"/>
               </a:ext>
             </a:extLst>
           </p:cNvPr>
-          <p:cNvSpPr>
+          <p:cNvSpPr txBox="1">
             <a:spLocks noGrp="1"/>
           </p:cNvSpPr>
           <p:nvPr>
@@ -33507,37 +33776,9 @@
         </p:nvSpPr>
         <p:spPr>
           <a:xfrm>
-            <a:off x="457200" y="2858400"/>
-            <a:ext cx="8229300" cy="1144800"/>
+            <a:off x="313944" y="274320"/>
+            <a:ext cx="8458200" cy="1143000"/>
           </a:xfrm>
-        </p:spPr>
-        <p:txBody>
-          <a:bodyPr/>
-          <a:lstStyle/>
-          <a:p>
-            <a:pPr algn="ctr"/>
-            <a:r>
-              <a:rPr lang="en-US" sz="4400" b="1" dirty="0">
-                <a:latin typeface="Calibri" panose="020F0502020204030204" pitchFamily="34" charset="0"/>
-                <a:cs typeface="Calibri" panose="020F0502020204030204" pitchFamily="34" charset="0"/>
-              </a:rPr>
-              <a:t>Examples</a:t>
-            </a:r>
-            <a:endParaRPr lang="de-AT" sz="4400" dirty="0"/>
-          </a:p>
-        </p:txBody>
-      </p:sp>
-      <p:sp>
-        <p:nvSpPr>
-          <p:cNvPr id="87" name="Google Shape;87;p2"/>
-          <p:cNvSpPr txBox="1">
-            <a:spLocks noGrp="1"/>
-          </p:cNvSpPr>
-          <p:nvPr>
-            <p:ph type="body" idx="1"/>
-          </p:nvPr>
-        </p:nvSpPr>
-        <p:spPr>
           <a:prstGeom prst="rect">
             <a:avLst/>
           </a:prstGeom>
@@ -33547,38 +33788,212 @@
           </a:ln>
         </p:spPr>
         <p:txBody>
-          <a:bodyPr spcFirstLastPara="1" wrap="square" lIns="91425" tIns="91425" rIns="91425" bIns="91425" anchor="t" anchorCtr="0">
+          <a:bodyPr spcFirstLastPara="1" wrap="square" lIns="91425" tIns="91425" rIns="91425" bIns="91425" anchor="ctr" anchorCtr="0">
             <a:noAutofit/>
           </a:bodyPr>
           <a:lstStyle/>
           <a:p>
-            <a:pPr marL="0" indent="0">
-              <a:spcBef>
-                <a:spcPts val="640"/>
-              </a:spcBef>
+            <a:pPr algn="r">
+              <a:buClr>
+                <a:schemeClr val="dk1"/>
+              </a:buClr>
+              <a:buSzPts val="2800"/>
             </a:pPr>
-            <a:endParaRPr lang="en-US" sz="1800" noProof="0" dirty="0">
-              <a:latin typeface="Calibri" panose="020F0502020204030204" pitchFamily="34" charset="0"/>
-              <a:cs typeface="Calibri" panose="020F0502020204030204" pitchFamily="34" charset="0"/>
+            <a:r>
+              <a:rPr lang="en-US" sz="2800" b="1" dirty="0">
+                <a:solidFill>
+                  <a:schemeClr val="dk1"/>
+                </a:solidFill>
+                <a:latin typeface="Calibri"/>
+                <a:cs typeface="Calibri"/>
+                <a:sym typeface="Calibri"/>
+              </a:rPr>
+              <a:t>Recursion, recursion, recursion, …</a:t>
+            </a:r>
+            <a:endParaRPr lang="en-US" noProof="0" dirty="0">
+              <a:solidFill>
+                <a:schemeClr val="dk1"/>
+              </a:solidFill>
             </a:endParaRPr>
           </a:p>
-          <a:p>
-            <a:pPr marL="0" indent="0">
-              <a:spcBef>
-                <a:spcPts val="640"/>
-              </a:spcBef>
-            </a:pPr>
-            <a:endParaRPr lang="en-US" sz="1800" noProof="0" dirty="0">
-              <a:latin typeface="Calibri" panose="020F0502020204030204" pitchFamily="34" charset="0"/>
-              <a:cs typeface="Calibri" panose="020F0502020204030204" pitchFamily="34" charset="0"/>
-            </a:endParaRPr>
+        </p:txBody>
+      </p:sp>
+      <p:pic>
+        <p:nvPicPr>
+          <p:cNvPr id="5" name="Picture 4">
+            <a:extLst>
+              <a:ext uri="{FF2B5EF4-FFF2-40B4-BE49-F238E27FC236}">
+                <a16:creationId xmlns:a16="http://schemas.microsoft.com/office/drawing/2014/main" id="{AA9D53A0-B2AD-12EB-DD6B-680CDDED92A5}"/>
+              </a:ext>
+            </a:extLst>
+          </p:cNvPr>
+          <p:cNvPicPr>
+            <a:picLocks noChangeAspect="1"/>
+          </p:cNvPicPr>
+          <p:nvPr/>
+        </p:nvPicPr>
+        <p:blipFill>
+          <a:blip r:embed="rId3"/>
+          <a:stretch>
+            <a:fillRect/>
+          </a:stretch>
+        </p:blipFill>
+        <p:spPr>
+          <a:xfrm>
+            <a:off x="9058" y="1417320"/>
+            <a:ext cx="6088566" cy="4570483"/>
+          </a:xfrm>
+          <a:prstGeom prst="rect">
+            <a:avLst/>
+          </a:prstGeom>
+        </p:spPr>
+      </p:pic>
+      <p:pic>
+        <p:nvPicPr>
+          <p:cNvPr id="3" name="Picture 2">
+            <a:extLst>
+              <a:ext uri="{FF2B5EF4-FFF2-40B4-BE49-F238E27FC236}">
+                <a16:creationId xmlns:a16="http://schemas.microsoft.com/office/drawing/2014/main" id="{83646A73-D027-93E8-0AAC-A6B6AC2DC409}"/>
+              </a:ext>
+            </a:extLst>
+          </p:cNvPr>
+          <p:cNvPicPr>
+            <a:picLocks noChangeAspect="1"/>
+          </p:cNvPicPr>
+          <p:nvPr/>
+        </p:nvPicPr>
+        <p:blipFill>
+          <a:blip r:embed="rId4"/>
+          <a:stretch>
+            <a:fillRect/>
+          </a:stretch>
+        </p:blipFill>
+        <p:spPr>
+          <a:xfrm>
+            <a:off x="5998947" y="1806477"/>
+            <a:ext cx="3135995" cy="4181326"/>
+          </a:xfrm>
+          <a:prstGeom prst="rect">
+            <a:avLst/>
+          </a:prstGeom>
+        </p:spPr>
+      </p:pic>
+      <p:sp>
+        <p:nvSpPr>
+          <p:cNvPr id="6" name="TextBox 5">
+            <a:extLst>
+              <a:ext uri="{FF2B5EF4-FFF2-40B4-BE49-F238E27FC236}">
+                <a16:creationId xmlns:a16="http://schemas.microsoft.com/office/drawing/2014/main" id="{8BFAA8E8-7682-54AF-0EA7-83B24E862428}"/>
+              </a:ext>
+            </a:extLst>
+          </p:cNvPr>
+          <p:cNvSpPr txBox="1"/>
+          <p:nvPr/>
+        </p:nvSpPr>
+        <p:spPr>
+          <a:xfrm>
+            <a:off x="880946" y="6115350"/>
+            <a:ext cx="5695790" cy="261610"/>
+          </a:xfrm>
+          <a:prstGeom prst="rect">
+            <a:avLst/>
+          </a:prstGeom>
+          <a:noFill/>
+        </p:spPr>
+        <p:txBody>
+          <a:bodyPr wrap="none" rtlCol="0">
+            <a:spAutoFit/>
+          </a:bodyPr>
+          <a:lstStyle/>
+          <a:p>
+            <a:r>
+              <a:rPr lang="en-GB" sz="1100" dirty="0"/>
+              <a:t>https://</a:t>
+            </a:r>
+            <a:r>
+              <a:rPr lang="en-GB" sz="1100" dirty="0" err="1"/>
+              <a:t>laughingsquid.com</a:t>
+            </a:r>
+            <a:r>
+              <a:rPr lang="en-GB" sz="1100" dirty="0"/>
+              <a:t>/</a:t>
+            </a:r>
+            <a:r>
+              <a:rPr lang="en-GB" sz="1100" dirty="0" err="1"/>
+              <a:t>jacob</a:t>
+            </a:r>
+            <a:r>
+              <a:rPr lang="en-GB" sz="1100" dirty="0"/>
+              <a:t>-</a:t>
+            </a:r>
+            <a:r>
+              <a:rPr lang="en-GB" sz="1100" dirty="0" err="1"/>
+              <a:t>appelbaum</a:t>
+            </a:r>
+            <a:r>
+              <a:rPr lang="en-GB" sz="1100" dirty="0"/>
+              <a:t>-</a:t>
+            </a:r>
+            <a:r>
+              <a:rPr lang="en-GB" sz="1100" dirty="0" err="1"/>
+              <a:t>donald</a:t>
+            </a:r>
+            <a:r>
+              <a:rPr lang="en-GB" sz="1100" dirty="0"/>
+              <a:t>-</a:t>
+            </a:r>
+            <a:r>
+              <a:rPr lang="en-GB" sz="1100" dirty="0" err="1"/>
+              <a:t>knuth</a:t>
+            </a:r>
+            <a:r>
+              <a:rPr lang="en-GB" sz="1100" dirty="0"/>
+              <a:t>-recursive-homeboys-principle/</a:t>
+            </a:r>
+            <a:endParaRPr lang="en-AT" sz="1100" dirty="0"/>
+          </a:p>
+        </p:txBody>
+      </p:sp>
+      <p:sp>
+        <p:nvSpPr>
+          <p:cNvPr id="8" name="TextBox 7">
+            <a:extLst>
+              <a:ext uri="{FF2B5EF4-FFF2-40B4-BE49-F238E27FC236}">
+                <a16:creationId xmlns:a16="http://schemas.microsoft.com/office/drawing/2014/main" id="{A580E3A3-85AB-3D6B-E2FE-E1E74759E8AF}"/>
+              </a:ext>
+            </a:extLst>
+          </p:cNvPr>
+          <p:cNvSpPr txBox="1"/>
+          <p:nvPr/>
+        </p:nvSpPr>
+        <p:spPr>
+          <a:xfrm>
+            <a:off x="6117285" y="1291755"/>
+            <a:ext cx="2899318" cy="430887"/>
+          </a:xfrm>
+          <a:prstGeom prst="rect">
+            <a:avLst/>
+          </a:prstGeom>
+          <a:noFill/>
+        </p:spPr>
+        <p:txBody>
+          <a:bodyPr wrap="square">
+            <a:spAutoFit/>
+          </a:bodyPr>
+          <a:lstStyle/>
+          <a:p>
+            <a:r>
+              <a:rPr lang="en-GB" sz="1050" dirty="0"/>
+              <a:t>“The C Programming Language" by Brian W. Kernighan and Dennis M. Ritchie</a:t>
+            </a:r>
+            <a:endParaRPr lang="en-AT" sz="1050" dirty="0"/>
           </a:p>
         </p:txBody>
       </p:sp>
     </p:spTree>
     <p:extLst>
       <p:ext uri="{BB962C8B-B14F-4D97-AF65-F5344CB8AC3E}">
-        <p14:creationId xmlns:p14="http://schemas.microsoft.com/office/powerpoint/2010/main" val="126790391"/>
+        <p14:creationId xmlns:p14="http://schemas.microsoft.com/office/powerpoint/2010/main" val="1444547510"/>
       </p:ext>
     </p:extLst>
   </p:cSld>
@@ -33723,6 +34138,122 @@
       </p:grpSpPr>
       <p:sp>
         <p:nvSpPr>
+          <p:cNvPr id="3" name="Titel 2">
+            <a:extLst>
+              <a:ext uri="{FF2B5EF4-FFF2-40B4-BE49-F238E27FC236}">
+                <a16:creationId xmlns:a16="http://schemas.microsoft.com/office/drawing/2014/main" id="{E91C8A42-093C-4664-A394-225128BADCD0}"/>
+              </a:ext>
+            </a:extLst>
+          </p:cNvPr>
+          <p:cNvSpPr>
+            <a:spLocks noGrp="1"/>
+          </p:cNvSpPr>
+          <p:nvPr>
+            <p:ph type="title"/>
+          </p:nvPr>
+        </p:nvSpPr>
+        <p:spPr>
+          <a:xfrm>
+            <a:off x="457200" y="2858400"/>
+            <a:ext cx="8229300" cy="1144800"/>
+          </a:xfrm>
+        </p:spPr>
+        <p:txBody>
+          <a:bodyPr/>
+          <a:lstStyle/>
+          <a:p>
+            <a:pPr algn="ctr"/>
+            <a:r>
+              <a:rPr lang="en-US" sz="4400" b="1" dirty="0">
+                <a:latin typeface="Calibri" panose="020F0502020204030204" pitchFamily="34" charset="0"/>
+                <a:cs typeface="Calibri" panose="020F0502020204030204" pitchFamily="34" charset="0"/>
+              </a:rPr>
+              <a:t>Examples</a:t>
+            </a:r>
+            <a:endParaRPr lang="de-AT" sz="4400" dirty="0"/>
+          </a:p>
+        </p:txBody>
+      </p:sp>
+      <p:sp>
+        <p:nvSpPr>
+          <p:cNvPr id="87" name="Google Shape;87;p2"/>
+          <p:cNvSpPr txBox="1">
+            <a:spLocks noGrp="1"/>
+          </p:cNvSpPr>
+          <p:nvPr>
+            <p:ph type="body" idx="1"/>
+          </p:nvPr>
+        </p:nvSpPr>
+        <p:spPr>
+          <a:prstGeom prst="rect">
+            <a:avLst/>
+          </a:prstGeom>
+          <a:noFill/>
+          <a:ln>
+            <a:noFill/>
+          </a:ln>
+        </p:spPr>
+        <p:txBody>
+          <a:bodyPr spcFirstLastPara="1" wrap="square" lIns="91425" tIns="91425" rIns="91425" bIns="91425" anchor="t" anchorCtr="0">
+            <a:noAutofit/>
+          </a:bodyPr>
+          <a:lstStyle/>
+          <a:p>
+            <a:pPr marL="0" indent="0">
+              <a:spcBef>
+                <a:spcPts val="640"/>
+              </a:spcBef>
+            </a:pPr>
+            <a:endParaRPr lang="en-US" sz="1800" noProof="0" dirty="0">
+              <a:latin typeface="Calibri" panose="020F0502020204030204" pitchFamily="34" charset="0"/>
+              <a:cs typeface="Calibri" panose="020F0502020204030204" pitchFamily="34" charset="0"/>
+            </a:endParaRPr>
+          </a:p>
+          <a:p>
+            <a:pPr marL="0" indent="0">
+              <a:spcBef>
+                <a:spcPts val="640"/>
+              </a:spcBef>
+            </a:pPr>
+            <a:endParaRPr lang="en-US" sz="1800" noProof="0" dirty="0">
+              <a:latin typeface="Calibri" panose="020F0502020204030204" pitchFamily="34" charset="0"/>
+              <a:cs typeface="Calibri" panose="020F0502020204030204" pitchFamily="34" charset="0"/>
+            </a:endParaRPr>
+          </a:p>
+        </p:txBody>
+      </p:sp>
+    </p:spTree>
+    <p:extLst>
+      <p:ext uri="{BB962C8B-B14F-4D97-AF65-F5344CB8AC3E}">
+        <p14:creationId xmlns:p14="http://schemas.microsoft.com/office/powerpoint/2010/main" val="126790391"/>
+      </p:ext>
+    </p:extLst>
+  </p:cSld>
+  <p:clrMapOvr>
+    <a:masterClrMapping/>
+  </p:clrMapOvr>
+</p:sld>
+</file>
+
+<file path=ppt/slides/slide31.xml><?xml version="1.0" encoding="utf-8"?>
+<p:sld xmlns:a="http://schemas.openxmlformats.org/drawingml/2006/main" xmlns:r="http://schemas.openxmlformats.org/officeDocument/2006/relationships" xmlns:p="http://schemas.openxmlformats.org/presentationml/2006/main">
+  <p:cSld>
+    <p:spTree>
+      <p:nvGrpSpPr>
+        <p:cNvPr id="1" name="Shape 85"/>
+        <p:cNvGrpSpPr/>
+        <p:nvPr/>
+      </p:nvGrpSpPr>
+      <p:grpSpPr>
+        <a:xfrm>
+          <a:off x="0" y="0"/>
+          <a:ext cx="0" cy="0"/>
+          <a:chOff x="0" y="0"/>
+          <a:chExt cx="0" cy="0"/>
+        </a:xfrm>
+      </p:grpSpPr>
+      <p:sp>
+        <p:nvSpPr>
           <p:cNvPr id="86" name="Google Shape;86;p2"/>
           <p:cNvSpPr txBox="1">
             <a:spLocks noGrp="1"/>
@@ -34115,7 +34646,7 @@
 </p:sld>
 </file>
 
-<file path=ppt/slides/slide31.xml><?xml version="1.0" encoding="utf-8"?>
+<file path=ppt/slides/slide32.xml><?xml version="1.0" encoding="utf-8"?>
 <p:sld xmlns:a="http://schemas.openxmlformats.org/drawingml/2006/main" xmlns:r="http://schemas.openxmlformats.org/officeDocument/2006/relationships" xmlns:p="http://schemas.openxmlformats.org/presentationml/2006/main">
   <p:cSld>
     <p:spTree>
@@ -34231,7 +34762,7 @@
 </p:sld>
 </file>
 
-<file path=ppt/slides/slide32.xml><?xml version="1.0" encoding="utf-8"?>
+<file path=ppt/slides/slide33.xml><?xml version="1.0" encoding="utf-8"?>
 <p:sld xmlns:a="http://schemas.openxmlformats.org/drawingml/2006/main" xmlns:r="http://schemas.openxmlformats.org/officeDocument/2006/relationships" xmlns:p="http://schemas.openxmlformats.org/presentationml/2006/main">
   <p:cSld>
     <p:spTree>
